--- a/energy_demand_forecast_presentation.pptx
+++ b/energy_demand_forecast_presentation.pptx
@@ -8052,7 +8052,7 @@
               </a:defRPr>
             </a:pPr>
             <a:r>
-              <a:t>고전 시계열 baseline</a:t>
+              <a:t>고전 시계열 베이스라인</a:t>
             </a:r>
           </a:p>
         </p:txBody>
@@ -10057,7 +10057,7 @@
               </a:defRPr>
             </a:pPr>
             <a:r>
-              <a:t>예측구간과 불확실성</a:t>
+              <a:t>예측 구간과 불확실성</a:t>
             </a:r>
           </a:p>
         </p:txBody>

--- a/energy_demand_forecast_presentation.pptx
+++ b/energy_demand_forecast_presentation.pptx
@@ -15,6 +15,8 @@
     <p:sldId id="263" r:id="rId14"/>
     <p:sldId id="264" r:id="rId15"/>
     <p:sldId id="265" r:id="rId16"/>
+    <p:sldId id="266" r:id="rId17"/>
+    <p:sldId id="267" r:id="rId18"/>
   </p:sldIdLst>
   <p:sldSz cx="12191695" cy="6858000" type="screen4x3"/>
   <p:notesSz cx="6858000" cy="9144000"/>
@@ -3622,6 +3624,1750 @@
     <p:bg>
       <p:bgPr>
         <a:solidFill>
+          <a:srgbClr val="FFFFFF"/>
+        </a:solidFill>
+        <a:effectLst/>
+      </p:bgPr>
+    </p:bg>
+    <p:spTree>
+      <p:nvGrpSpPr>
+        <p:cNvPr id="1" name=""/>
+        <p:cNvGrpSpPr/>
+        <p:nvPr/>
+      </p:nvGrpSpPr>
+      <p:grpSpPr/>
+      <p:sp>
+        <p:nvSpPr>
+          <p:cNvPr id="2" name="TextBox 1"/>
+          <p:cNvSpPr txBox="1"/>
+          <p:nvPr/>
+        </p:nvSpPr>
+        <p:spPr>
+          <a:xfrm>
+            <a:off x="594360" y="256032"/>
+            <a:ext cx="5303520" cy="228600"/>
+          </a:xfrm>
+          <a:prstGeom prst="rect">
+            <a:avLst/>
+          </a:prstGeom>
+          <a:noFill/>
+        </p:spPr>
+        <p:txBody>
+          <a:bodyPr wrap="square" lIns="25400" rIns="25400" anchor="ctr">
+            <a:spAutoFit/>
+          </a:bodyPr>
+          <a:lstStyle/>
+          <a:p>
+            <a:pPr algn="l">
+              <a:defRPr sz="800" b="1">
+                <a:solidFill>
+                  <a:srgbClr val="43BECA"/>
+                </a:solidFill>
+                <a:latin typeface="Apple SD Gothic Neo"/>
+              </a:defRPr>
+            </a:pPr>
+            <a:r>
+              <a:t>07 / UNCERTAINTY</a:t>
+            </a:r>
+          </a:p>
+        </p:txBody>
+      </p:sp>
+      <p:sp>
+        <p:nvSpPr>
+          <p:cNvPr id="3" name="TextBox 2"/>
+          <p:cNvSpPr txBox="1"/>
+          <p:nvPr/>
+        </p:nvSpPr>
+        <p:spPr>
+          <a:xfrm>
+            <a:off x="594360" y="530352"/>
+            <a:ext cx="10972800" cy="502920"/>
+          </a:xfrm>
+          <a:prstGeom prst="rect">
+            <a:avLst/>
+          </a:prstGeom>
+          <a:noFill/>
+        </p:spPr>
+        <p:txBody>
+          <a:bodyPr wrap="square" lIns="25400" rIns="25400" anchor="ctr">
+            <a:spAutoFit/>
+          </a:bodyPr>
+          <a:lstStyle/>
+          <a:p>
+            <a:pPr algn="l">
+              <a:defRPr sz="2500" b="1">
+                <a:solidFill>
+                  <a:srgbClr val="0F1F30"/>
+                </a:solidFill>
+                <a:latin typeface="Apple SD Gothic Neo"/>
+              </a:defRPr>
+            </a:pPr>
+            <a:r>
+              <a:t>예측 구간과 불확실성</a:t>
+            </a:r>
+          </a:p>
+        </p:txBody>
+      </p:sp>
+      <p:sp>
+        <p:nvSpPr>
+          <p:cNvPr id="4" name="Rectangle 3"/>
+          <p:cNvSpPr/>
+          <p:nvPr/>
+        </p:nvSpPr>
+        <p:spPr>
+          <a:xfrm>
+            <a:off x="621792" y="1143000"/>
+            <a:ext cx="914400" cy="45720"/>
+          </a:xfrm>
+          <a:prstGeom prst="rect">
+            <a:avLst/>
+          </a:prstGeom>
+          <a:solidFill>
+            <a:srgbClr val="43BECA"/>
+          </a:solidFill>
+          <a:ln>
+            <a:solidFill>
+              <a:srgbClr val="43BECA"/>
+            </a:solidFill>
+          </a:ln>
+        </p:spPr>
+        <p:style>
+          <a:lnRef idx="1">
+            <a:schemeClr val="accent1"/>
+          </a:lnRef>
+          <a:fillRef idx="3">
+            <a:schemeClr val="accent1"/>
+          </a:fillRef>
+          <a:effectRef idx="2">
+            <a:schemeClr val="accent1"/>
+          </a:effectRef>
+          <a:fontRef idx="minor">
+            <a:schemeClr val="lt1"/>
+          </a:fontRef>
+        </p:style>
+        <p:txBody>
+          <a:bodyPr rtlCol="0" anchor="ctr"/>
+          <a:lstStyle/>
+          <a:p>
+            <a:pPr algn="ctr"/>
+          </a:p>
+        </p:txBody>
+      </p:sp>
+      <p:pic>
+        <p:nvPicPr>
+          <p:cNvPr id="5" name="Picture 4" descr="arima_interval.png"/>
+          <p:cNvPicPr>
+            <a:picLocks noChangeAspect="1"/>
+          </p:cNvPicPr>
+          <p:nvPr/>
+        </p:nvPicPr>
+        <p:blipFill>
+          <a:blip r:embed="rId2"/>
+          <a:stretch>
+            <a:fillRect/>
+          </a:stretch>
+        </p:blipFill>
+        <p:spPr>
+          <a:xfrm>
+            <a:off x="685800" y="1417320"/>
+            <a:ext cx="3611880" cy="1828800"/>
+          </a:xfrm>
+          <a:prstGeom prst="rect">
+            <a:avLst/>
+          </a:prstGeom>
+        </p:spPr>
+      </p:pic>
+      <p:pic>
+        <p:nvPicPr>
+          <p:cNvPr id="6" name="Picture 5" descr="lstm_interval.png"/>
+          <p:cNvPicPr>
+            <a:picLocks noChangeAspect="1"/>
+          </p:cNvPicPr>
+          <p:nvPr/>
+        </p:nvPicPr>
+        <p:blipFill>
+          <a:blip r:embed="rId3"/>
+          <a:stretch>
+            <a:fillRect/>
+          </a:stretch>
+        </p:blipFill>
+        <p:spPr>
+          <a:xfrm>
+            <a:off x="4297680" y="1417320"/>
+            <a:ext cx="3611880" cy="1828800"/>
+          </a:xfrm>
+          <a:prstGeom prst="rect">
+            <a:avLst/>
+          </a:prstGeom>
+        </p:spPr>
+      </p:pic>
+      <p:pic>
+        <p:nvPicPr>
+          <p:cNvPr id="7" name="Picture 6" descr="transformer_interval.png"/>
+          <p:cNvPicPr>
+            <a:picLocks noChangeAspect="1"/>
+          </p:cNvPicPr>
+          <p:nvPr/>
+        </p:nvPicPr>
+        <p:blipFill>
+          <a:blip r:embed="rId4"/>
+          <a:stretch>
+            <a:fillRect/>
+          </a:stretch>
+        </p:blipFill>
+        <p:spPr>
+          <a:xfrm>
+            <a:off x="7909560" y="1417320"/>
+            <a:ext cx="3611880" cy="1828800"/>
+          </a:xfrm>
+          <a:prstGeom prst="rect">
+            <a:avLst/>
+          </a:prstGeom>
+        </p:spPr>
+      </p:pic>
+      <p:sp>
+        <p:nvSpPr>
+          <p:cNvPr id="8" name="TextBox 7"/>
+          <p:cNvSpPr txBox="1"/>
+          <p:nvPr/>
+        </p:nvSpPr>
+        <p:spPr>
+          <a:xfrm>
+            <a:off x="1920240" y="3383280"/>
+            <a:ext cx="1188720" cy="228600"/>
+          </a:xfrm>
+          <a:prstGeom prst="rect">
+            <a:avLst/>
+          </a:prstGeom>
+          <a:noFill/>
+        </p:spPr>
+        <p:txBody>
+          <a:bodyPr wrap="square" lIns="25400" rIns="25400" anchor="ctr">
+            <a:spAutoFit/>
+          </a:bodyPr>
+          <a:lstStyle/>
+          <a:p>
+            <a:pPr algn="ctr">
+              <a:defRPr sz="1100" b="1">
+                <a:solidFill>
+                  <a:srgbClr val="205B89"/>
+                </a:solidFill>
+                <a:latin typeface="Apple SD Gothic Neo"/>
+              </a:defRPr>
+            </a:pPr>
+            <a:r>
+              <a:t>ARIMA</a:t>
+            </a:r>
+          </a:p>
+        </p:txBody>
+      </p:sp>
+      <p:sp>
+        <p:nvSpPr>
+          <p:cNvPr id="9" name="TextBox 8"/>
+          <p:cNvSpPr txBox="1"/>
+          <p:nvPr/>
+        </p:nvSpPr>
+        <p:spPr>
+          <a:xfrm>
+            <a:off x="5577840" y="3383280"/>
+            <a:ext cx="1188720" cy="228600"/>
+          </a:xfrm>
+          <a:prstGeom prst="rect">
+            <a:avLst/>
+          </a:prstGeom>
+          <a:noFill/>
+        </p:spPr>
+        <p:txBody>
+          <a:bodyPr wrap="square" lIns="25400" rIns="25400" anchor="ctr">
+            <a:spAutoFit/>
+          </a:bodyPr>
+          <a:lstStyle/>
+          <a:p>
+            <a:pPr algn="ctr">
+              <a:defRPr sz="1100" b="1">
+                <a:solidFill>
+                  <a:srgbClr val="F09746"/>
+                </a:solidFill>
+                <a:latin typeface="Apple SD Gothic Neo"/>
+              </a:defRPr>
+            </a:pPr>
+            <a:r>
+              <a:t>LSTM</a:t>
+            </a:r>
+          </a:p>
+        </p:txBody>
+      </p:sp>
+      <p:sp>
+        <p:nvSpPr>
+          <p:cNvPr id="10" name="TextBox 9"/>
+          <p:cNvSpPr txBox="1"/>
+          <p:nvPr/>
+        </p:nvSpPr>
+        <p:spPr>
+          <a:xfrm>
+            <a:off x="9052560" y="3383280"/>
+            <a:ext cx="1371600" cy="228600"/>
+          </a:xfrm>
+          <a:prstGeom prst="rect">
+            <a:avLst/>
+          </a:prstGeom>
+          <a:noFill/>
+        </p:spPr>
+        <p:txBody>
+          <a:bodyPr wrap="square" lIns="25400" rIns="25400" anchor="ctr">
+            <a:spAutoFit/>
+          </a:bodyPr>
+          <a:lstStyle/>
+          <a:p>
+            <a:pPr algn="ctr">
+              <a:defRPr sz="1100" b="1">
+                <a:solidFill>
+                  <a:srgbClr val="43BECA"/>
+                </a:solidFill>
+                <a:latin typeface="Apple SD Gothic Neo"/>
+              </a:defRPr>
+            </a:pPr>
+            <a:r>
+              <a:t>Transformer</a:t>
+            </a:r>
+          </a:p>
+        </p:txBody>
+      </p:sp>
+      <p:sp>
+        <p:nvSpPr>
+          <p:cNvPr id="11" name="Rectangle 10"/>
+          <p:cNvSpPr/>
+          <p:nvPr/>
+        </p:nvSpPr>
+        <p:spPr>
+          <a:xfrm>
+            <a:off x="914400" y="4187952"/>
+            <a:ext cx="82296" cy="82296"/>
+          </a:xfrm>
+          <a:prstGeom prst="rect">
+            <a:avLst/>
+          </a:prstGeom>
+          <a:solidFill>
+            <a:srgbClr val="43BECA"/>
+          </a:solidFill>
+          <a:ln>
+            <a:solidFill>
+              <a:srgbClr val="43BECA"/>
+            </a:solidFill>
+          </a:ln>
+        </p:spPr>
+        <p:style>
+          <a:lnRef idx="1">
+            <a:schemeClr val="accent1"/>
+          </a:lnRef>
+          <a:fillRef idx="3">
+            <a:schemeClr val="accent1"/>
+          </a:fillRef>
+          <a:effectRef idx="2">
+            <a:schemeClr val="accent1"/>
+          </a:effectRef>
+          <a:fontRef idx="minor">
+            <a:schemeClr val="lt1"/>
+          </a:fontRef>
+        </p:style>
+        <p:txBody>
+          <a:bodyPr rtlCol="0" anchor="ctr"/>
+          <a:lstStyle/>
+          <a:p>
+            <a:pPr algn="ctr"/>
+          </a:p>
+        </p:txBody>
+      </p:sp>
+      <p:sp>
+        <p:nvSpPr>
+          <p:cNvPr id="12" name="TextBox 11"/>
+          <p:cNvSpPr txBox="1"/>
+          <p:nvPr/>
+        </p:nvSpPr>
+        <p:spPr>
+          <a:xfrm>
+            <a:off x="1115568" y="4069080"/>
+            <a:ext cx="9857232" cy="329184"/>
+          </a:xfrm>
+          <a:prstGeom prst="rect">
+            <a:avLst/>
+          </a:prstGeom>
+          <a:noFill/>
+        </p:spPr>
+        <p:txBody>
+          <a:bodyPr wrap="square" lIns="25400" rIns="25400" anchor="ctr">
+            <a:spAutoFit/>
+          </a:bodyPr>
+          <a:lstStyle/>
+          <a:p>
+            <a:pPr algn="l">
+              <a:defRPr sz="1500" b="0">
+                <a:solidFill>
+                  <a:srgbClr val="1F2B35"/>
+                </a:solidFill>
+                <a:latin typeface="Apple SD Gothic Neo"/>
+              </a:defRPr>
+            </a:pPr>
+            <a:r>
+              <a:t>95% 구간 폭은 검증 잔차 표준편차로 계산</a:t>
+            </a:r>
+          </a:p>
+        </p:txBody>
+      </p:sp>
+      <p:sp>
+        <p:nvSpPr>
+          <p:cNvPr id="13" name="Rectangle 12"/>
+          <p:cNvSpPr/>
+          <p:nvPr/>
+        </p:nvSpPr>
+        <p:spPr>
+          <a:xfrm>
+            <a:off x="914400" y="4626864"/>
+            <a:ext cx="82296" cy="82296"/>
+          </a:xfrm>
+          <a:prstGeom prst="rect">
+            <a:avLst/>
+          </a:prstGeom>
+          <a:solidFill>
+            <a:srgbClr val="43BECA"/>
+          </a:solidFill>
+          <a:ln>
+            <a:solidFill>
+              <a:srgbClr val="43BECA"/>
+            </a:solidFill>
+          </a:ln>
+        </p:spPr>
+        <p:style>
+          <a:lnRef idx="1">
+            <a:schemeClr val="accent1"/>
+          </a:lnRef>
+          <a:fillRef idx="3">
+            <a:schemeClr val="accent1"/>
+          </a:fillRef>
+          <a:effectRef idx="2">
+            <a:schemeClr val="accent1"/>
+          </a:effectRef>
+          <a:fontRef idx="minor">
+            <a:schemeClr val="lt1"/>
+          </a:fontRef>
+        </p:style>
+        <p:txBody>
+          <a:bodyPr rtlCol="0" anchor="ctr"/>
+          <a:lstStyle/>
+          <a:p>
+            <a:pPr algn="ctr"/>
+          </a:p>
+        </p:txBody>
+      </p:sp>
+      <p:sp>
+        <p:nvSpPr>
+          <p:cNvPr id="14" name="TextBox 13"/>
+          <p:cNvSpPr txBox="1"/>
+          <p:nvPr/>
+        </p:nvSpPr>
+        <p:spPr>
+          <a:xfrm>
+            <a:off x="1115568" y="4507992"/>
+            <a:ext cx="9857232" cy="329184"/>
+          </a:xfrm>
+          <a:prstGeom prst="rect">
+            <a:avLst/>
+          </a:prstGeom>
+          <a:noFill/>
+        </p:spPr>
+        <p:txBody>
+          <a:bodyPr wrap="square" lIns="25400" rIns="25400" anchor="ctr">
+            <a:spAutoFit/>
+          </a:bodyPr>
+          <a:lstStyle/>
+          <a:p>
+            <a:pPr algn="l">
+              <a:defRPr sz="1500" b="0">
+                <a:solidFill>
+                  <a:srgbClr val="1F2B35"/>
+                </a:solidFill>
+                <a:latin typeface="Apple SD Gothic Neo"/>
+              </a:defRPr>
+            </a:pPr>
+            <a:r>
+              <a:t>평가 정답을 구간 계산에 사용하지 않아 누출 방지</a:t>
+            </a:r>
+          </a:p>
+        </p:txBody>
+      </p:sp>
+      <p:sp>
+        <p:nvSpPr>
+          <p:cNvPr id="15" name="Rectangle 14"/>
+          <p:cNvSpPr/>
+          <p:nvPr/>
+        </p:nvSpPr>
+        <p:spPr>
+          <a:xfrm>
+            <a:off x="914400" y="5065776"/>
+            <a:ext cx="82296" cy="82296"/>
+          </a:xfrm>
+          <a:prstGeom prst="rect">
+            <a:avLst/>
+          </a:prstGeom>
+          <a:solidFill>
+            <a:srgbClr val="43BECA"/>
+          </a:solidFill>
+          <a:ln>
+            <a:solidFill>
+              <a:srgbClr val="43BECA"/>
+            </a:solidFill>
+          </a:ln>
+        </p:spPr>
+        <p:style>
+          <a:lnRef idx="1">
+            <a:schemeClr val="accent1"/>
+          </a:lnRef>
+          <a:fillRef idx="3">
+            <a:schemeClr val="accent1"/>
+          </a:fillRef>
+          <a:effectRef idx="2">
+            <a:schemeClr val="accent1"/>
+          </a:effectRef>
+          <a:fontRef idx="minor">
+            <a:schemeClr val="lt1"/>
+          </a:fontRef>
+        </p:style>
+        <p:txBody>
+          <a:bodyPr rtlCol="0" anchor="ctr"/>
+          <a:lstStyle/>
+          <a:p>
+            <a:pPr algn="ctr"/>
+          </a:p>
+        </p:txBody>
+      </p:sp>
+      <p:sp>
+        <p:nvSpPr>
+          <p:cNvPr id="16" name="TextBox 15"/>
+          <p:cNvSpPr txBox="1"/>
+          <p:nvPr/>
+        </p:nvSpPr>
+        <p:spPr>
+          <a:xfrm>
+            <a:off x="1115568" y="4946904"/>
+            <a:ext cx="9857232" cy="329184"/>
+          </a:xfrm>
+          <a:prstGeom prst="rect">
+            <a:avLst/>
+          </a:prstGeom>
+          <a:noFill/>
+        </p:spPr>
+        <p:txBody>
+          <a:bodyPr wrap="square" lIns="25400" rIns="25400" anchor="ctr">
+            <a:spAutoFit/>
+          </a:bodyPr>
+          <a:lstStyle/>
+          <a:p>
+            <a:pPr algn="l">
+              <a:defRPr sz="1500" b="0">
+                <a:solidFill>
+                  <a:srgbClr val="1F2B35"/>
+                </a:solidFill>
+                <a:latin typeface="Apple SD Gothic Neo"/>
+              </a:defRPr>
+            </a:pPr>
+            <a:r>
+              <a:t>포함률은 실제값이 구간 안에 들어간 비율</a:t>
+            </a:r>
+          </a:p>
+        </p:txBody>
+      </p:sp>
+      <p:sp>
+        <p:nvSpPr>
+          <p:cNvPr id="17" name="Rectangle 16"/>
+          <p:cNvSpPr/>
+          <p:nvPr/>
+        </p:nvSpPr>
+        <p:spPr>
+          <a:xfrm>
+            <a:off x="914400" y="5504688"/>
+            <a:ext cx="82296" cy="82296"/>
+          </a:xfrm>
+          <a:prstGeom prst="rect">
+            <a:avLst/>
+          </a:prstGeom>
+          <a:solidFill>
+            <a:srgbClr val="43BECA"/>
+          </a:solidFill>
+          <a:ln>
+            <a:solidFill>
+              <a:srgbClr val="43BECA"/>
+            </a:solidFill>
+          </a:ln>
+        </p:spPr>
+        <p:style>
+          <a:lnRef idx="1">
+            <a:schemeClr val="accent1"/>
+          </a:lnRef>
+          <a:fillRef idx="3">
+            <a:schemeClr val="accent1"/>
+          </a:fillRef>
+          <a:effectRef idx="2">
+            <a:schemeClr val="accent1"/>
+          </a:effectRef>
+          <a:fontRef idx="minor">
+            <a:schemeClr val="lt1"/>
+          </a:fontRef>
+        </p:style>
+        <p:txBody>
+          <a:bodyPr rtlCol="0" anchor="ctr"/>
+          <a:lstStyle/>
+          <a:p>
+            <a:pPr algn="ctr"/>
+          </a:p>
+        </p:txBody>
+      </p:sp>
+      <p:sp>
+        <p:nvSpPr>
+          <p:cNvPr id="18" name="TextBox 17"/>
+          <p:cNvSpPr txBox="1"/>
+          <p:nvPr/>
+        </p:nvSpPr>
+        <p:spPr>
+          <a:xfrm>
+            <a:off x="1115568" y="5385816"/>
+            <a:ext cx="9857232" cy="329184"/>
+          </a:xfrm>
+          <a:prstGeom prst="rect">
+            <a:avLst/>
+          </a:prstGeom>
+          <a:noFill/>
+        </p:spPr>
+        <p:txBody>
+          <a:bodyPr wrap="square" lIns="25400" rIns="25400" anchor="ctr">
+            <a:spAutoFit/>
+          </a:bodyPr>
+          <a:lstStyle/>
+          <a:p>
+            <a:pPr algn="l">
+              <a:defRPr sz="1500" b="0">
+                <a:solidFill>
+                  <a:srgbClr val="1F2B35"/>
+                </a:solidFill>
+                <a:latin typeface="Apple SD Gothic Neo"/>
+              </a:defRPr>
+            </a:pPr>
+            <a:r>
+              <a:t>현재 구간은 잔차 기반 근사이며 확률 보장은 아님</a:t>
+            </a:r>
+          </a:p>
+        </p:txBody>
+      </p:sp>
+      <p:sp>
+        <p:nvSpPr>
+          <p:cNvPr id="19" name="TextBox 18"/>
+          <p:cNvSpPr txBox="1"/>
+          <p:nvPr/>
+        </p:nvSpPr>
+        <p:spPr>
+          <a:xfrm>
+            <a:off x="594360" y="6547104"/>
+            <a:ext cx="4572000" cy="164592"/>
+          </a:xfrm>
+          <a:prstGeom prst="rect">
+            <a:avLst/>
+          </a:prstGeom>
+          <a:noFill/>
+        </p:spPr>
+        <p:txBody>
+          <a:bodyPr wrap="square" lIns="25400" rIns="25400" anchor="ctr">
+            <a:spAutoFit/>
+          </a:bodyPr>
+          <a:lstStyle/>
+          <a:p>
+            <a:pPr algn="l">
+              <a:defRPr sz="700" b="1">
+                <a:solidFill>
+                  <a:srgbClr val="607584"/>
+                </a:solidFill>
+                <a:latin typeface="Apple SD Gothic Neo"/>
+              </a:defRPr>
+            </a:pPr>
+            <a:r>
+              <a:t>ENERGY DEMAND FORECASTING  /  2025</a:t>
+            </a:r>
+          </a:p>
+        </p:txBody>
+      </p:sp>
+      <p:sp>
+        <p:nvSpPr>
+          <p:cNvPr id="20" name="TextBox 19"/>
+          <p:cNvSpPr txBox="1"/>
+          <p:nvPr/>
+        </p:nvSpPr>
+        <p:spPr>
+          <a:xfrm>
+            <a:off x="11064240" y="6519672"/>
+            <a:ext cx="502920" cy="201168"/>
+          </a:xfrm>
+          <a:prstGeom prst="rect">
+            <a:avLst/>
+          </a:prstGeom>
+          <a:noFill/>
+        </p:spPr>
+        <p:txBody>
+          <a:bodyPr wrap="square" lIns="25400" rIns="25400" anchor="ctr">
+            <a:spAutoFit/>
+          </a:bodyPr>
+          <a:lstStyle/>
+          <a:p>
+            <a:pPr algn="r">
+              <a:defRPr sz="800" b="1">
+                <a:solidFill>
+                  <a:srgbClr val="607584"/>
+                </a:solidFill>
+                <a:latin typeface="Apple SD Gothic Neo"/>
+              </a:defRPr>
+            </a:pPr>
+            <a:r>
+              <a:t>10</a:t>
+            </a:r>
+          </a:p>
+        </p:txBody>
+      </p:sp>
+    </p:spTree>
+  </p:cSld>
+  <p:clrMapOvr>
+    <a:masterClrMapping/>
+  </p:clrMapOvr>
+</p:sld>
+</file>
+
+<file path=ppt/slides/slide11.xml><?xml version="1.0" encoding="utf-8"?>
+<p:sld xmlns:a="http://schemas.openxmlformats.org/drawingml/2006/main" xmlns:p="http://schemas.openxmlformats.org/presentationml/2006/main" xmlns:r="http://schemas.openxmlformats.org/officeDocument/2006/relationships">
+  <p:cSld>
+    <p:bg>
+      <p:bgPr>
+        <a:solidFill>
+          <a:srgbClr val="EFF5F8"/>
+        </a:solidFill>
+        <a:effectLst/>
+      </p:bgPr>
+    </p:bg>
+    <p:spTree>
+      <p:nvGrpSpPr>
+        <p:cNvPr id="1" name=""/>
+        <p:cNvGrpSpPr/>
+        <p:nvPr/>
+      </p:nvGrpSpPr>
+      <p:grpSpPr/>
+      <p:sp>
+        <p:nvSpPr>
+          <p:cNvPr id="2" name="TextBox 1"/>
+          <p:cNvSpPr txBox="1"/>
+          <p:nvPr/>
+        </p:nvSpPr>
+        <p:spPr>
+          <a:xfrm>
+            <a:off x="594360" y="256032"/>
+            <a:ext cx="5303520" cy="228600"/>
+          </a:xfrm>
+          <a:prstGeom prst="rect">
+            <a:avLst/>
+          </a:prstGeom>
+          <a:noFill/>
+        </p:spPr>
+        <p:txBody>
+          <a:bodyPr wrap="square" lIns="25400" rIns="25400" anchor="ctr">
+            <a:spAutoFit/>
+          </a:bodyPr>
+          <a:lstStyle/>
+          <a:p>
+            <a:pPr algn="l">
+              <a:defRPr sz="800" b="1">
+                <a:solidFill>
+                  <a:srgbClr val="43BECA"/>
+                </a:solidFill>
+                <a:latin typeface="Apple SD Gothic Neo"/>
+              </a:defRPr>
+            </a:pPr>
+            <a:r>
+              <a:t>08 / INTERPRETATION</a:t>
+            </a:r>
+          </a:p>
+        </p:txBody>
+      </p:sp>
+      <p:sp>
+        <p:nvSpPr>
+          <p:cNvPr id="3" name="TextBox 2"/>
+          <p:cNvSpPr txBox="1"/>
+          <p:nvPr/>
+        </p:nvSpPr>
+        <p:spPr>
+          <a:xfrm>
+            <a:off x="594360" y="530352"/>
+            <a:ext cx="10972800" cy="502920"/>
+          </a:xfrm>
+          <a:prstGeom prst="rect">
+            <a:avLst/>
+          </a:prstGeom>
+          <a:noFill/>
+        </p:spPr>
+        <p:txBody>
+          <a:bodyPr wrap="square" lIns="25400" rIns="25400" anchor="ctr">
+            <a:spAutoFit/>
+          </a:bodyPr>
+          <a:lstStyle/>
+          <a:p>
+            <a:pPr algn="l">
+              <a:defRPr sz="2500" b="1">
+                <a:solidFill>
+                  <a:srgbClr val="0F1F30"/>
+                </a:solidFill>
+                <a:latin typeface="Apple SD Gothic Neo"/>
+              </a:defRPr>
+            </a:pPr>
+            <a:r>
+              <a:t>결과 해석</a:t>
+            </a:r>
+          </a:p>
+        </p:txBody>
+      </p:sp>
+      <p:sp>
+        <p:nvSpPr>
+          <p:cNvPr id="4" name="Rectangle 3"/>
+          <p:cNvSpPr/>
+          <p:nvPr/>
+        </p:nvSpPr>
+        <p:spPr>
+          <a:xfrm>
+            <a:off x="621792" y="1143000"/>
+            <a:ext cx="914400" cy="45720"/>
+          </a:xfrm>
+          <a:prstGeom prst="rect">
+            <a:avLst/>
+          </a:prstGeom>
+          <a:solidFill>
+            <a:srgbClr val="43BECA"/>
+          </a:solidFill>
+          <a:ln>
+            <a:solidFill>
+              <a:srgbClr val="43BECA"/>
+            </a:solidFill>
+          </a:ln>
+        </p:spPr>
+        <p:style>
+          <a:lnRef idx="1">
+            <a:schemeClr val="accent1"/>
+          </a:lnRef>
+          <a:fillRef idx="3">
+            <a:schemeClr val="accent1"/>
+          </a:fillRef>
+          <a:effectRef idx="2">
+            <a:schemeClr val="accent1"/>
+          </a:effectRef>
+          <a:fontRef idx="minor">
+            <a:schemeClr val="lt1"/>
+          </a:fontRef>
+        </p:style>
+        <p:txBody>
+          <a:bodyPr rtlCol="0" anchor="ctr"/>
+          <a:lstStyle/>
+          <a:p>
+            <a:pPr algn="ctr"/>
+          </a:p>
+        </p:txBody>
+      </p:sp>
+      <p:sp>
+        <p:nvSpPr>
+          <p:cNvPr id="5" name="Rounded Rectangle 4"/>
+          <p:cNvSpPr/>
+          <p:nvPr/>
+        </p:nvSpPr>
+        <p:spPr>
+          <a:xfrm>
+            <a:off x="777240" y="1554480"/>
+            <a:ext cx="5166360" cy="4114800"/>
+          </a:xfrm>
+          <a:prstGeom prst="roundRect">
+            <a:avLst/>
+          </a:prstGeom>
+          <a:solidFill>
+            <a:srgbClr val="FFFFFF"/>
+          </a:solidFill>
+          <a:ln>
+            <a:solidFill>
+              <a:srgbClr val="FFFFFF"/>
+            </a:solidFill>
+          </a:ln>
+        </p:spPr>
+        <p:style>
+          <a:lnRef idx="1">
+            <a:schemeClr val="accent1"/>
+          </a:lnRef>
+          <a:fillRef idx="3">
+            <a:schemeClr val="accent1"/>
+          </a:fillRef>
+          <a:effectRef idx="2">
+            <a:schemeClr val="accent1"/>
+          </a:effectRef>
+          <a:fontRef idx="minor">
+            <a:schemeClr val="lt1"/>
+          </a:fontRef>
+        </p:style>
+        <p:txBody>
+          <a:bodyPr rtlCol="0" anchor="ctr"/>
+          <a:lstStyle/>
+          <a:p>
+            <a:pPr algn="ctr"/>
+          </a:p>
+        </p:txBody>
+      </p:sp>
+      <p:sp>
+        <p:nvSpPr>
+          <p:cNvPr id="6" name="TextBox 5"/>
+          <p:cNvSpPr txBox="1"/>
+          <p:nvPr/>
+        </p:nvSpPr>
+        <p:spPr>
+          <a:xfrm>
+            <a:off x="1097280" y="1874519"/>
+            <a:ext cx="3931920" cy="320040"/>
+          </a:xfrm>
+          <a:prstGeom prst="rect">
+            <a:avLst/>
+          </a:prstGeom>
+          <a:noFill/>
+        </p:spPr>
+        <p:txBody>
+          <a:bodyPr wrap="square" lIns="25400" rIns="25400" anchor="ctr">
+            <a:spAutoFit/>
+          </a:bodyPr>
+          <a:lstStyle/>
+          <a:p>
+            <a:pPr algn="l">
+              <a:defRPr sz="1700" b="1">
+                <a:solidFill>
+                  <a:srgbClr val="0F1F30"/>
+                </a:solidFill>
+                <a:latin typeface="Apple SD Gothic Neo"/>
+              </a:defRPr>
+            </a:pPr>
+            <a:r>
+              <a:t>이번 실험에서 확인한 것</a:t>
+            </a:r>
+          </a:p>
+        </p:txBody>
+      </p:sp>
+      <p:sp>
+        <p:nvSpPr>
+          <p:cNvPr id="7" name="Rectangle 6"/>
+          <p:cNvSpPr/>
+          <p:nvPr/>
+        </p:nvSpPr>
+        <p:spPr>
+          <a:xfrm>
+            <a:off x="1097280" y="2633472"/>
+            <a:ext cx="82296" cy="82296"/>
+          </a:xfrm>
+          <a:prstGeom prst="rect">
+            <a:avLst/>
+          </a:prstGeom>
+          <a:solidFill>
+            <a:srgbClr val="43BECA"/>
+          </a:solidFill>
+          <a:ln>
+            <a:solidFill>
+              <a:srgbClr val="43BECA"/>
+            </a:solidFill>
+          </a:ln>
+        </p:spPr>
+        <p:style>
+          <a:lnRef idx="1">
+            <a:schemeClr val="accent1"/>
+          </a:lnRef>
+          <a:fillRef idx="3">
+            <a:schemeClr val="accent1"/>
+          </a:fillRef>
+          <a:effectRef idx="2">
+            <a:schemeClr val="accent1"/>
+          </a:effectRef>
+          <a:fontRef idx="minor">
+            <a:schemeClr val="lt1"/>
+          </a:fontRef>
+        </p:style>
+        <p:txBody>
+          <a:bodyPr rtlCol="0" anchor="ctr"/>
+          <a:lstStyle/>
+          <a:p>
+            <a:pPr algn="ctr"/>
+          </a:p>
+        </p:txBody>
+      </p:sp>
+      <p:sp>
+        <p:nvSpPr>
+          <p:cNvPr id="8" name="TextBox 7"/>
+          <p:cNvSpPr txBox="1"/>
+          <p:nvPr/>
+        </p:nvSpPr>
+        <p:spPr>
+          <a:xfrm>
+            <a:off x="1298448" y="2514600"/>
+            <a:ext cx="4142232" cy="329184"/>
+          </a:xfrm>
+          <a:prstGeom prst="rect">
+            <a:avLst/>
+          </a:prstGeom>
+          <a:noFill/>
+        </p:spPr>
+        <p:txBody>
+          <a:bodyPr wrap="square" lIns="25400" rIns="25400" anchor="ctr">
+            <a:spAutoFit/>
+          </a:bodyPr>
+          <a:lstStyle/>
+          <a:p>
+            <a:pPr algn="l">
+              <a:defRPr sz="1400" b="0">
+                <a:solidFill>
+                  <a:srgbClr val="1F2B35"/>
+                </a:solidFill>
+                <a:latin typeface="Apple SD Gothic Neo"/>
+              </a:defRPr>
+            </a:pPr>
+            <a:r>
+              <a:t>7개 지역 날씨를 전국 수요 예측에 함께 사용</a:t>
+            </a:r>
+          </a:p>
+        </p:txBody>
+      </p:sp>
+      <p:sp>
+        <p:nvSpPr>
+          <p:cNvPr id="9" name="Rectangle 8"/>
+          <p:cNvSpPr/>
+          <p:nvPr/>
+        </p:nvSpPr>
+        <p:spPr>
+          <a:xfrm>
+            <a:off x="1097280" y="3209544"/>
+            <a:ext cx="82296" cy="82296"/>
+          </a:xfrm>
+          <a:prstGeom prst="rect">
+            <a:avLst/>
+          </a:prstGeom>
+          <a:solidFill>
+            <a:srgbClr val="43BECA"/>
+          </a:solidFill>
+          <a:ln>
+            <a:solidFill>
+              <a:srgbClr val="43BECA"/>
+            </a:solidFill>
+          </a:ln>
+        </p:spPr>
+        <p:style>
+          <a:lnRef idx="1">
+            <a:schemeClr val="accent1"/>
+          </a:lnRef>
+          <a:fillRef idx="3">
+            <a:schemeClr val="accent1"/>
+          </a:fillRef>
+          <a:effectRef idx="2">
+            <a:schemeClr val="accent1"/>
+          </a:effectRef>
+          <a:fontRef idx="minor">
+            <a:schemeClr val="lt1"/>
+          </a:fontRef>
+        </p:style>
+        <p:txBody>
+          <a:bodyPr rtlCol="0" anchor="ctr"/>
+          <a:lstStyle/>
+          <a:p>
+            <a:pPr algn="ctr"/>
+          </a:p>
+        </p:txBody>
+      </p:sp>
+      <p:sp>
+        <p:nvSpPr>
+          <p:cNvPr id="10" name="TextBox 9"/>
+          <p:cNvSpPr txBox="1"/>
+          <p:nvPr/>
+        </p:nvSpPr>
+        <p:spPr>
+          <a:xfrm>
+            <a:off x="1298448" y="3090672"/>
+            <a:ext cx="4142232" cy="329184"/>
+          </a:xfrm>
+          <a:prstGeom prst="rect">
+            <a:avLst/>
+          </a:prstGeom>
+          <a:noFill/>
+        </p:spPr>
+        <p:txBody>
+          <a:bodyPr wrap="square" lIns="25400" rIns="25400" anchor="ctr">
+            <a:spAutoFit/>
+          </a:bodyPr>
+          <a:lstStyle/>
+          <a:p>
+            <a:pPr algn="l">
+              <a:defRPr sz="1400" b="0">
+                <a:solidFill>
+                  <a:srgbClr val="1F2B35"/>
+                </a:solidFill>
+                <a:latin typeface="Apple SD Gothic Neo"/>
+              </a:defRPr>
+            </a:pPr>
+            <a:r>
+              <a:t>세 모델의 시험 조건을 one-step 방식으로 통일</a:t>
+            </a:r>
+          </a:p>
+        </p:txBody>
+      </p:sp>
+      <p:sp>
+        <p:nvSpPr>
+          <p:cNvPr id="11" name="Rectangle 10"/>
+          <p:cNvSpPr/>
+          <p:nvPr/>
+        </p:nvSpPr>
+        <p:spPr>
+          <a:xfrm>
+            <a:off x="1097280" y="3785615"/>
+            <a:ext cx="82296" cy="82296"/>
+          </a:xfrm>
+          <a:prstGeom prst="rect">
+            <a:avLst/>
+          </a:prstGeom>
+          <a:solidFill>
+            <a:srgbClr val="43BECA"/>
+          </a:solidFill>
+          <a:ln>
+            <a:solidFill>
+              <a:srgbClr val="43BECA"/>
+            </a:solidFill>
+          </a:ln>
+        </p:spPr>
+        <p:style>
+          <a:lnRef idx="1">
+            <a:schemeClr val="accent1"/>
+          </a:lnRef>
+          <a:fillRef idx="3">
+            <a:schemeClr val="accent1"/>
+          </a:fillRef>
+          <a:effectRef idx="2">
+            <a:schemeClr val="accent1"/>
+          </a:effectRef>
+          <a:fontRef idx="minor">
+            <a:schemeClr val="lt1"/>
+          </a:fontRef>
+        </p:style>
+        <p:txBody>
+          <a:bodyPr rtlCol="0" anchor="ctr"/>
+          <a:lstStyle/>
+          <a:p>
+            <a:pPr algn="ctr"/>
+          </a:p>
+        </p:txBody>
+      </p:sp>
+      <p:sp>
+        <p:nvSpPr>
+          <p:cNvPr id="12" name="TextBox 11"/>
+          <p:cNvSpPr txBox="1"/>
+          <p:nvPr/>
+        </p:nvSpPr>
+        <p:spPr>
+          <a:xfrm>
+            <a:off x="1298448" y="3666744"/>
+            <a:ext cx="4142232" cy="329184"/>
+          </a:xfrm>
+          <a:prstGeom prst="rect">
+            <a:avLst/>
+          </a:prstGeom>
+          <a:noFill/>
+        </p:spPr>
+        <p:txBody>
+          <a:bodyPr wrap="square" lIns="25400" rIns="25400" anchor="ctr">
+            <a:spAutoFit/>
+          </a:bodyPr>
+          <a:lstStyle/>
+          <a:p>
+            <a:pPr algn="l">
+              <a:defRPr sz="1400" b="0">
+                <a:solidFill>
+                  <a:srgbClr val="1F2B35"/>
+                </a:solidFill>
+                <a:latin typeface="Apple SD Gothic Neo"/>
+              </a:defRPr>
+            </a:pPr>
+            <a:r>
+              <a:t>입력 스케일러는 학습 데이터에만 적합</a:t>
+            </a:r>
+          </a:p>
+        </p:txBody>
+      </p:sp>
+      <p:sp>
+        <p:nvSpPr>
+          <p:cNvPr id="13" name="Rectangle 12"/>
+          <p:cNvSpPr/>
+          <p:nvPr/>
+        </p:nvSpPr>
+        <p:spPr>
+          <a:xfrm>
+            <a:off x="1097280" y="4361688"/>
+            <a:ext cx="82296" cy="82296"/>
+          </a:xfrm>
+          <a:prstGeom prst="rect">
+            <a:avLst/>
+          </a:prstGeom>
+          <a:solidFill>
+            <a:srgbClr val="43BECA"/>
+          </a:solidFill>
+          <a:ln>
+            <a:solidFill>
+              <a:srgbClr val="43BECA"/>
+            </a:solidFill>
+          </a:ln>
+        </p:spPr>
+        <p:style>
+          <a:lnRef idx="1">
+            <a:schemeClr val="accent1"/>
+          </a:lnRef>
+          <a:fillRef idx="3">
+            <a:schemeClr val="accent1"/>
+          </a:fillRef>
+          <a:effectRef idx="2">
+            <a:schemeClr val="accent1"/>
+          </a:effectRef>
+          <a:fontRef idx="minor">
+            <a:schemeClr val="lt1"/>
+          </a:fontRef>
+        </p:style>
+        <p:txBody>
+          <a:bodyPr rtlCol="0" anchor="ctr"/>
+          <a:lstStyle/>
+          <a:p>
+            <a:pPr algn="ctr"/>
+          </a:p>
+        </p:txBody>
+      </p:sp>
+      <p:sp>
+        <p:nvSpPr>
+          <p:cNvPr id="14" name="TextBox 13"/>
+          <p:cNvSpPr txBox="1"/>
+          <p:nvPr/>
+        </p:nvSpPr>
+        <p:spPr>
+          <a:xfrm>
+            <a:off x="1298448" y="4242816"/>
+            <a:ext cx="4142232" cy="329184"/>
+          </a:xfrm>
+          <a:prstGeom prst="rect">
+            <a:avLst/>
+          </a:prstGeom>
+          <a:noFill/>
+        </p:spPr>
+        <p:txBody>
+          <a:bodyPr wrap="square" lIns="25400" rIns="25400" anchor="ctr">
+            <a:spAutoFit/>
+          </a:bodyPr>
+          <a:lstStyle/>
+          <a:p>
+            <a:pPr algn="l">
+              <a:defRPr sz="1400" b="0">
+                <a:solidFill>
+                  <a:srgbClr val="1F2B35"/>
+                </a:solidFill>
+                <a:latin typeface="Apple SD Gothic Neo"/>
+              </a:defRPr>
+            </a:pPr>
+            <a:r>
+              <a:t>LSTM·Transformer의 예측 변동성은 실제와 유사</a:t>
+            </a:r>
+          </a:p>
+        </p:txBody>
+      </p:sp>
+      <p:sp>
+        <p:nvSpPr>
+          <p:cNvPr id="15" name="Rounded Rectangle 14"/>
+          <p:cNvSpPr/>
+          <p:nvPr/>
+        </p:nvSpPr>
+        <p:spPr>
+          <a:xfrm>
+            <a:off x="6309360" y="1554480"/>
+            <a:ext cx="5074920" cy="4114800"/>
+          </a:xfrm>
+          <a:prstGeom prst="roundRect">
+            <a:avLst/>
+          </a:prstGeom>
+          <a:solidFill>
+            <a:srgbClr val="0F1F30"/>
+          </a:solidFill>
+          <a:ln>
+            <a:solidFill>
+              <a:srgbClr val="0F1F30"/>
+            </a:solidFill>
+          </a:ln>
+        </p:spPr>
+        <p:style>
+          <a:lnRef idx="1">
+            <a:schemeClr val="accent1"/>
+          </a:lnRef>
+          <a:fillRef idx="3">
+            <a:schemeClr val="accent1"/>
+          </a:fillRef>
+          <a:effectRef idx="2">
+            <a:schemeClr val="accent1"/>
+          </a:effectRef>
+          <a:fontRef idx="minor">
+            <a:schemeClr val="lt1"/>
+          </a:fontRef>
+        </p:style>
+        <p:txBody>
+          <a:bodyPr rtlCol="0" anchor="ctr"/>
+          <a:lstStyle/>
+          <a:p>
+            <a:pPr algn="ctr"/>
+          </a:p>
+        </p:txBody>
+      </p:sp>
+      <p:sp>
+        <p:nvSpPr>
+          <p:cNvPr id="16" name="TextBox 15"/>
+          <p:cNvSpPr txBox="1"/>
+          <p:nvPr/>
+        </p:nvSpPr>
+        <p:spPr>
+          <a:xfrm>
+            <a:off x="6675120" y="1874519"/>
+            <a:ext cx="4114800" cy="320040"/>
+          </a:xfrm>
+          <a:prstGeom prst="rect">
+            <a:avLst/>
+          </a:prstGeom>
+          <a:noFill/>
+        </p:spPr>
+        <p:txBody>
+          <a:bodyPr wrap="square" lIns="25400" rIns="25400" anchor="ctr">
+            <a:spAutoFit/>
+          </a:bodyPr>
+          <a:lstStyle/>
+          <a:p>
+            <a:pPr algn="l">
+              <a:defRPr sz="1700" b="1">
+                <a:solidFill>
+                  <a:srgbClr val="FFFFFF"/>
+                </a:solidFill>
+                <a:latin typeface="Apple SD Gothic Neo"/>
+              </a:defRPr>
+            </a:pPr>
+            <a:r>
+              <a:t>남은 한계와 다음 단계</a:t>
+            </a:r>
+          </a:p>
+        </p:txBody>
+      </p:sp>
+      <p:sp>
+        <p:nvSpPr>
+          <p:cNvPr id="17" name="Rectangle 16"/>
+          <p:cNvSpPr/>
+          <p:nvPr/>
+        </p:nvSpPr>
+        <p:spPr>
+          <a:xfrm>
+            <a:off x="6675120" y="2633472"/>
+            <a:ext cx="82296" cy="82296"/>
+          </a:xfrm>
+          <a:prstGeom prst="rect">
+            <a:avLst/>
+          </a:prstGeom>
+          <a:solidFill>
+            <a:srgbClr val="43BECA"/>
+          </a:solidFill>
+          <a:ln>
+            <a:solidFill>
+              <a:srgbClr val="43BECA"/>
+            </a:solidFill>
+          </a:ln>
+        </p:spPr>
+        <p:style>
+          <a:lnRef idx="1">
+            <a:schemeClr val="accent1"/>
+          </a:lnRef>
+          <a:fillRef idx="3">
+            <a:schemeClr val="accent1"/>
+          </a:fillRef>
+          <a:effectRef idx="2">
+            <a:schemeClr val="accent1"/>
+          </a:effectRef>
+          <a:fontRef idx="minor">
+            <a:schemeClr val="lt1"/>
+          </a:fontRef>
+        </p:style>
+        <p:txBody>
+          <a:bodyPr rtlCol="0" anchor="ctr"/>
+          <a:lstStyle/>
+          <a:p>
+            <a:pPr algn="ctr"/>
+          </a:p>
+        </p:txBody>
+      </p:sp>
+      <p:sp>
+        <p:nvSpPr>
+          <p:cNvPr id="18" name="TextBox 17"/>
+          <p:cNvSpPr txBox="1"/>
+          <p:nvPr/>
+        </p:nvSpPr>
+        <p:spPr>
+          <a:xfrm>
+            <a:off x="6876288" y="2514600"/>
+            <a:ext cx="3959352" cy="329184"/>
+          </a:xfrm>
+          <a:prstGeom prst="rect">
+            <a:avLst/>
+          </a:prstGeom>
+          <a:noFill/>
+        </p:spPr>
+        <p:txBody>
+          <a:bodyPr wrap="square" lIns="25400" rIns="25400" anchor="ctr">
+            <a:spAutoFit/>
+          </a:bodyPr>
+          <a:lstStyle/>
+          <a:p>
+            <a:pPr algn="l">
+              <a:defRPr sz="1400" b="0">
+                <a:solidFill>
+                  <a:srgbClr val="DCEBF1"/>
+                </a:solidFill>
+                <a:latin typeface="Apple SD Gothic Neo"/>
+              </a:defRPr>
+            </a:pPr>
+            <a:r>
+              <a:t>ARIMA의 수렴과 차수 최적화</a:t>
+            </a:r>
+          </a:p>
+        </p:txBody>
+      </p:sp>
+      <p:sp>
+        <p:nvSpPr>
+          <p:cNvPr id="19" name="Rectangle 18"/>
+          <p:cNvSpPr/>
+          <p:nvPr/>
+        </p:nvSpPr>
+        <p:spPr>
+          <a:xfrm>
+            <a:off x="6675120" y="3209544"/>
+            <a:ext cx="82296" cy="82296"/>
+          </a:xfrm>
+          <a:prstGeom prst="rect">
+            <a:avLst/>
+          </a:prstGeom>
+          <a:solidFill>
+            <a:srgbClr val="43BECA"/>
+          </a:solidFill>
+          <a:ln>
+            <a:solidFill>
+              <a:srgbClr val="43BECA"/>
+            </a:solidFill>
+          </a:ln>
+        </p:spPr>
+        <p:style>
+          <a:lnRef idx="1">
+            <a:schemeClr val="accent1"/>
+          </a:lnRef>
+          <a:fillRef idx="3">
+            <a:schemeClr val="accent1"/>
+          </a:fillRef>
+          <a:effectRef idx="2">
+            <a:schemeClr val="accent1"/>
+          </a:effectRef>
+          <a:fontRef idx="minor">
+            <a:schemeClr val="lt1"/>
+          </a:fontRef>
+        </p:style>
+        <p:txBody>
+          <a:bodyPr rtlCol="0" anchor="ctr"/>
+          <a:lstStyle/>
+          <a:p>
+            <a:pPr algn="ctr"/>
+          </a:p>
+        </p:txBody>
+      </p:sp>
+      <p:sp>
+        <p:nvSpPr>
+          <p:cNvPr id="20" name="TextBox 19"/>
+          <p:cNvSpPr txBox="1"/>
+          <p:nvPr/>
+        </p:nvSpPr>
+        <p:spPr>
+          <a:xfrm>
+            <a:off x="6876288" y="3090672"/>
+            <a:ext cx="3959352" cy="329184"/>
+          </a:xfrm>
+          <a:prstGeom prst="rect">
+            <a:avLst/>
+          </a:prstGeom>
+          <a:noFill/>
+        </p:spPr>
+        <p:txBody>
+          <a:bodyPr wrap="square" lIns="25400" rIns="25400" anchor="ctr">
+            <a:spAutoFit/>
+          </a:bodyPr>
+          <a:lstStyle/>
+          <a:p>
+            <a:pPr algn="l">
+              <a:defRPr sz="1400" b="0">
+                <a:solidFill>
+                  <a:srgbClr val="DCEBF1"/>
+                </a:solidFill>
+                <a:latin typeface="Apple SD Gothic Neo"/>
+              </a:defRPr>
+            </a:pPr>
+            <a:r>
+              <a:t>quantile loss 기반 예측구간</a:t>
+            </a:r>
+          </a:p>
+        </p:txBody>
+      </p:sp>
+      <p:sp>
+        <p:nvSpPr>
+          <p:cNvPr id="21" name="Rectangle 20"/>
+          <p:cNvSpPr/>
+          <p:nvPr/>
+        </p:nvSpPr>
+        <p:spPr>
+          <a:xfrm>
+            <a:off x="6675120" y="3785615"/>
+            <a:ext cx="82296" cy="82296"/>
+          </a:xfrm>
+          <a:prstGeom prst="rect">
+            <a:avLst/>
+          </a:prstGeom>
+          <a:solidFill>
+            <a:srgbClr val="43BECA"/>
+          </a:solidFill>
+          <a:ln>
+            <a:solidFill>
+              <a:srgbClr val="43BECA"/>
+            </a:solidFill>
+          </a:ln>
+        </p:spPr>
+        <p:style>
+          <a:lnRef idx="1">
+            <a:schemeClr val="accent1"/>
+          </a:lnRef>
+          <a:fillRef idx="3">
+            <a:schemeClr val="accent1"/>
+          </a:fillRef>
+          <a:effectRef idx="2">
+            <a:schemeClr val="accent1"/>
+          </a:effectRef>
+          <a:fontRef idx="minor">
+            <a:schemeClr val="lt1"/>
+          </a:fontRef>
+        </p:style>
+        <p:txBody>
+          <a:bodyPr rtlCol="0" anchor="ctr"/>
+          <a:lstStyle/>
+          <a:p>
+            <a:pPr algn="ctr"/>
+          </a:p>
+        </p:txBody>
+      </p:sp>
+      <p:sp>
+        <p:nvSpPr>
+          <p:cNvPr id="22" name="TextBox 21"/>
+          <p:cNvSpPr txBox="1"/>
+          <p:nvPr/>
+        </p:nvSpPr>
+        <p:spPr>
+          <a:xfrm>
+            <a:off x="6876288" y="3666744"/>
+            <a:ext cx="3959352" cy="329184"/>
+          </a:xfrm>
+          <a:prstGeom prst="rect">
+            <a:avLst/>
+          </a:prstGeom>
+          <a:noFill/>
+        </p:spPr>
+        <p:txBody>
+          <a:bodyPr wrap="square" lIns="25400" rIns="25400" anchor="ctr">
+            <a:spAutoFit/>
+          </a:bodyPr>
+          <a:lstStyle/>
+          <a:p>
+            <a:pPr algn="l">
+              <a:defRPr sz="1400" b="0">
+                <a:solidFill>
+                  <a:srgbClr val="DCEBF1"/>
+                </a:solidFill>
+                <a:latin typeface="Apple SD Gothic Neo"/>
+              </a:defRPr>
+            </a:pPr>
+            <a:r>
+              <a:t>conformal prediction으로 coverage 보정</a:t>
+            </a:r>
+          </a:p>
+        </p:txBody>
+      </p:sp>
+      <p:sp>
+        <p:nvSpPr>
+          <p:cNvPr id="23" name="Rectangle 22"/>
+          <p:cNvSpPr/>
+          <p:nvPr/>
+        </p:nvSpPr>
+        <p:spPr>
+          <a:xfrm>
+            <a:off x="6675120" y="4361688"/>
+            <a:ext cx="82296" cy="82296"/>
+          </a:xfrm>
+          <a:prstGeom prst="rect">
+            <a:avLst/>
+          </a:prstGeom>
+          <a:solidFill>
+            <a:srgbClr val="43BECA"/>
+          </a:solidFill>
+          <a:ln>
+            <a:solidFill>
+              <a:srgbClr val="43BECA"/>
+            </a:solidFill>
+          </a:ln>
+        </p:spPr>
+        <p:style>
+          <a:lnRef idx="1">
+            <a:schemeClr val="accent1"/>
+          </a:lnRef>
+          <a:fillRef idx="3">
+            <a:schemeClr val="accent1"/>
+          </a:fillRef>
+          <a:effectRef idx="2">
+            <a:schemeClr val="accent1"/>
+          </a:effectRef>
+          <a:fontRef idx="minor">
+            <a:schemeClr val="lt1"/>
+          </a:fontRef>
+        </p:style>
+        <p:txBody>
+          <a:bodyPr rtlCol="0" anchor="ctr"/>
+          <a:lstStyle/>
+          <a:p>
+            <a:pPr algn="ctr"/>
+          </a:p>
+        </p:txBody>
+      </p:sp>
+      <p:sp>
+        <p:nvSpPr>
+          <p:cNvPr id="24" name="TextBox 23"/>
+          <p:cNvSpPr txBox="1"/>
+          <p:nvPr/>
+        </p:nvSpPr>
+        <p:spPr>
+          <a:xfrm>
+            <a:off x="6876288" y="4242816"/>
+            <a:ext cx="3959352" cy="329184"/>
+          </a:xfrm>
+          <a:prstGeom prst="rect">
+            <a:avLst/>
+          </a:prstGeom>
+          <a:noFill/>
+        </p:spPr>
+        <p:txBody>
+          <a:bodyPr wrap="square" lIns="25400" rIns="25400" anchor="ctr">
+            <a:spAutoFit/>
+          </a:bodyPr>
+          <a:lstStyle/>
+          <a:p>
+            <a:pPr algn="l">
+              <a:defRPr sz="1400" b="0">
+                <a:solidFill>
+                  <a:srgbClr val="DCEBF1"/>
+                </a:solidFill>
+                <a:latin typeface="Apple SD Gothic Neo"/>
+              </a:defRPr>
+            </a:pPr>
+            <a:r>
+              <a:t>더 긴 기간과 다른 연도 데이터 검증</a:t>
+            </a:r>
+          </a:p>
+        </p:txBody>
+      </p:sp>
+      <p:sp>
+        <p:nvSpPr>
+          <p:cNvPr id="25" name="TextBox 24"/>
+          <p:cNvSpPr txBox="1"/>
+          <p:nvPr/>
+        </p:nvSpPr>
+        <p:spPr>
+          <a:xfrm>
+            <a:off x="594360" y="6547104"/>
+            <a:ext cx="4572000" cy="164592"/>
+          </a:xfrm>
+          <a:prstGeom prst="rect">
+            <a:avLst/>
+          </a:prstGeom>
+          <a:noFill/>
+        </p:spPr>
+        <p:txBody>
+          <a:bodyPr wrap="square" lIns="25400" rIns="25400" anchor="ctr">
+            <a:spAutoFit/>
+          </a:bodyPr>
+          <a:lstStyle/>
+          <a:p>
+            <a:pPr algn="l">
+              <a:defRPr sz="700" b="1">
+                <a:solidFill>
+                  <a:srgbClr val="607584"/>
+                </a:solidFill>
+                <a:latin typeface="Apple SD Gothic Neo"/>
+              </a:defRPr>
+            </a:pPr>
+            <a:r>
+              <a:t>ENERGY DEMAND FORECASTING  /  2025</a:t>
+            </a:r>
+          </a:p>
+        </p:txBody>
+      </p:sp>
+      <p:sp>
+        <p:nvSpPr>
+          <p:cNvPr id="26" name="TextBox 25"/>
+          <p:cNvSpPr txBox="1"/>
+          <p:nvPr/>
+        </p:nvSpPr>
+        <p:spPr>
+          <a:xfrm>
+            <a:off x="11064240" y="6519672"/>
+            <a:ext cx="502920" cy="201168"/>
+          </a:xfrm>
+          <a:prstGeom prst="rect">
+            <a:avLst/>
+          </a:prstGeom>
+          <a:noFill/>
+        </p:spPr>
+        <p:txBody>
+          <a:bodyPr wrap="square" lIns="25400" rIns="25400" anchor="ctr">
+            <a:spAutoFit/>
+          </a:bodyPr>
+          <a:lstStyle/>
+          <a:p>
+            <a:pPr algn="r">
+              <a:defRPr sz="800" b="1">
+                <a:solidFill>
+                  <a:srgbClr val="607584"/>
+                </a:solidFill>
+                <a:latin typeface="Apple SD Gothic Neo"/>
+              </a:defRPr>
+            </a:pPr>
+            <a:r>
+              <a:t>11</a:t>
+            </a:r>
+          </a:p>
+        </p:txBody>
+      </p:sp>
+    </p:spTree>
+  </p:cSld>
+  <p:clrMapOvr>
+    <a:masterClrMapping/>
+  </p:clrMapOvr>
+</p:sld>
+</file>
+
+<file path=ppt/slides/slide12.xml><?xml version="1.0" encoding="utf-8"?>
+<p:sld xmlns:a="http://schemas.openxmlformats.org/drawingml/2006/main" xmlns:p="http://schemas.openxmlformats.org/presentationml/2006/main" xmlns:r="http://schemas.openxmlformats.org/officeDocument/2006/relationships">
+  <p:cSld>
+    <p:bg>
+      <p:bgPr>
+        <a:solidFill>
           <a:srgbClr val="0F1F30"/>
         </a:solidFill>
         <a:effectLst/>
@@ -3853,7 +5599,7 @@
               </a:defRPr>
             </a:pPr>
             <a:r>
-              <a:t>10</a:t>
+              <a:t>12</a:t>
             </a:r>
           </a:p>
         </p:txBody>
@@ -6031,7 +7777,7 @@
               </a:defRPr>
             </a:pPr>
             <a:r>
-              <a:t>03 / PREPROCESSING</a:t>
+              <a:t>03 / EDA</a:t>
             </a:r>
           </a:p>
         </p:txBody>
@@ -6067,7 +7813,7 @@
               </a:defRPr>
             </a:pPr>
             <a:r>
-              <a:t>전처리와 데이터 누출 방지</a:t>
+              <a:t>EDA: 시간대와 지역별 기온의 특징</a:t>
             </a:r>
           </a:p>
         </p:txBody>
@@ -6117,51 +7863,30 @@
           </a:p>
         </p:txBody>
       </p:sp>
-      <p:sp>
-        <p:nvSpPr>
-          <p:cNvPr id="5" name="Rounded Rectangle 4"/>
-          <p:cNvSpPr/>
-          <p:nvPr/>
-        </p:nvSpPr>
-        <p:spPr>
-          <a:xfrm>
-            <a:off x="777240" y="1600200"/>
-            <a:ext cx="2331720" cy="3154680"/>
-          </a:xfrm>
-          <a:prstGeom prst="roundRect">
-            <a:avLst/>
-          </a:prstGeom>
-          <a:solidFill>
-            <a:srgbClr val="EFF5F8"/>
-          </a:solidFill>
-          <a:ln>
-            <a:solidFill>
-              <a:srgbClr val="EFF5F8"/>
-            </a:solidFill>
-          </a:ln>
-        </p:spPr>
-        <p:style>
-          <a:lnRef idx="1">
-            <a:schemeClr val="accent1"/>
-          </a:lnRef>
-          <a:fillRef idx="3">
-            <a:schemeClr val="accent1"/>
-          </a:fillRef>
-          <a:effectRef idx="2">
-            <a:schemeClr val="accent1"/>
-          </a:effectRef>
-          <a:fontRef idx="minor">
-            <a:schemeClr val="lt1"/>
-          </a:fontRef>
-        </p:style>
-        <p:txBody>
-          <a:bodyPr rtlCol="0" anchor="ctr"/>
-          <a:lstStyle/>
-          <a:p>
-            <a:pPr algn="ctr"/>
-          </a:p>
-        </p:txBody>
-      </p:sp>
+      <p:pic>
+        <p:nvPicPr>
+          <p:cNvPr id="5" name="Picture 4" descr="eda_overview.png"/>
+          <p:cNvPicPr>
+            <a:picLocks noChangeAspect="1"/>
+          </p:cNvPicPr>
+          <p:nvPr/>
+        </p:nvPicPr>
+        <p:blipFill>
+          <a:blip r:embed="rId2"/>
+          <a:stretch>
+            <a:fillRect/>
+          </a:stretch>
+        </p:blipFill>
+        <p:spPr>
+          <a:xfrm>
+            <a:off x="777240" y="1417320"/>
+            <a:ext cx="10698480" cy="3429000"/>
+          </a:xfrm>
+          <a:prstGeom prst="rect">
+            <a:avLst/>
+          </a:prstGeom>
+        </p:spPr>
+      </p:pic>
       <p:sp>
         <p:nvSpPr>
           <p:cNvPr id="6" name="TextBox 5"/>
@@ -6170,8 +7895,8 @@
         </p:nvSpPr>
         <p:spPr>
           <a:xfrm>
-            <a:off x="978408" y="1828800"/>
-            <a:ext cx="502920" cy="320040"/>
+            <a:off x="868680" y="5074920"/>
+            <a:ext cx="10058400" cy="594360"/>
           </a:xfrm>
           <a:prstGeom prst="rect">
             <a:avLst/>
@@ -6185,15 +7910,15 @@
           <a:lstStyle/>
           <a:p>
             <a:pPr algn="l">
-              <a:defRPr sz="1800" b="1">
-                <a:solidFill>
-                  <a:srgbClr val="43BECA"/>
-                </a:solidFill>
-                <a:latin typeface="Apple SD Gothic Neo"/>
-              </a:defRPr>
-            </a:pPr>
-            <a:r>
-              <a:t>01</a:t>
+              <a:defRPr sz="1500" b="1">
+                <a:solidFill>
+                  <a:srgbClr val="0F1F30"/>
+                </a:solidFill>
+                <a:latin typeface="Apple SD Gothic Neo"/>
+              </a:defRPr>
+            </a:pPr>
+            <a:r>
+              <a:t>시간대별 평균 수요는 뚜렷한 일중 패턴을 보입니다. 지역별 평균 기온은 지역마다 차이가 있어 전국 수요를 설명하는 다변량 입력으로 사용할 가치가 있습니다.</a:t>
             </a:r>
           </a:p>
         </p:txBody>
@@ -6206,44 +7931,8 @@
         </p:nvSpPr>
         <p:spPr>
           <a:xfrm>
-            <a:off x="978408" y="2331720"/>
-            <a:ext cx="1874519" cy="320040"/>
-          </a:xfrm>
-          <a:prstGeom prst="rect">
-            <a:avLst/>
-          </a:prstGeom>
-          <a:noFill/>
-        </p:spPr>
-        <p:txBody>
-          <a:bodyPr wrap="square" lIns="25400" rIns="25400" anchor="ctr">
-            <a:spAutoFit/>
-          </a:bodyPr>
-          <a:lstStyle/>
-          <a:p>
-            <a:pPr algn="l">
-              <a:defRPr sz="1600" b="1">
-                <a:solidFill>
-                  <a:srgbClr val="0F1F30"/>
-                </a:solidFill>
-                <a:latin typeface="Apple SD Gothic Neo"/>
-              </a:defRPr>
-            </a:pPr>
-            <a:r>
-              <a:t>시간 정렬</a:t>
-            </a:r>
-          </a:p>
-        </p:txBody>
-      </p:sp>
-      <p:sp>
-        <p:nvSpPr>
-          <p:cNvPr id="8" name="TextBox 7"/>
-          <p:cNvSpPr txBox="1"/>
-          <p:nvPr/>
-        </p:nvSpPr>
-        <p:spPr>
-          <a:xfrm>
-            <a:off x="978408" y="2971800"/>
-            <a:ext cx="1920240" cy="868680"/>
+            <a:off x="868680" y="5806440"/>
+            <a:ext cx="7772400" cy="274320"/>
           </a:xfrm>
           <a:prstGeom prst="rect">
             <a:avLst/>
@@ -6259,639 +7948,20 @@
             <a:pPr algn="l">
               <a:defRPr sz="1300" b="0">
                 <a:solidFill>
-                  <a:srgbClr val="1F2B35"/>
-                </a:solidFill>
-                <a:latin typeface="Apple SD Gothic Neo"/>
-              </a:defRPr>
-            </a:pPr>
-            <a:r>
-              <a:t>전력수요와 7개 지역 ASOS를</a:t>
-            </a:r>
-            <a:br/>
-            <a:r>
-              <a:t>datetime 기준으로 결합</a:t>
-            </a:r>
-          </a:p>
-        </p:txBody>
-      </p:sp>
-      <p:sp>
-        <p:nvSpPr>
-          <p:cNvPr id="9" name="TextBox 8"/>
-          <p:cNvSpPr txBox="1"/>
-          <p:nvPr/>
-        </p:nvSpPr>
-        <p:spPr>
-          <a:xfrm>
-            <a:off x="3172968" y="2834640"/>
-            <a:ext cx="320040" cy="365760"/>
-          </a:xfrm>
-          <a:prstGeom prst="rect">
-            <a:avLst/>
-          </a:prstGeom>
-          <a:noFill/>
-        </p:spPr>
-        <p:txBody>
-          <a:bodyPr wrap="square" lIns="25400" rIns="25400" anchor="ctr">
-            <a:spAutoFit/>
-          </a:bodyPr>
-          <a:lstStyle/>
-          <a:p>
-            <a:pPr algn="ctr">
-              <a:defRPr sz="2200" b="1">
-                <a:solidFill>
-                  <a:srgbClr val="F09746"/>
-                </a:solidFill>
-                <a:latin typeface="Apple SD Gothic Neo"/>
-              </a:defRPr>
-            </a:pPr>
-            <a:r>
-              <a:t>→</a:t>
-            </a:r>
-          </a:p>
-        </p:txBody>
-      </p:sp>
-      <p:sp>
-        <p:nvSpPr>
-          <p:cNvPr id="10" name="Rounded Rectangle 9"/>
-          <p:cNvSpPr/>
-          <p:nvPr/>
-        </p:nvSpPr>
-        <p:spPr>
-          <a:xfrm>
-            <a:off x="3520440" y="1600200"/>
-            <a:ext cx="2331720" cy="3154680"/>
-          </a:xfrm>
-          <a:prstGeom prst="roundRect">
-            <a:avLst/>
-          </a:prstGeom>
-          <a:solidFill>
-            <a:srgbClr val="EFF5F8"/>
-          </a:solidFill>
-          <a:ln>
-            <a:solidFill>
-              <a:srgbClr val="EFF5F8"/>
-            </a:solidFill>
-          </a:ln>
-        </p:spPr>
-        <p:style>
-          <a:lnRef idx="1">
-            <a:schemeClr val="accent1"/>
-          </a:lnRef>
-          <a:fillRef idx="3">
-            <a:schemeClr val="accent1"/>
-          </a:fillRef>
-          <a:effectRef idx="2">
-            <a:schemeClr val="accent1"/>
-          </a:effectRef>
-          <a:fontRef idx="minor">
-            <a:schemeClr val="lt1"/>
-          </a:fontRef>
-        </p:style>
-        <p:txBody>
-          <a:bodyPr rtlCol="0" anchor="ctr"/>
-          <a:lstStyle/>
-          <a:p>
-            <a:pPr algn="ctr"/>
-          </a:p>
-        </p:txBody>
-      </p:sp>
-      <p:sp>
-        <p:nvSpPr>
-          <p:cNvPr id="11" name="TextBox 10"/>
-          <p:cNvSpPr txBox="1"/>
-          <p:nvPr/>
-        </p:nvSpPr>
-        <p:spPr>
-          <a:xfrm>
-            <a:off x="3721608" y="1828800"/>
-            <a:ext cx="502920" cy="320040"/>
-          </a:xfrm>
-          <a:prstGeom prst="rect">
-            <a:avLst/>
-          </a:prstGeom>
-          <a:noFill/>
-        </p:spPr>
-        <p:txBody>
-          <a:bodyPr wrap="square" lIns="25400" rIns="25400" anchor="ctr">
-            <a:spAutoFit/>
-          </a:bodyPr>
-          <a:lstStyle/>
-          <a:p>
-            <a:pPr algn="l">
-              <a:defRPr sz="1800" b="1">
-                <a:solidFill>
-                  <a:srgbClr val="43BECA"/>
-                </a:solidFill>
-                <a:latin typeface="Apple SD Gothic Neo"/>
-              </a:defRPr>
-            </a:pPr>
-            <a:r>
-              <a:t>02</a:t>
-            </a:r>
-          </a:p>
-        </p:txBody>
-      </p:sp>
-      <p:sp>
-        <p:nvSpPr>
-          <p:cNvPr id="12" name="TextBox 11"/>
-          <p:cNvSpPr txBox="1"/>
-          <p:nvPr/>
-        </p:nvSpPr>
-        <p:spPr>
-          <a:xfrm>
-            <a:off x="3721608" y="2331720"/>
-            <a:ext cx="1874519" cy="320040"/>
-          </a:xfrm>
-          <a:prstGeom prst="rect">
-            <a:avLst/>
-          </a:prstGeom>
-          <a:noFill/>
-        </p:spPr>
-        <p:txBody>
-          <a:bodyPr wrap="square" lIns="25400" rIns="25400" anchor="ctr">
-            <a:spAutoFit/>
-          </a:bodyPr>
-          <a:lstStyle/>
-          <a:p>
-            <a:pPr algn="l">
-              <a:defRPr sz="1600" b="1">
-                <a:solidFill>
-                  <a:srgbClr val="0F1F30"/>
-                </a:solidFill>
-                <a:latin typeface="Apple SD Gothic Neo"/>
-              </a:defRPr>
-            </a:pPr>
-            <a:r>
-              <a:t>결측 처리</a:t>
-            </a:r>
-          </a:p>
-        </p:txBody>
-      </p:sp>
-      <p:sp>
-        <p:nvSpPr>
-          <p:cNvPr id="13" name="TextBox 12"/>
-          <p:cNvSpPr txBox="1"/>
-          <p:nvPr/>
-        </p:nvSpPr>
-        <p:spPr>
-          <a:xfrm>
-            <a:off x="3721608" y="2971800"/>
-            <a:ext cx="1920240" cy="868680"/>
-          </a:xfrm>
-          <a:prstGeom prst="rect">
-            <a:avLst/>
-          </a:prstGeom>
-          <a:noFill/>
-        </p:spPr>
-        <p:txBody>
-          <a:bodyPr wrap="square" lIns="25400" rIns="25400" anchor="ctr">
-            <a:spAutoFit/>
-          </a:bodyPr>
-          <a:lstStyle/>
-          <a:p>
-            <a:pPr algn="l">
-              <a:defRPr sz="1300" b="0">
-                <a:solidFill>
-                  <a:srgbClr val="1F2B35"/>
-                </a:solidFill>
-                <a:latin typeface="Apple SD Gothic Neo"/>
-              </a:defRPr>
-            </a:pPr>
-            <a:r>
-              <a:t>강수·일조·일사 = 0</a:t>
-            </a:r>
-            <a:br/>
-            <a:r>
-              <a:t>기온·풍속·습도 = 지역별 보간</a:t>
-            </a:r>
-          </a:p>
-        </p:txBody>
-      </p:sp>
-      <p:sp>
-        <p:nvSpPr>
-          <p:cNvPr id="14" name="TextBox 13"/>
-          <p:cNvSpPr txBox="1"/>
-          <p:nvPr/>
-        </p:nvSpPr>
-        <p:spPr>
-          <a:xfrm>
-            <a:off x="5916168" y="2834640"/>
-            <a:ext cx="320040" cy="365760"/>
-          </a:xfrm>
-          <a:prstGeom prst="rect">
-            <a:avLst/>
-          </a:prstGeom>
-          <a:noFill/>
-        </p:spPr>
-        <p:txBody>
-          <a:bodyPr wrap="square" lIns="25400" rIns="25400" anchor="ctr">
-            <a:spAutoFit/>
-          </a:bodyPr>
-          <a:lstStyle/>
-          <a:p>
-            <a:pPr algn="ctr">
-              <a:defRPr sz="2200" b="1">
-                <a:solidFill>
-                  <a:srgbClr val="F09746"/>
-                </a:solidFill>
-                <a:latin typeface="Apple SD Gothic Neo"/>
-              </a:defRPr>
-            </a:pPr>
-            <a:r>
-              <a:t>→</a:t>
-            </a:r>
-          </a:p>
-        </p:txBody>
-      </p:sp>
-      <p:sp>
-        <p:nvSpPr>
-          <p:cNvPr id="15" name="Rounded Rectangle 14"/>
-          <p:cNvSpPr/>
-          <p:nvPr/>
-        </p:nvSpPr>
-        <p:spPr>
-          <a:xfrm>
-            <a:off x="6263640" y="1600200"/>
-            <a:ext cx="2331720" cy="3154680"/>
-          </a:xfrm>
-          <a:prstGeom prst="roundRect">
-            <a:avLst/>
-          </a:prstGeom>
-          <a:solidFill>
-            <a:srgbClr val="EFF5F8"/>
-          </a:solidFill>
-          <a:ln>
-            <a:solidFill>
-              <a:srgbClr val="EFF5F8"/>
-            </a:solidFill>
-          </a:ln>
-        </p:spPr>
-        <p:style>
-          <a:lnRef idx="1">
-            <a:schemeClr val="accent1"/>
-          </a:lnRef>
-          <a:fillRef idx="3">
-            <a:schemeClr val="accent1"/>
-          </a:fillRef>
-          <a:effectRef idx="2">
-            <a:schemeClr val="accent1"/>
-          </a:effectRef>
-          <a:fontRef idx="minor">
-            <a:schemeClr val="lt1"/>
-          </a:fontRef>
-        </p:style>
-        <p:txBody>
-          <a:bodyPr rtlCol="0" anchor="ctr"/>
-          <a:lstStyle/>
-          <a:p>
-            <a:pPr algn="ctr"/>
-          </a:p>
-        </p:txBody>
-      </p:sp>
-      <p:sp>
-        <p:nvSpPr>
-          <p:cNvPr id="16" name="TextBox 15"/>
-          <p:cNvSpPr txBox="1"/>
-          <p:nvPr/>
-        </p:nvSpPr>
-        <p:spPr>
-          <a:xfrm>
-            <a:off x="6464807" y="1828800"/>
-            <a:ext cx="502920" cy="320040"/>
-          </a:xfrm>
-          <a:prstGeom prst="rect">
-            <a:avLst/>
-          </a:prstGeom>
-          <a:noFill/>
-        </p:spPr>
-        <p:txBody>
-          <a:bodyPr wrap="square" lIns="25400" rIns="25400" anchor="ctr">
-            <a:spAutoFit/>
-          </a:bodyPr>
-          <a:lstStyle/>
-          <a:p>
-            <a:pPr algn="l">
-              <a:defRPr sz="1800" b="1">
-                <a:solidFill>
-                  <a:srgbClr val="43BECA"/>
-                </a:solidFill>
-                <a:latin typeface="Apple SD Gothic Neo"/>
-              </a:defRPr>
-            </a:pPr>
-            <a:r>
-              <a:t>03</a:t>
-            </a:r>
-          </a:p>
-        </p:txBody>
-      </p:sp>
-      <p:sp>
-        <p:nvSpPr>
-          <p:cNvPr id="17" name="TextBox 16"/>
-          <p:cNvSpPr txBox="1"/>
-          <p:nvPr/>
-        </p:nvSpPr>
-        <p:spPr>
-          <a:xfrm>
-            <a:off x="6464807" y="2331720"/>
-            <a:ext cx="1874519" cy="320040"/>
-          </a:xfrm>
-          <a:prstGeom prst="rect">
-            <a:avLst/>
-          </a:prstGeom>
-          <a:noFill/>
-        </p:spPr>
-        <p:txBody>
-          <a:bodyPr wrap="square" lIns="25400" rIns="25400" anchor="ctr">
-            <a:spAutoFit/>
-          </a:bodyPr>
-          <a:lstStyle/>
-          <a:p>
-            <a:pPr algn="l">
-              <a:defRPr sz="1600" b="1">
-                <a:solidFill>
-                  <a:srgbClr val="0F1F30"/>
-                </a:solidFill>
-                <a:latin typeface="Apple SD Gothic Neo"/>
-              </a:defRPr>
-            </a:pPr>
-            <a:r>
-              <a:t>주기 특성</a:t>
-            </a:r>
-          </a:p>
-        </p:txBody>
-      </p:sp>
-      <p:sp>
-        <p:nvSpPr>
-          <p:cNvPr id="18" name="TextBox 17"/>
-          <p:cNvSpPr txBox="1"/>
-          <p:nvPr/>
-        </p:nvSpPr>
-        <p:spPr>
-          <a:xfrm>
-            <a:off x="6464807" y="2971800"/>
-            <a:ext cx="1920240" cy="868680"/>
-          </a:xfrm>
-          <a:prstGeom prst="rect">
-            <a:avLst/>
-          </a:prstGeom>
-          <a:noFill/>
-        </p:spPr>
-        <p:txBody>
-          <a:bodyPr wrap="square" lIns="25400" rIns="25400" anchor="ctr">
-            <a:spAutoFit/>
-          </a:bodyPr>
-          <a:lstStyle/>
-          <a:p>
-            <a:pPr algn="l">
-              <a:defRPr sz="1300" b="0">
-                <a:solidFill>
-                  <a:srgbClr val="1F2B35"/>
-                </a:solidFill>
-                <a:latin typeface="Apple SD Gothic Neo"/>
-              </a:defRPr>
-            </a:pPr>
-            <a:r>
-              <a:t>hour / weekday / month를</a:t>
-            </a:r>
-            <a:br/>
-            <a:r>
-              <a:t>sin·cos 특성으로 변환</a:t>
-            </a:r>
-          </a:p>
-        </p:txBody>
-      </p:sp>
-      <p:sp>
-        <p:nvSpPr>
-          <p:cNvPr id="19" name="TextBox 18"/>
-          <p:cNvSpPr txBox="1"/>
-          <p:nvPr/>
-        </p:nvSpPr>
-        <p:spPr>
-          <a:xfrm>
-            <a:off x="8659367" y="2834640"/>
-            <a:ext cx="320040" cy="365760"/>
-          </a:xfrm>
-          <a:prstGeom prst="rect">
-            <a:avLst/>
-          </a:prstGeom>
-          <a:noFill/>
-        </p:spPr>
-        <p:txBody>
-          <a:bodyPr wrap="square" lIns="25400" rIns="25400" anchor="ctr">
-            <a:spAutoFit/>
-          </a:bodyPr>
-          <a:lstStyle/>
-          <a:p>
-            <a:pPr algn="ctr">
-              <a:defRPr sz="2200" b="1">
-                <a:solidFill>
-                  <a:srgbClr val="F09746"/>
-                </a:solidFill>
-                <a:latin typeface="Apple SD Gothic Neo"/>
-              </a:defRPr>
-            </a:pPr>
-            <a:r>
-              <a:t>→</a:t>
-            </a:r>
-          </a:p>
-        </p:txBody>
-      </p:sp>
-      <p:sp>
-        <p:nvSpPr>
-          <p:cNvPr id="20" name="Rounded Rectangle 19"/>
-          <p:cNvSpPr/>
-          <p:nvPr/>
-        </p:nvSpPr>
-        <p:spPr>
-          <a:xfrm>
-            <a:off x="9006840" y="1600200"/>
-            <a:ext cx="2331720" cy="3154680"/>
-          </a:xfrm>
-          <a:prstGeom prst="roundRect">
-            <a:avLst/>
-          </a:prstGeom>
-          <a:solidFill>
-            <a:srgbClr val="EFF5F8"/>
-          </a:solidFill>
-          <a:ln>
-            <a:solidFill>
-              <a:srgbClr val="EFF5F8"/>
-            </a:solidFill>
-          </a:ln>
-        </p:spPr>
-        <p:style>
-          <a:lnRef idx="1">
-            <a:schemeClr val="accent1"/>
-          </a:lnRef>
-          <a:fillRef idx="3">
-            <a:schemeClr val="accent1"/>
-          </a:fillRef>
-          <a:effectRef idx="2">
-            <a:schemeClr val="accent1"/>
-          </a:effectRef>
-          <a:fontRef idx="minor">
-            <a:schemeClr val="lt1"/>
-          </a:fontRef>
-        </p:style>
-        <p:txBody>
-          <a:bodyPr rtlCol="0" anchor="ctr"/>
-          <a:lstStyle/>
-          <a:p>
-            <a:pPr algn="ctr"/>
-          </a:p>
-        </p:txBody>
-      </p:sp>
-      <p:sp>
-        <p:nvSpPr>
-          <p:cNvPr id="21" name="TextBox 20"/>
-          <p:cNvSpPr txBox="1"/>
-          <p:nvPr/>
-        </p:nvSpPr>
-        <p:spPr>
-          <a:xfrm>
-            <a:off x="9208008" y="1828800"/>
-            <a:ext cx="502920" cy="320040"/>
-          </a:xfrm>
-          <a:prstGeom prst="rect">
-            <a:avLst/>
-          </a:prstGeom>
-          <a:noFill/>
-        </p:spPr>
-        <p:txBody>
-          <a:bodyPr wrap="square" lIns="25400" rIns="25400" anchor="ctr">
-            <a:spAutoFit/>
-          </a:bodyPr>
-          <a:lstStyle/>
-          <a:p>
-            <a:pPr algn="l">
-              <a:defRPr sz="1800" b="1">
-                <a:solidFill>
-                  <a:srgbClr val="43BECA"/>
-                </a:solidFill>
-                <a:latin typeface="Apple SD Gothic Neo"/>
-              </a:defRPr>
-            </a:pPr>
-            <a:r>
-              <a:t>04</a:t>
-            </a:r>
-          </a:p>
-        </p:txBody>
-      </p:sp>
-      <p:sp>
-        <p:nvSpPr>
-          <p:cNvPr id="22" name="TextBox 21"/>
-          <p:cNvSpPr txBox="1"/>
-          <p:nvPr/>
-        </p:nvSpPr>
-        <p:spPr>
-          <a:xfrm>
-            <a:off x="9208008" y="2331720"/>
-            <a:ext cx="1874519" cy="320040"/>
-          </a:xfrm>
-          <a:prstGeom prst="rect">
-            <a:avLst/>
-          </a:prstGeom>
-          <a:noFill/>
-        </p:spPr>
-        <p:txBody>
-          <a:bodyPr wrap="square" lIns="25400" rIns="25400" anchor="ctr">
-            <a:spAutoFit/>
-          </a:bodyPr>
-          <a:lstStyle/>
-          <a:p>
-            <a:pPr algn="l">
-              <a:defRPr sz="1600" b="1">
-                <a:solidFill>
-                  <a:srgbClr val="0F1F30"/>
-                </a:solidFill>
-                <a:latin typeface="Apple SD Gothic Neo"/>
-              </a:defRPr>
-            </a:pPr>
-            <a:r>
-              <a:t>스케일링</a:t>
-            </a:r>
-          </a:p>
-        </p:txBody>
-      </p:sp>
-      <p:sp>
-        <p:nvSpPr>
-          <p:cNvPr id="23" name="TextBox 22"/>
-          <p:cNvSpPr txBox="1"/>
-          <p:nvPr/>
-        </p:nvSpPr>
-        <p:spPr>
-          <a:xfrm>
-            <a:off x="9208008" y="2971800"/>
-            <a:ext cx="1920240" cy="868680"/>
-          </a:xfrm>
-          <a:prstGeom prst="rect">
-            <a:avLst/>
-          </a:prstGeom>
-          <a:noFill/>
-        </p:spPr>
-        <p:txBody>
-          <a:bodyPr wrap="square" lIns="25400" rIns="25400" anchor="ctr">
-            <a:spAutoFit/>
-          </a:bodyPr>
-          <a:lstStyle/>
-          <a:p>
-            <a:pPr algn="l">
-              <a:defRPr sz="1300" b="0">
-                <a:solidFill>
-                  <a:srgbClr val="1F2B35"/>
-                </a:solidFill>
-                <a:latin typeface="Apple SD Gothic Neo"/>
-              </a:defRPr>
-            </a:pPr>
-            <a:r>
-              <a:t>Scaler는 학습 구간에만</a:t>
-            </a:r>
-            <a:br/>
-            <a:r>
-              <a:t>적합해 평가 정보 차단</a:t>
-            </a:r>
-          </a:p>
-        </p:txBody>
-      </p:sp>
-      <p:sp>
-        <p:nvSpPr>
-          <p:cNvPr id="24" name="TextBox 23"/>
-          <p:cNvSpPr txBox="1"/>
-          <p:nvPr/>
-        </p:nvSpPr>
-        <p:spPr>
-          <a:xfrm>
-            <a:off x="822960" y="5532120"/>
-            <a:ext cx="8046720" cy="365760"/>
-          </a:xfrm>
-          <a:prstGeom prst="rect">
-            <a:avLst/>
-          </a:prstGeom>
-          <a:noFill/>
-        </p:spPr>
-        <p:txBody>
-          <a:bodyPr wrap="square" lIns="25400" rIns="25400" anchor="ctr">
-            <a:spAutoFit/>
-          </a:bodyPr>
-          <a:lstStyle/>
-          <a:p>
-            <a:pPr algn="l">
-              <a:defRPr sz="1500" b="1">
-                <a:solidFill>
-                  <a:srgbClr val="0F1F30"/>
-                </a:solidFill>
-                <a:latin typeface="Apple SD Gothic Neo"/>
-              </a:defRPr>
-            </a:pPr>
-            <a:r>
-              <a:t>결측을 무조건 보간하지 않고 변수의 물리적 의미에 맞춰 처리했습니다.</a:t>
-            </a:r>
-          </a:p>
-        </p:txBody>
-      </p:sp>
-      <p:sp>
-        <p:nvSpPr>
-          <p:cNvPr id="25" name="TextBox 24"/>
+                  <a:srgbClr val="607584"/>
+                </a:solidFill>
+                <a:latin typeface="Apple SD Gothic Neo"/>
+              </a:defRPr>
+            </a:pPr>
+            <a:r>
+              <a:t>EDA는 모델 선택과 입력 변수 설계의 근거로 사용했습니다.</a:t>
+            </a:r>
+          </a:p>
+        </p:txBody>
+      </p:sp>
+      <p:sp>
+        <p:nvSpPr>
+          <p:cNvPr id="8" name="TextBox 7"/>
           <p:cNvSpPr txBox="1"/>
           <p:nvPr/>
         </p:nvSpPr>
@@ -6927,7 +7997,7 @@
       </p:sp>
       <p:sp>
         <p:nvSpPr>
-          <p:cNvPr id="26" name="TextBox 25"/>
+          <p:cNvPr id="9" name="TextBox 8"/>
           <p:cNvSpPr txBox="1"/>
           <p:nvPr/>
         </p:nvSpPr>
@@ -6970,6 +8040,993 @@
 </file>
 
 <file path=ppt/slides/slide5.xml><?xml version="1.0" encoding="utf-8"?>
+<p:sld xmlns:a="http://schemas.openxmlformats.org/drawingml/2006/main" xmlns:p="http://schemas.openxmlformats.org/presentationml/2006/main" xmlns:r="http://schemas.openxmlformats.org/officeDocument/2006/relationships">
+  <p:cSld>
+    <p:bg>
+      <p:bgPr>
+        <a:solidFill>
+          <a:srgbClr val="FFFFFF"/>
+        </a:solidFill>
+        <a:effectLst/>
+      </p:bgPr>
+    </p:bg>
+    <p:spTree>
+      <p:nvGrpSpPr>
+        <p:cNvPr id="1" name=""/>
+        <p:cNvGrpSpPr/>
+        <p:nvPr/>
+      </p:nvGrpSpPr>
+      <p:grpSpPr/>
+      <p:sp>
+        <p:nvSpPr>
+          <p:cNvPr id="2" name="TextBox 1"/>
+          <p:cNvSpPr txBox="1"/>
+          <p:nvPr/>
+        </p:nvSpPr>
+        <p:spPr>
+          <a:xfrm>
+            <a:off x="594360" y="256032"/>
+            <a:ext cx="5303520" cy="228600"/>
+          </a:xfrm>
+          <a:prstGeom prst="rect">
+            <a:avLst/>
+          </a:prstGeom>
+          <a:noFill/>
+        </p:spPr>
+        <p:txBody>
+          <a:bodyPr wrap="square" lIns="25400" rIns="25400" anchor="ctr">
+            <a:spAutoFit/>
+          </a:bodyPr>
+          <a:lstStyle/>
+          <a:p>
+            <a:pPr algn="l">
+              <a:defRPr sz="800" b="1">
+                <a:solidFill>
+                  <a:srgbClr val="43BECA"/>
+                </a:solidFill>
+                <a:latin typeface="Apple SD Gothic Neo"/>
+              </a:defRPr>
+            </a:pPr>
+            <a:r>
+              <a:t>03 / PREPROCESSING</a:t>
+            </a:r>
+          </a:p>
+        </p:txBody>
+      </p:sp>
+      <p:sp>
+        <p:nvSpPr>
+          <p:cNvPr id="3" name="TextBox 2"/>
+          <p:cNvSpPr txBox="1"/>
+          <p:nvPr/>
+        </p:nvSpPr>
+        <p:spPr>
+          <a:xfrm>
+            <a:off x="594360" y="530352"/>
+            <a:ext cx="10972800" cy="502920"/>
+          </a:xfrm>
+          <a:prstGeom prst="rect">
+            <a:avLst/>
+          </a:prstGeom>
+          <a:noFill/>
+        </p:spPr>
+        <p:txBody>
+          <a:bodyPr wrap="square" lIns="25400" rIns="25400" anchor="ctr">
+            <a:spAutoFit/>
+          </a:bodyPr>
+          <a:lstStyle/>
+          <a:p>
+            <a:pPr algn="l">
+              <a:defRPr sz="2500" b="1">
+                <a:solidFill>
+                  <a:srgbClr val="0F1F30"/>
+                </a:solidFill>
+                <a:latin typeface="Apple SD Gothic Neo"/>
+              </a:defRPr>
+            </a:pPr>
+            <a:r>
+              <a:t>전처리와 데이터 누출 방지</a:t>
+            </a:r>
+          </a:p>
+        </p:txBody>
+      </p:sp>
+      <p:sp>
+        <p:nvSpPr>
+          <p:cNvPr id="4" name="Rectangle 3"/>
+          <p:cNvSpPr/>
+          <p:nvPr/>
+        </p:nvSpPr>
+        <p:spPr>
+          <a:xfrm>
+            <a:off x="621792" y="1143000"/>
+            <a:ext cx="914400" cy="45720"/>
+          </a:xfrm>
+          <a:prstGeom prst="rect">
+            <a:avLst/>
+          </a:prstGeom>
+          <a:solidFill>
+            <a:srgbClr val="43BECA"/>
+          </a:solidFill>
+          <a:ln>
+            <a:solidFill>
+              <a:srgbClr val="43BECA"/>
+            </a:solidFill>
+          </a:ln>
+        </p:spPr>
+        <p:style>
+          <a:lnRef idx="1">
+            <a:schemeClr val="accent1"/>
+          </a:lnRef>
+          <a:fillRef idx="3">
+            <a:schemeClr val="accent1"/>
+          </a:fillRef>
+          <a:effectRef idx="2">
+            <a:schemeClr val="accent1"/>
+          </a:effectRef>
+          <a:fontRef idx="minor">
+            <a:schemeClr val="lt1"/>
+          </a:fontRef>
+        </p:style>
+        <p:txBody>
+          <a:bodyPr rtlCol="0" anchor="ctr"/>
+          <a:lstStyle/>
+          <a:p>
+            <a:pPr algn="ctr"/>
+          </a:p>
+        </p:txBody>
+      </p:sp>
+      <p:sp>
+        <p:nvSpPr>
+          <p:cNvPr id="5" name="Rounded Rectangle 4"/>
+          <p:cNvSpPr/>
+          <p:nvPr/>
+        </p:nvSpPr>
+        <p:spPr>
+          <a:xfrm>
+            <a:off x="777240" y="1600200"/>
+            <a:ext cx="2331720" cy="3154680"/>
+          </a:xfrm>
+          <a:prstGeom prst="roundRect">
+            <a:avLst/>
+          </a:prstGeom>
+          <a:solidFill>
+            <a:srgbClr val="EFF5F8"/>
+          </a:solidFill>
+          <a:ln>
+            <a:solidFill>
+              <a:srgbClr val="EFF5F8"/>
+            </a:solidFill>
+          </a:ln>
+        </p:spPr>
+        <p:style>
+          <a:lnRef idx="1">
+            <a:schemeClr val="accent1"/>
+          </a:lnRef>
+          <a:fillRef idx="3">
+            <a:schemeClr val="accent1"/>
+          </a:fillRef>
+          <a:effectRef idx="2">
+            <a:schemeClr val="accent1"/>
+          </a:effectRef>
+          <a:fontRef idx="minor">
+            <a:schemeClr val="lt1"/>
+          </a:fontRef>
+        </p:style>
+        <p:txBody>
+          <a:bodyPr rtlCol="0" anchor="ctr"/>
+          <a:lstStyle/>
+          <a:p>
+            <a:pPr algn="ctr"/>
+          </a:p>
+        </p:txBody>
+      </p:sp>
+      <p:sp>
+        <p:nvSpPr>
+          <p:cNvPr id="6" name="TextBox 5"/>
+          <p:cNvSpPr txBox="1"/>
+          <p:nvPr/>
+        </p:nvSpPr>
+        <p:spPr>
+          <a:xfrm>
+            <a:off x="978408" y="1828800"/>
+            <a:ext cx="502920" cy="320040"/>
+          </a:xfrm>
+          <a:prstGeom prst="rect">
+            <a:avLst/>
+          </a:prstGeom>
+          <a:noFill/>
+        </p:spPr>
+        <p:txBody>
+          <a:bodyPr wrap="square" lIns="25400" rIns="25400" anchor="ctr">
+            <a:spAutoFit/>
+          </a:bodyPr>
+          <a:lstStyle/>
+          <a:p>
+            <a:pPr algn="l">
+              <a:defRPr sz="1800" b="1">
+                <a:solidFill>
+                  <a:srgbClr val="43BECA"/>
+                </a:solidFill>
+                <a:latin typeface="Apple SD Gothic Neo"/>
+              </a:defRPr>
+            </a:pPr>
+            <a:r>
+              <a:t>01</a:t>
+            </a:r>
+          </a:p>
+        </p:txBody>
+      </p:sp>
+      <p:sp>
+        <p:nvSpPr>
+          <p:cNvPr id="7" name="TextBox 6"/>
+          <p:cNvSpPr txBox="1"/>
+          <p:nvPr/>
+        </p:nvSpPr>
+        <p:spPr>
+          <a:xfrm>
+            <a:off x="978408" y="2331720"/>
+            <a:ext cx="1874519" cy="320040"/>
+          </a:xfrm>
+          <a:prstGeom prst="rect">
+            <a:avLst/>
+          </a:prstGeom>
+          <a:noFill/>
+        </p:spPr>
+        <p:txBody>
+          <a:bodyPr wrap="square" lIns="25400" rIns="25400" anchor="ctr">
+            <a:spAutoFit/>
+          </a:bodyPr>
+          <a:lstStyle/>
+          <a:p>
+            <a:pPr algn="l">
+              <a:defRPr sz="1600" b="1">
+                <a:solidFill>
+                  <a:srgbClr val="0F1F30"/>
+                </a:solidFill>
+                <a:latin typeface="Apple SD Gothic Neo"/>
+              </a:defRPr>
+            </a:pPr>
+            <a:r>
+              <a:t>시간 정렬</a:t>
+            </a:r>
+          </a:p>
+        </p:txBody>
+      </p:sp>
+      <p:sp>
+        <p:nvSpPr>
+          <p:cNvPr id="8" name="TextBox 7"/>
+          <p:cNvSpPr txBox="1"/>
+          <p:nvPr/>
+        </p:nvSpPr>
+        <p:spPr>
+          <a:xfrm>
+            <a:off x="978408" y="2971800"/>
+            <a:ext cx="1920240" cy="868680"/>
+          </a:xfrm>
+          <a:prstGeom prst="rect">
+            <a:avLst/>
+          </a:prstGeom>
+          <a:noFill/>
+        </p:spPr>
+        <p:txBody>
+          <a:bodyPr wrap="square" lIns="25400" rIns="25400" anchor="ctr">
+            <a:spAutoFit/>
+          </a:bodyPr>
+          <a:lstStyle/>
+          <a:p>
+            <a:pPr algn="l">
+              <a:defRPr sz="1300" b="0">
+                <a:solidFill>
+                  <a:srgbClr val="1F2B35"/>
+                </a:solidFill>
+                <a:latin typeface="Apple SD Gothic Neo"/>
+              </a:defRPr>
+            </a:pPr>
+            <a:r>
+              <a:t>전력수요와 7개 지역 ASOS를</a:t>
+            </a:r>
+            <a:br/>
+            <a:r>
+              <a:t>datetime 기준으로 결합</a:t>
+            </a:r>
+          </a:p>
+        </p:txBody>
+      </p:sp>
+      <p:sp>
+        <p:nvSpPr>
+          <p:cNvPr id="9" name="TextBox 8"/>
+          <p:cNvSpPr txBox="1"/>
+          <p:nvPr/>
+        </p:nvSpPr>
+        <p:spPr>
+          <a:xfrm>
+            <a:off x="3172968" y="2834640"/>
+            <a:ext cx="320040" cy="365760"/>
+          </a:xfrm>
+          <a:prstGeom prst="rect">
+            <a:avLst/>
+          </a:prstGeom>
+          <a:noFill/>
+        </p:spPr>
+        <p:txBody>
+          <a:bodyPr wrap="square" lIns="25400" rIns="25400" anchor="ctr">
+            <a:spAutoFit/>
+          </a:bodyPr>
+          <a:lstStyle/>
+          <a:p>
+            <a:pPr algn="ctr">
+              <a:defRPr sz="2200" b="1">
+                <a:solidFill>
+                  <a:srgbClr val="F09746"/>
+                </a:solidFill>
+                <a:latin typeface="Apple SD Gothic Neo"/>
+              </a:defRPr>
+            </a:pPr>
+            <a:r>
+              <a:t>→</a:t>
+            </a:r>
+          </a:p>
+        </p:txBody>
+      </p:sp>
+      <p:sp>
+        <p:nvSpPr>
+          <p:cNvPr id="10" name="Rounded Rectangle 9"/>
+          <p:cNvSpPr/>
+          <p:nvPr/>
+        </p:nvSpPr>
+        <p:spPr>
+          <a:xfrm>
+            <a:off x="3520440" y="1600200"/>
+            <a:ext cx="2331720" cy="3154680"/>
+          </a:xfrm>
+          <a:prstGeom prst="roundRect">
+            <a:avLst/>
+          </a:prstGeom>
+          <a:solidFill>
+            <a:srgbClr val="EFF5F8"/>
+          </a:solidFill>
+          <a:ln>
+            <a:solidFill>
+              <a:srgbClr val="EFF5F8"/>
+            </a:solidFill>
+          </a:ln>
+        </p:spPr>
+        <p:style>
+          <a:lnRef idx="1">
+            <a:schemeClr val="accent1"/>
+          </a:lnRef>
+          <a:fillRef idx="3">
+            <a:schemeClr val="accent1"/>
+          </a:fillRef>
+          <a:effectRef idx="2">
+            <a:schemeClr val="accent1"/>
+          </a:effectRef>
+          <a:fontRef idx="minor">
+            <a:schemeClr val="lt1"/>
+          </a:fontRef>
+        </p:style>
+        <p:txBody>
+          <a:bodyPr rtlCol="0" anchor="ctr"/>
+          <a:lstStyle/>
+          <a:p>
+            <a:pPr algn="ctr"/>
+          </a:p>
+        </p:txBody>
+      </p:sp>
+      <p:sp>
+        <p:nvSpPr>
+          <p:cNvPr id="11" name="TextBox 10"/>
+          <p:cNvSpPr txBox="1"/>
+          <p:nvPr/>
+        </p:nvSpPr>
+        <p:spPr>
+          <a:xfrm>
+            <a:off x="3721608" y="1828800"/>
+            <a:ext cx="502920" cy="320040"/>
+          </a:xfrm>
+          <a:prstGeom prst="rect">
+            <a:avLst/>
+          </a:prstGeom>
+          <a:noFill/>
+        </p:spPr>
+        <p:txBody>
+          <a:bodyPr wrap="square" lIns="25400" rIns="25400" anchor="ctr">
+            <a:spAutoFit/>
+          </a:bodyPr>
+          <a:lstStyle/>
+          <a:p>
+            <a:pPr algn="l">
+              <a:defRPr sz="1800" b="1">
+                <a:solidFill>
+                  <a:srgbClr val="43BECA"/>
+                </a:solidFill>
+                <a:latin typeface="Apple SD Gothic Neo"/>
+              </a:defRPr>
+            </a:pPr>
+            <a:r>
+              <a:t>02</a:t>
+            </a:r>
+          </a:p>
+        </p:txBody>
+      </p:sp>
+      <p:sp>
+        <p:nvSpPr>
+          <p:cNvPr id="12" name="TextBox 11"/>
+          <p:cNvSpPr txBox="1"/>
+          <p:nvPr/>
+        </p:nvSpPr>
+        <p:spPr>
+          <a:xfrm>
+            <a:off x="3721608" y="2331720"/>
+            <a:ext cx="1874519" cy="320040"/>
+          </a:xfrm>
+          <a:prstGeom prst="rect">
+            <a:avLst/>
+          </a:prstGeom>
+          <a:noFill/>
+        </p:spPr>
+        <p:txBody>
+          <a:bodyPr wrap="square" lIns="25400" rIns="25400" anchor="ctr">
+            <a:spAutoFit/>
+          </a:bodyPr>
+          <a:lstStyle/>
+          <a:p>
+            <a:pPr algn="l">
+              <a:defRPr sz="1600" b="1">
+                <a:solidFill>
+                  <a:srgbClr val="0F1F30"/>
+                </a:solidFill>
+                <a:latin typeface="Apple SD Gothic Neo"/>
+              </a:defRPr>
+            </a:pPr>
+            <a:r>
+              <a:t>결측 처리</a:t>
+            </a:r>
+          </a:p>
+        </p:txBody>
+      </p:sp>
+      <p:sp>
+        <p:nvSpPr>
+          <p:cNvPr id="13" name="TextBox 12"/>
+          <p:cNvSpPr txBox="1"/>
+          <p:nvPr/>
+        </p:nvSpPr>
+        <p:spPr>
+          <a:xfrm>
+            <a:off x="3721608" y="2971800"/>
+            <a:ext cx="1920240" cy="868680"/>
+          </a:xfrm>
+          <a:prstGeom prst="rect">
+            <a:avLst/>
+          </a:prstGeom>
+          <a:noFill/>
+        </p:spPr>
+        <p:txBody>
+          <a:bodyPr wrap="square" lIns="25400" rIns="25400" anchor="ctr">
+            <a:spAutoFit/>
+          </a:bodyPr>
+          <a:lstStyle/>
+          <a:p>
+            <a:pPr algn="l">
+              <a:defRPr sz="1300" b="0">
+                <a:solidFill>
+                  <a:srgbClr val="1F2B35"/>
+                </a:solidFill>
+                <a:latin typeface="Apple SD Gothic Neo"/>
+              </a:defRPr>
+            </a:pPr>
+            <a:r>
+              <a:t>강수·일조·일사 = 0</a:t>
+            </a:r>
+            <a:br/>
+            <a:r>
+              <a:t>기온·풍속·습도 = 지역별 보간</a:t>
+            </a:r>
+          </a:p>
+        </p:txBody>
+      </p:sp>
+      <p:sp>
+        <p:nvSpPr>
+          <p:cNvPr id="14" name="TextBox 13"/>
+          <p:cNvSpPr txBox="1"/>
+          <p:nvPr/>
+        </p:nvSpPr>
+        <p:spPr>
+          <a:xfrm>
+            <a:off x="5916168" y="2834640"/>
+            <a:ext cx="320040" cy="365760"/>
+          </a:xfrm>
+          <a:prstGeom prst="rect">
+            <a:avLst/>
+          </a:prstGeom>
+          <a:noFill/>
+        </p:spPr>
+        <p:txBody>
+          <a:bodyPr wrap="square" lIns="25400" rIns="25400" anchor="ctr">
+            <a:spAutoFit/>
+          </a:bodyPr>
+          <a:lstStyle/>
+          <a:p>
+            <a:pPr algn="ctr">
+              <a:defRPr sz="2200" b="1">
+                <a:solidFill>
+                  <a:srgbClr val="F09746"/>
+                </a:solidFill>
+                <a:latin typeface="Apple SD Gothic Neo"/>
+              </a:defRPr>
+            </a:pPr>
+            <a:r>
+              <a:t>→</a:t>
+            </a:r>
+          </a:p>
+        </p:txBody>
+      </p:sp>
+      <p:sp>
+        <p:nvSpPr>
+          <p:cNvPr id="15" name="Rounded Rectangle 14"/>
+          <p:cNvSpPr/>
+          <p:nvPr/>
+        </p:nvSpPr>
+        <p:spPr>
+          <a:xfrm>
+            <a:off x="6263640" y="1600200"/>
+            <a:ext cx="2331720" cy="3154680"/>
+          </a:xfrm>
+          <a:prstGeom prst="roundRect">
+            <a:avLst/>
+          </a:prstGeom>
+          <a:solidFill>
+            <a:srgbClr val="EFF5F8"/>
+          </a:solidFill>
+          <a:ln>
+            <a:solidFill>
+              <a:srgbClr val="EFF5F8"/>
+            </a:solidFill>
+          </a:ln>
+        </p:spPr>
+        <p:style>
+          <a:lnRef idx="1">
+            <a:schemeClr val="accent1"/>
+          </a:lnRef>
+          <a:fillRef idx="3">
+            <a:schemeClr val="accent1"/>
+          </a:fillRef>
+          <a:effectRef idx="2">
+            <a:schemeClr val="accent1"/>
+          </a:effectRef>
+          <a:fontRef idx="minor">
+            <a:schemeClr val="lt1"/>
+          </a:fontRef>
+        </p:style>
+        <p:txBody>
+          <a:bodyPr rtlCol="0" anchor="ctr"/>
+          <a:lstStyle/>
+          <a:p>
+            <a:pPr algn="ctr"/>
+          </a:p>
+        </p:txBody>
+      </p:sp>
+      <p:sp>
+        <p:nvSpPr>
+          <p:cNvPr id="16" name="TextBox 15"/>
+          <p:cNvSpPr txBox="1"/>
+          <p:nvPr/>
+        </p:nvSpPr>
+        <p:spPr>
+          <a:xfrm>
+            <a:off x="6464807" y="1828800"/>
+            <a:ext cx="502920" cy="320040"/>
+          </a:xfrm>
+          <a:prstGeom prst="rect">
+            <a:avLst/>
+          </a:prstGeom>
+          <a:noFill/>
+        </p:spPr>
+        <p:txBody>
+          <a:bodyPr wrap="square" lIns="25400" rIns="25400" anchor="ctr">
+            <a:spAutoFit/>
+          </a:bodyPr>
+          <a:lstStyle/>
+          <a:p>
+            <a:pPr algn="l">
+              <a:defRPr sz="1800" b="1">
+                <a:solidFill>
+                  <a:srgbClr val="43BECA"/>
+                </a:solidFill>
+                <a:latin typeface="Apple SD Gothic Neo"/>
+              </a:defRPr>
+            </a:pPr>
+            <a:r>
+              <a:t>03</a:t>
+            </a:r>
+          </a:p>
+        </p:txBody>
+      </p:sp>
+      <p:sp>
+        <p:nvSpPr>
+          <p:cNvPr id="17" name="TextBox 16"/>
+          <p:cNvSpPr txBox="1"/>
+          <p:nvPr/>
+        </p:nvSpPr>
+        <p:spPr>
+          <a:xfrm>
+            <a:off x="6464807" y="2331720"/>
+            <a:ext cx="1874519" cy="320040"/>
+          </a:xfrm>
+          <a:prstGeom prst="rect">
+            <a:avLst/>
+          </a:prstGeom>
+          <a:noFill/>
+        </p:spPr>
+        <p:txBody>
+          <a:bodyPr wrap="square" lIns="25400" rIns="25400" anchor="ctr">
+            <a:spAutoFit/>
+          </a:bodyPr>
+          <a:lstStyle/>
+          <a:p>
+            <a:pPr algn="l">
+              <a:defRPr sz="1600" b="1">
+                <a:solidFill>
+                  <a:srgbClr val="0F1F30"/>
+                </a:solidFill>
+                <a:latin typeface="Apple SD Gothic Neo"/>
+              </a:defRPr>
+            </a:pPr>
+            <a:r>
+              <a:t>주기 특성</a:t>
+            </a:r>
+          </a:p>
+        </p:txBody>
+      </p:sp>
+      <p:sp>
+        <p:nvSpPr>
+          <p:cNvPr id="18" name="TextBox 17"/>
+          <p:cNvSpPr txBox="1"/>
+          <p:nvPr/>
+        </p:nvSpPr>
+        <p:spPr>
+          <a:xfrm>
+            <a:off x="6464807" y="2971800"/>
+            <a:ext cx="1920240" cy="868680"/>
+          </a:xfrm>
+          <a:prstGeom prst="rect">
+            <a:avLst/>
+          </a:prstGeom>
+          <a:noFill/>
+        </p:spPr>
+        <p:txBody>
+          <a:bodyPr wrap="square" lIns="25400" rIns="25400" anchor="ctr">
+            <a:spAutoFit/>
+          </a:bodyPr>
+          <a:lstStyle/>
+          <a:p>
+            <a:pPr algn="l">
+              <a:defRPr sz="1300" b="0">
+                <a:solidFill>
+                  <a:srgbClr val="1F2B35"/>
+                </a:solidFill>
+                <a:latin typeface="Apple SD Gothic Neo"/>
+              </a:defRPr>
+            </a:pPr>
+            <a:r>
+              <a:t>hour / weekday / month를</a:t>
+            </a:r>
+            <a:br/>
+            <a:r>
+              <a:t>sin·cos 특성으로 변환</a:t>
+            </a:r>
+          </a:p>
+        </p:txBody>
+      </p:sp>
+      <p:sp>
+        <p:nvSpPr>
+          <p:cNvPr id="19" name="TextBox 18"/>
+          <p:cNvSpPr txBox="1"/>
+          <p:nvPr/>
+        </p:nvSpPr>
+        <p:spPr>
+          <a:xfrm>
+            <a:off x="8659367" y="2834640"/>
+            <a:ext cx="320040" cy="365760"/>
+          </a:xfrm>
+          <a:prstGeom prst="rect">
+            <a:avLst/>
+          </a:prstGeom>
+          <a:noFill/>
+        </p:spPr>
+        <p:txBody>
+          <a:bodyPr wrap="square" lIns="25400" rIns="25400" anchor="ctr">
+            <a:spAutoFit/>
+          </a:bodyPr>
+          <a:lstStyle/>
+          <a:p>
+            <a:pPr algn="ctr">
+              <a:defRPr sz="2200" b="1">
+                <a:solidFill>
+                  <a:srgbClr val="F09746"/>
+                </a:solidFill>
+                <a:latin typeface="Apple SD Gothic Neo"/>
+              </a:defRPr>
+            </a:pPr>
+            <a:r>
+              <a:t>→</a:t>
+            </a:r>
+          </a:p>
+        </p:txBody>
+      </p:sp>
+      <p:sp>
+        <p:nvSpPr>
+          <p:cNvPr id="20" name="Rounded Rectangle 19"/>
+          <p:cNvSpPr/>
+          <p:nvPr/>
+        </p:nvSpPr>
+        <p:spPr>
+          <a:xfrm>
+            <a:off x="9006840" y="1600200"/>
+            <a:ext cx="2331720" cy="3154680"/>
+          </a:xfrm>
+          <a:prstGeom prst="roundRect">
+            <a:avLst/>
+          </a:prstGeom>
+          <a:solidFill>
+            <a:srgbClr val="EFF5F8"/>
+          </a:solidFill>
+          <a:ln>
+            <a:solidFill>
+              <a:srgbClr val="EFF5F8"/>
+            </a:solidFill>
+          </a:ln>
+        </p:spPr>
+        <p:style>
+          <a:lnRef idx="1">
+            <a:schemeClr val="accent1"/>
+          </a:lnRef>
+          <a:fillRef idx="3">
+            <a:schemeClr val="accent1"/>
+          </a:fillRef>
+          <a:effectRef idx="2">
+            <a:schemeClr val="accent1"/>
+          </a:effectRef>
+          <a:fontRef idx="minor">
+            <a:schemeClr val="lt1"/>
+          </a:fontRef>
+        </p:style>
+        <p:txBody>
+          <a:bodyPr rtlCol="0" anchor="ctr"/>
+          <a:lstStyle/>
+          <a:p>
+            <a:pPr algn="ctr"/>
+          </a:p>
+        </p:txBody>
+      </p:sp>
+      <p:sp>
+        <p:nvSpPr>
+          <p:cNvPr id="21" name="TextBox 20"/>
+          <p:cNvSpPr txBox="1"/>
+          <p:nvPr/>
+        </p:nvSpPr>
+        <p:spPr>
+          <a:xfrm>
+            <a:off x="9208008" y="1828800"/>
+            <a:ext cx="502920" cy="320040"/>
+          </a:xfrm>
+          <a:prstGeom prst="rect">
+            <a:avLst/>
+          </a:prstGeom>
+          <a:noFill/>
+        </p:spPr>
+        <p:txBody>
+          <a:bodyPr wrap="square" lIns="25400" rIns="25400" anchor="ctr">
+            <a:spAutoFit/>
+          </a:bodyPr>
+          <a:lstStyle/>
+          <a:p>
+            <a:pPr algn="l">
+              <a:defRPr sz="1800" b="1">
+                <a:solidFill>
+                  <a:srgbClr val="43BECA"/>
+                </a:solidFill>
+                <a:latin typeface="Apple SD Gothic Neo"/>
+              </a:defRPr>
+            </a:pPr>
+            <a:r>
+              <a:t>04</a:t>
+            </a:r>
+          </a:p>
+        </p:txBody>
+      </p:sp>
+      <p:sp>
+        <p:nvSpPr>
+          <p:cNvPr id="22" name="TextBox 21"/>
+          <p:cNvSpPr txBox="1"/>
+          <p:nvPr/>
+        </p:nvSpPr>
+        <p:spPr>
+          <a:xfrm>
+            <a:off x="9208008" y="2331720"/>
+            <a:ext cx="1874519" cy="320040"/>
+          </a:xfrm>
+          <a:prstGeom prst="rect">
+            <a:avLst/>
+          </a:prstGeom>
+          <a:noFill/>
+        </p:spPr>
+        <p:txBody>
+          <a:bodyPr wrap="square" lIns="25400" rIns="25400" anchor="ctr">
+            <a:spAutoFit/>
+          </a:bodyPr>
+          <a:lstStyle/>
+          <a:p>
+            <a:pPr algn="l">
+              <a:defRPr sz="1600" b="1">
+                <a:solidFill>
+                  <a:srgbClr val="0F1F30"/>
+                </a:solidFill>
+                <a:latin typeface="Apple SD Gothic Neo"/>
+              </a:defRPr>
+            </a:pPr>
+            <a:r>
+              <a:t>스케일링</a:t>
+            </a:r>
+          </a:p>
+        </p:txBody>
+      </p:sp>
+      <p:sp>
+        <p:nvSpPr>
+          <p:cNvPr id="23" name="TextBox 22"/>
+          <p:cNvSpPr txBox="1"/>
+          <p:nvPr/>
+        </p:nvSpPr>
+        <p:spPr>
+          <a:xfrm>
+            <a:off x="9208008" y="2971800"/>
+            <a:ext cx="1920240" cy="868680"/>
+          </a:xfrm>
+          <a:prstGeom prst="rect">
+            <a:avLst/>
+          </a:prstGeom>
+          <a:noFill/>
+        </p:spPr>
+        <p:txBody>
+          <a:bodyPr wrap="square" lIns="25400" rIns="25400" anchor="ctr">
+            <a:spAutoFit/>
+          </a:bodyPr>
+          <a:lstStyle/>
+          <a:p>
+            <a:pPr algn="l">
+              <a:defRPr sz="1300" b="0">
+                <a:solidFill>
+                  <a:srgbClr val="1F2B35"/>
+                </a:solidFill>
+                <a:latin typeface="Apple SD Gothic Neo"/>
+              </a:defRPr>
+            </a:pPr>
+            <a:r>
+              <a:t>Scaler는 학습 구간에만</a:t>
+            </a:r>
+            <a:br/>
+            <a:r>
+              <a:t>적합해 평가 정보 차단</a:t>
+            </a:r>
+          </a:p>
+        </p:txBody>
+      </p:sp>
+      <p:sp>
+        <p:nvSpPr>
+          <p:cNvPr id="24" name="TextBox 23"/>
+          <p:cNvSpPr txBox="1"/>
+          <p:nvPr/>
+        </p:nvSpPr>
+        <p:spPr>
+          <a:xfrm>
+            <a:off x="822960" y="5532120"/>
+            <a:ext cx="8046720" cy="365760"/>
+          </a:xfrm>
+          <a:prstGeom prst="rect">
+            <a:avLst/>
+          </a:prstGeom>
+          <a:noFill/>
+        </p:spPr>
+        <p:txBody>
+          <a:bodyPr wrap="square" lIns="25400" rIns="25400" anchor="ctr">
+            <a:spAutoFit/>
+          </a:bodyPr>
+          <a:lstStyle/>
+          <a:p>
+            <a:pPr algn="l">
+              <a:defRPr sz="1500" b="1">
+                <a:solidFill>
+                  <a:srgbClr val="0F1F30"/>
+                </a:solidFill>
+                <a:latin typeface="Apple SD Gothic Neo"/>
+              </a:defRPr>
+            </a:pPr>
+            <a:r>
+              <a:t>결측을 무조건 보간하지 않고 변수의 물리적 의미에 맞춰 처리했습니다.</a:t>
+            </a:r>
+          </a:p>
+        </p:txBody>
+      </p:sp>
+      <p:sp>
+        <p:nvSpPr>
+          <p:cNvPr id="25" name="TextBox 24"/>
+          <p:cNvSpPr txBox="1"/>
+          <p:nvPr/>
+        </p:nvSpPr>
+        <p:spPr>
+          <a:xfrm>
+            <a:off x="594360" y="6547104"/>
+            <a:ext cx="4572000" cy="164592"/>
+          </a:xfrm>
+          <a:prstGeom prst="rect">
+            <a:avLst/>
+          </a:prstGeom>
+          <a:noFill/>
+        </p:spPr>
+        <p:txBody>
+          <a:bodyPr wrap="square" lIns="25400" rIns="25400" anchor="ctr">
+            <a:spAutoFit/>
+          </a:bodyPr>
+          <a:lstStyle/>
+          <a:p>
+            <a:pPr algn="l">
+              <a:defRPr sz="700" b="1">
+                <a:solidFill>
+                  <a:srgbClr val="607584"/>
+                </a:solidFill>
+                <a:latin typeface="Apple SD Gothic Neo"/>
+              </a:defRPr>
+            </a:pPr>
+            <a:r>
+              <a:t>ENERGY DEMAND FORECASTING  /  2025</a:t>
+            </a:r>
+          </a:p>
+        </p:txBody>
+      </p:sp>
+      <p:sp>
+        <p:nvSpPr>
+          <p:cNvPr id="26" name="TextBox 25"/>
+          <p:cNvSpPr txBox="1"/>
+          <p:nvPr/>
+        </p:nvSpPr>
+        <p:spPr>
+          <a:xfrm>
+            <a:off x="11064240" y="6519672"/>
+            <a:ext cx="502920" cy="201168"/>
+          </a:xfrm>
+          <a:prstGeom prst="rect">
+            <a:avLst/>
+          </a:prstGeom>
+          <a:noFill/>
+        </p:spPr>
+        <p:txBody>
+          <a:bodyPr wrap="square" lIns="25400" rIns="25400" anchor="ctr">
+            <a:spAutoFit/>
+          </a:bodyPr>
+          <a:lstStyle/>
+          <a:p>
+            <a:pPr algn="r">
+              <a:defRPr sz="800" b="1">
+                <a:solidFill>
+                  <a:srgbClr val="607584"/>
+                </a:solidFill>
+                <a:latin typeface="Apple SD Gothic Neo"/>
+              </a:defRPr>
+            </a:pPr>
+            <a:r>
+              <a:t>05</a:t>
+            </a:r>
+          </a:p>
+        </p:txBody>
+      </p:sp>
+    </p:spTree>
+  </p:cSld>
+  <p:clrMapOvr>
+    <a:masterClrMapping/>
+  </p:clrMapOvr>
+</p:sld>
+</file>
+
+<file path=ppt/slides/slide6.xml><?xml version="1.0" encoding="utf-8"?>
 <p:sld xmlns:a="http://schemas.openxmlformats.org/drawingml/2006/main" xmlns:p="http://schemas.openxmlformats.org/presentationml/2006/main" xmlns:r="http://schemas.openxmlformats.org/officeDocument/2006/relationships">
   <p:cSld>
     <p:bg>
@@ -7719,863 +9776,6 @@
       <p:sp>
         <p:nvSpPr>
           <p:cNvPr id="21" name="TextBox 20"/>
-          <p:cNvSpPr txBox="1"/>
-          <p:nvPr/>
-        </p:nvSpPr>
-        <p:spPr>
-          <a:xfrm>
-            <a:off x="11064240" y="6519672"/>
-            <a:ext cx="502920" cy="201168"/>
-          </a:xfrm>
-          <a:prstGeom prst="rect">
-            <a:avLst/>
-          </a:prstGeom>
-          <a:noFill/>
-        </p:spPr>
-        <p:txBody>
-          <a:bodyPr wrap="square" lIns="25400" rIns="25400" anchor="ctr">
-            <a:spAutoFit/>
-          </a:bodyPr>
-          <a:lstStyle/>
-          <a:p>
-            <a:pPr algn="r">
-              <a:defRPr sz="800" b="1">
-                <a:solidFill>
-                  <a:srgbClr val="607584"/>
-                </a:solidFill>
-                <a:latin typeface="Apple SD Gothic Neo"/>
-              </a:defRPr>
-            </a:pPr>
-            <a:r>
-              <a:t>05</a:t>
-            </a:r>
-          </a:p>
-        </p:txBody>
-      </p:sp>
-    </p:spTree>
-  </p:cSld>
-  <p:clrMapOvr>
-    <a:masterClrMapping/>
-  </p:clrMapOvr>
-</p:sld>
-</file>
-
-<file path=ppt/slides/slide6.xml><?xml version="1.0" encoding="utf-8"?>
-<p:sld xmlns:a="http://schemas.openxmlformats.org/drawingml/2006/main" xmlns:p="http://schemas.openxmlformats.org/presentationml/2006/main" xmlns:r="http://schemas.openxmlformats.org/officeDocument/2006/relationships">
-  <p:cSld>
-    <p:bg>
-      <p:bgPr>
-        <a:solidFill>
-          <a:srgbClr val="FFFFFF"/>
-        </a:solidFill>
-        <a:effectLst/>
-      </p:bgPr>
-    </p:bg>
-    <p:spTree>
-      <p:nvGrpSpPr>
-        <p:cNvPr id="1" name=""/>
-        <p:cNvGrpSpPr/>
-        <p:nvPr/>
-      </p:nvGrpSpPr>
-      <p:grpSpPr/>
-      <p:sp>
-        <p:nvSpPr>
-          <p:cNvPr id="2" name="TextBox 1"/>
-          <p:cNvSpPr txBox="1"/>
-          <p:nvPr/>
-        </p:nvSpPr>
-        <p:spPr>
-          <a:xfrm>
-            <a:off x="594360" y="256032"/>
-            <a:ext cx="5303520" cy="228600"/>
-          </a:xfrm>
-          <a:prstGeom prst="rect">
-            <a:avLst/>
-          </a:prstGeom>
-          <a:noFill/>
-        </p:spPr>
-        <p:txBody>
-          <a:bodyPr wrap="square" lIns="25400" rIns="25400" anchor="ctr">
-            <a:spAutoFit/>
-          </a:bodyPr>
-          <a:lstStyle/>
-          <a:p>
-            <a:pPr algn="l">
-              <a:defRPr sz="800" b="1">
-                <a:solidFill>
-                  <a:srgbClr val="43BECA"/>
-                </a:solidFill>
-                <a:latin typeface="Apple SD Gothic Neo"/>
-              </a:defRPr>
-            </a:pPr>
-            <a:r>
-              <a:t>05 / MODELS</a:t>
-            </a:r>
-          </a:p>
-        </p:txBody>
-      </p:sp>
-      <p:sp>
-        <p:nvSpPr>
-          <p:cNvPr id="3" name="TextBox 2"/>
-          <p:cNvSpPr txBox="1"/>
-          <p:nvPr/>
-        </p:nvSpPr>
-        <p:spPr>
-          <a:xfrm>
-            <a:off x="594360" y="530352"/>
-            <a:ext cx="10972800" cy="502920"/>
-          </a:xfrm>
-          <a:prstGeom prst="rect">
-            <a:avLst/>
-          </a:prstGeom>
-          <a:noFill/>
-        </p:spPr>
-        <p:txBody>
-          <a:bodyPr wrap="square" lIns="25400" rIns="25400" anchor="ctr">
-            <a:spAutoFit/>
-          </a:bodyPr>
-          <a:lstStyle/>
-          <a:p>
-            <a:pPr algn="l">
-              <a:defRPr sz="2500" b="1">
-                <a:solidFill>
-                  <a:srgbClr val="0F1F30"/>
-                </a:solidFill>
-                <a:latin typeface="Apple SD Gothic Neo"/>
-              </a:defRPr>
-            </a:pPr>
-            <a:r>
-              <a:t>비교한 세 가지 모델</a:t>
-            </a:r>
-          </a:p>
-        </p:txBody>
-      </p:sp>
-      <p:sp>
-        <p:nvSpPr>
-          <p:cNvPr id="4" name="Rectangle 3"/>
-          <p:cNvSpPr/>
-          <p:nvPr/>
-        </p:nvSpPr>
-        <p:spPr>
-          <a:xfrm>
-            <a:off x="621792" y="1143000"/>
-            <a:ext cx="914400" cy="45720"/>
-          </a:xfrm>
-          <a:prstGeom prst="rect">
-            <a:avLst/>
-          </a:prstGeom>
-          <a:solidFill>
-            <a:srgbClr val="43BECA"/>
-          </a:solidFill>
-          <a:ln>
-            <a:solidFill>
-              <a:srgbClr val="43BECA"/>
-            </a:solidFill>
-          </a:ln>
-        </p:spPr>
-        <p:style>
-          <a:lnRef idx="1">
-            <a:schemeClr val="accent1"/>
-          </a:lnRef>
-          <a:fillRef idx="3">
-            <a:schemeClr val="accent1"/>
-          </a:fillRef>
-          <a:effectRef idx="2">
-            <a:schemeClr val="accent1"/>
-          </a:effectRef>
-          <a:fontRef idx="minor">
-            <a:schemeClr val="lt1"/>
-          </a:fontRef>
-        </p:style>
-        <p:txBody>
-          <a:bodyPr rtlCol="0" anchor="ctr"/>
-          <a:lstStyle/>
-          <a:p>
-            <a:pPr algn="ctr"/>
-          </a:p>
-        </p:txBody>
-      </p:sp>
-      <p:sp>
-        <p:nvSpPr>
-          <p:cNvPr id="5" name="Rounded Rectangle 4"/>
-          <p:cNvSpPr/>
-          <p:nvPr/>
-        </p:nvSpPr>
-        <p:spPr>
-          <a:xfrm>
-            <a:off x="777240" y="1645920"/>
-            <a:ext cx="3246120" cy="3474720"/>
-          </a:xfrm>
-          <a:prstGeom prst="roundRect">
-            <a:avLst/>
-          </a:prstGeom>
-          <a:solidFill>
-            <a:srgbClr val="EFF5F8"/>
-          </a:solidFill>
-          <a:ln>
-            <a:solidFill>
-              <a:srgbClr val="EFF5F8"/>
-            </a:solidFill>
-          </a:ln>
-        </p:spPr>
-        <p:style>
-          <a:lnRef idx="1">
-            <a:schemeClr val="accent1"/>
-          </a:lnRef>
-          <a:fillRef idx="3">
-            <a:schemeClr val="accent1"/>
-          </a:fillRef>
-          <a:effectRef idx="2">
-            <a:schemeClr val="accent1"/>
-          </a:effectRef>
-          <a:fontRef idx="minor">
-            <a:schemeClr val="lt1"/>
-          </a:fontRef>
-        </p:style>
-        <p:txBody>
-          <a:bodyPr rtlCol="0" anchor="ctr"/>
-          <a:lstStyle/>
-          <a:p>
-            <a:pPr algn="ctr"/>
-          </a:p>
-        </p:txBody>
-      </p:sp>
-      <p:sp>
-        <p:nvSpPr>
-          <p:cNvPr id="6" name="Rectangle 5"/>
-          <p:cNvSpPr/>
-          <p:nvPr/>
-        </p:nvSpPr>
-        <p:spPr>
-          <a:xfrm>
-            <a:off x="777240" y="1645920"/>
-            <a:ext cx="3246120" cy="164592"/>
-          </a:xfrm>
-          <a:prstGeom prst="rect">
-            <a:avLst/>
-          </a:prstGeom>
-          <a:solidFill>
-            <a:srgbClr val="205B89"/>
-          </a:solidFill>
-          <a:ln>
-            <a:solidFill>
-              <a:srgbClr val="205B89"/>
-            </a:solidFill>
-          </a:ln>
-        </p:spPr>
-        <p:style>
-          <a:lnRef idx="1">
-            <a:schemeClr val="accent1"/>
-          </a:lnRef>
-          <a:fillRef idx="3">
-            <a:schemeClr val="accent1"/>
-          </a:fillRef>
-          <a:effectRef idx="2">
-            <a:schemeClr val="accent1"/>
-          </a:effectRef>
-          <a:fontRef idx="minor">
-            <a:schemeClr val="lt1"/>
-          </a:fontRef>
-        </p:style>
-        <p:txBody>
-          <a:bodyPr rtlCol="0" anchor="ctr"/>
-          <a:lstStyle/>
-          <a:p>
-            <a:pPr algn="ctr"/>
-          </a:p>
-        </p:txBody>
-      </p:sp>
-      <p:sp>
-        <p:nvSpPr>
-          <p:cNvPr id="7" name="TextBox 6"/>
-          <p:cNvSpPr txBox="1"/>
-          <p:nvPr/>
-        </p:nvSpPr>
-        <p:spPr>
-          <a:xfrm>
-            <a:off x="1033271" y="2148840"/>
-            <a:ext cx="2743200" cy="347472"/>
-          </a:xfrm>
-          <a:prstGeom prst="rect">
-            <a:avLst/>
-          </a:prstGeom>
-          <a:noFill/>
-        </p:spPr>
-        <p:txBody>
-          <a:bodyPr wrap="square" lIns="25400" rIns="25400" anchor="ctr">
-            <a:spAutoFit/>
-          </a:bodyPr>
-          <a:lstStyle/>
-          <a:p>
-            <a:pPr algn="l">
-              <a:defRPr sz="1900" b="1">
-                <a:solidFill>
-                  <a:srgbClr val="0F1F30"/>
-                </a:solidFill>
-                <a:latin typeface="Apple SD Gothic Neo"/>
-              </a:defRPr>
-            </a:pPr>
-            <a:r>
-              <a:t>ARIMA / SARIMAX</a:t>
-            </a:r>
-          </a:p>
-        </p:txBody>
-      </p:sp>
-      <p:sp>
-        <p:nvSpPr>
-          <p:cNvPr id="8" name="TextBox 7"/>
-          <p:cNvSpPr txBox="1"/>
-          <p:nvPr/>
-        </p:nvSpPr>
-        <p:spPr>
-          <a:xfrm>
-            <a:off x="1033271" y="2606040"/>
-            <a:ext cx="2743200" cy="274320"/>
-          </a:xfrm>
-          <a:prstGeom prst="rect">
-            <a:avLst/>
-          </a:prstGeom>
-          <a:noFill/>
-        </p:spPr>
-        <p:txBody>
-          <a:bodyPr wrap="square" lIns="25400" rIns="25400" anchor="ctr">
-            <a:spAutoFit/>
-          </a:bodyPr>
-          <a:lstStyle/>
-          <a:p>
-            <a:pPr algn="l">
-              <a:defRPr sz="1100" b="1">
-                <a:solidFill>
-                  <a:srgbClr val="205B89"/>
-                </a:solidFill>
-                <a:latin typeface="Apple SD Gothic Neo"/>
-              </a:defRPr>
-            </a:pPr>
-            <a:r>
-              <a:t>고전 시계열 베이스라인</a:t>
-            </a:r>
-          </a:p>
-        </p:txBody>
-      </p:sp>
-      <p:sp>
-        <p:nvSpPr>
-          <p:cNvPr id="9" name="TextBox 8"/>
-          <p:cNvSpPr txBox="1"/>
-          <p:nvPr/>
-        </p:nvSpPr>
-        <p:spPr>
-          <a:xfrm>
-            <a:off x="1033271" y="3246120"/>
-            <a:ext cx="2560320" cy="685800"/>
-          </a:xfrm>
-          <a:prstGeom prst="rect">
-            <a:avLst/>
-          </a:prstGeom>
-          <a:noFill/>
-        </p:spPr>
-        <p:txBody>
-          <a:bodyPr wrap="square" lIns="25400" rIns="25400" anchor="ctr">
-            <a:spAutoFit/>
-          </a:bodyPr>
-          <a:lstStyle/>
-          <a:p>
-            <a:pPr algn="l">
-              <a:defRPr sz="1600" b="0">
-                <a:solidFill>
-                  <a:srgbClr val="1F2B35"/>
-                </a:solidFill>
-                <a:latin typeface="Apple SD Gothic Neo"/>
-              </a:defRPr>
-            </a:pPr>
-            <a:r>
-              <a:t>추세와 24시간 계절성</a:t>
-            </a:r>
-            <a:br/>
-            <a:r>
-              <a:t>해석 가능한 기준선</a:t>
-            </a:r>
-          </a:p>
-        </p:txBody>
-      </p:sp>
-      <p:sp>
-        <p:nvSpPr>
-          <p:cNvPr id="10" name="Rounded Rectangle 9"/>
-          <p:cNvSpPr/>
-          <p:nvPr/>
-        </p:nvSpPr>
-        <p:spPr>
-          <a:xfrm>
-            <a:off x="4526279" y="1645920"/>
-            <a:ext cx="3246120" cy="3474720"/>
-          </a:xfrm>
-          <a:prstGeom prst="roundRect">
-            <a:avLst/>
-          </a:prstGeom>
-          <a:solidFill>
-            <a:srgbClr val="EFF5F8"/>
-          </a:solidFill>
-          <a:ln>
-            <a:solidFill>
-              <a:srgbClr val="EFF5F8"/>
-            </a:solidFill>
-          </a:ln>
-        </p:spPr>
-        <p:style>
-          <a:lnRef idx="1">
-            <a:schemeClr val="accent1"/>
-          </a:lnRef>
-          <a:fillRef idx="3">
-            <a:schemeClr val="accent1"/>
-          </a:fillRef>
-          <a:effectRef idx="2">
-            <a:schemeClr val="accent1"/>
-          </a:effectRef>
-          <a:fontRef idx="minor">
-            <a:schemeClr val="lt1"/>
-          </a:fontRef>
-        </p:style>
-        <p:txBody>
-          <a:bodyPr rtlCol="0" anchor="ctr"/>
-          <a:lstStyle/>
-          <a:p>
-            <a:pPr algn="ctr"/>
-          </a:p>
-        </p:txBody>
-      </p:sp>
-      <p:sp>
-        <p:nvSpPr>
-          <p:cNvPr id="11" name="Rectangle 10"/>
-          <p:cNvSpPr/>
-          <p:nvPr/>
-        </p:nvSpPr>
-        <p:spPr>
-          <a:xfrm>
-            <a:off x="4526279" y="1645920"/>
-            <a:ext cx="3246120" cy="164592"/>
-          </a:xfrm>
-          <a:prstGeom prst="rect">
-            <a:avLst/>
-          </a:prstGeom>
-          <a:solidFill>
-            <a:srgbClr val="F09746"/>
-          </a:solidFill>
-          <a:ln>
-            <a:solidFill>
-              <a:srgbClr val="F09746"/>
-            </a:solidFill>
-          </a:ln>
-        </p:spPr>
-        <p:style>
-          <a:lnRef idx="1">
-            <a:schemeClr val="accent1"/>
-          </a:lnRef>
-          <a:fillRef idx="3">
-            <a:schemeClr val="accent1"/>
-          </a:fillRef>
-          <a:effectRef idx="2">
-            <a:schemeClr val="accent1"/>
-          </a:effectRef>
-          <a:fontRef idx="minor">
-            <a:schemeClr val="lt1"/>
-          </a:fontRef>
-        </p:style>
-        <p:txBody>
-          <a:bodyPr rtlCol="0" anchor="ctr"/>
-          <a:lstStyle/>
-          <a:p>
-            <a:pPr algn="ctr"/>
-          </a:p>
-        </p:txBody>
-      </p:sp>
-      <p:sp>
-        <p:nvSpPr>
-          <p:cNvPr id="12" name="TextBox 11"/>
-          <p:cNvSpPr txBox="1"/>
-          <p:nvPr/>
-        </p:nvSpPr>
-        <p:spPr>
-          <a:xfrm>
-            <a:off x="4782312" y="2148840"/>
-            <a:ext cx="2743200" cy="347472"/>
-          </a:xfrm>
-          <a:prstGeom prst="rect">
-            <a:avLst/>
-          </a:prstGeom>
-          <a:noFill/>
-        </p:spPr>
-        <p:txBody>
-          <a:bodyPr wrap="square" lIns="25400" rIns="25400" anchor="ctr">
-            <a:spAutoFit/>
-          </a:bodyPr>
-          <a:lstStyle/>
-          <a:p>
-            <a:pPr algn="l">
-              <a:defRPr sz="1900" b="1">
-                <a:solidFill>
-                  <a:srgbClr val="0F1F30"/>
-                </a:solidFill>
-                <a:latin typeface="Apple SD Gothic Neo"/>
-              </a:defRPr>
-            </a:pPr>
-            <a:r>
-              <a:t>LSTM</a:t>
-            </a:r>
-          </a:p>
-        </p:txBody>
-      </p:sp>
-      <p:sp>
-        <p:nvSpPr>
-          <p:cNvPr id="13" name="TextBox 12"/>
-          <p:cNvSpPr txBox="1"/>
-          <p:nvPr/>
-        </p:nvSpPr>
-        <p:spPr>
-          <a:xfrm>
-            <a:off x="4782312" y="2606040"/>
-            <a:ext cx="2743200" cy="274320"/>
-          </a:xfrm>
-          <a:prstGeom prst="rect">
-            <a:avLst/>
-          </a:prstGeom>
-          <a:noFill/>
-        </p:spPr>
-        <p:txBody>
-          <a:bodyPr wrap="square" lIns="25400" rIns="25400" anchor="ctr">
-            <a:spAutoFit/>
-          </a:bodyPr>
-          <a:lstStyle/>
-          <a:p>
-            <a:pPr algn="l">
-              <a:defRPr sz="1100" b="1">
-                <a:solidFill>
-                  <a:srgbClr val="F09746"/>
-                </a:solidFill>
-                <a:latin typeface="Apple SD Gothic Neo"/>
-              </a:defRPr>
-            </a:pPr>
-            <a:r>
-              <a:t>순환 신경망</a:t>
-            </a:r>
-          </a:p>
-        </p:txBody>
-      </p:sp>
-      <p:sp>
-        <p:nvSpPr>
-          <p:cNvPr id="14" name="TextBox 13"/>
-          <p:cNvSpPr txBox="1"/>
-          <p:nvPr/>
-        </p:nvSpPr>
-        <p:spPr>
-          <a:xfrm>
-            <a:off x="4782312" y="3246120"/>
-            <a:ext cx="2560320" cy="685800"/>
-          </a:xfrm>
-          <a:prstGeom prst="rect">
-            <a:avLst/>
-          </a:prstGeom>
-          <a:noFill/>
-        </p:spPr>
-        <p:txBody>
-          <a:bodyPr wrap="square" lIns="25400" rIns="25400" anchor="ctr">
-            <a:spAutoFit/>
-          </a:bodyPr>
-          <a:lstStyle/>
-          <a:p>
-            <a:pPr algn="l">
-              <a:defRPr sz="1600" b="0">
-                <a:solidFill>
-                  <a:srgbClr val="1F2B35"/>
-                </a:solidFill>
-                <a:latin typeface="Apple SD Gothic Neo"/>
-              </a:defRPr>
-            </a:pPr>
-            <a:r>
-              <a:t>최근 24시간의</a:t>
-            </a:r>
-            <a:br/>
-            <a:r>
-              <a:t>장기 의존성 학습</a:t>
-            </a:r>
-          </a:p>
-        </p:txBody>
-      </p:sp>
-      <p:sp>
-        <p:nvSpPr>
-          <p:cNvPr id="15" name="Rounded Rectangle 14"/>
-          <p:cNvSpPr/>
-          <p:nvPr/>
-        </p:nvSpPr>
-        <p:spPr>
-          <a:xfrm>
-            <a:off x="8275319" y="1645920"/>
-            <a:ext cx="3246120" cy="3474720"/>
-          </a:xfrm>
-          <a:prstGeom prst="roundRect">
-            <a:avLst/>
-          </a:prstGeom>
-          <a:solidFill>
-            <a:srgbClr val="EFF5F8"/>
-          </a:solidFill>
-          <a:ln>
-            <a:solidFill>
-              <a:srgbClr val="EFF5F8"/>
-            </a:solidFill>
-          </a:ln>
-        </p:spPr>
-        <p:style>
-          <a:lnRef idx="1">
-            <a:schemeClr val="accent1"/>
-          </a:lnRef>
-          <a:fillRef idx="3">
-            <a:schemeClr val="accent1"/>
-          </a:fillRef>
-          <a:effectRef idx="2">
-            <a:schemeClr val="accent1"/>
-          </a:effectRef>
-          <a:fontRef idx="minor">
-            <a:schemeClr val="lt1"/>
-          </a:fontRef>
-        </p:style>
-        <p:txBody>
-          <a:bodyPr rtlCol="0" anchor="ctr"/>
-          <a:lstStyle/>
-          <a:p>
-            <a:pPr algn="ctr"/>
-          </a:p>
-        </p:txBody>
-      </p:sp>
-      <p:sp>
-        <p:nvSpPr>
-          <p:cNvPr id="16" name="Rectangle 15"/>
-          <p:cNvSpPr/>
-          <p:nvPr/>
-        </p:nvSpPr>
-        <p:spPr>
-          <a:xfrm>
-            <a:off x="8275319" y="1645920"/>
-            <a:ext cx="3246120" cy="164592"/>
-          </a:xfrm>
-          <a:prstGeom prst="rect">
-            <a:avLst/>
-          </a:prstGeom>
-          <a:solidFill>
-            <a:srgbClr val="43BECA"/>
-          </a:solidFill>
-          <a:ln>
-            <a:solidFill>
-              <a:srgbClr val="43BECA"/>
-            </a:solidFill>
-          </a:ln>
-        </p:spPr>
-        <p:style>
-          <a:lnRef idx="1">
-            <a:schemeClr val="accent1"/>
-          </a:lnRef>
-          <a:fillRef idx="3">
-            <a:schemeClr val="accent1"/>
-          </a:fillRef>
-          <a:effectRef idx="2">
-            <a:schemeClr val="accent1"/>
-          </a:effectRef>
-          <a:fontRef idx="minor">
-            <a:schemeClr val="lt1"/>
-          </a:fontRef>
-        </p:style>
-        <p:txBody>
-          <a:bodyPr rtlCol="0" anchor="ctr"/>
-          <a:lstStyle/>
-          <a:p>
-            <a:pPr algn="ctr"/>
-          </a:p>
-        </p:txBody>
-      </p:sp>
-      <p:sp>
-        <p:nvSpPr>
-          <p:cNvPr id="17" name="TextBox 16"/>
-          <p:cNvSpPr txBox="1"/>
-          <p:nvPr/>
-        </p:nvSpPr>
-        <p:spPr>
-          <a:xfrm>
-            <a:off x="8531351" y="2148840"/>
-            <a:ext cx="2743200" cy="347472"/>
-          </a:xfrm>
-          <a:prstGeom prst="rect">
-            <a:avLst/>
-          </a:prstGeom>
-          <a:noFill/>
-        </p:spPr>
-        <p:txBody>
-          <a:bodyPr wrap="square" lIns="25400" rIns="25400" anchor="ctr">
-            <a:spAutoFit/>
-          </a:bodyPr>
-          <a:lstStyle/>
-          <a:p>
-            <a:pPr algn="l">
-              <a:defRPr sz="1900" b="1">
-                <a:solidFill>
-                  <a:srgbClr val="0F1F30"/>
-                </a:solidFill>
-                <a:latin typeface="Apple SD Gothic Neo"/>
-              </a:defRPr>
-            </a:pPr>
-            <a:r>
-              <a:t>Transformer</a:t>
-            </a:r>
-          </a:p>
-        </p:txBody>
-      </p:sp>
-      <p:sp>
-        <p:nvSpPr>
-          <p:cNvPr id="18" name="TextBox 17"/>
-          <p:cNvSpPr txBox="1"/>
-          <p:nvPr/>
-        </p:nvSpPr>
-        <p:spPr>
-          <a:xfrm>
-            <a:off x="8531351" y="2606040"/>
-            <a:ext cx="2743200" cy="274320"/>
-          </a:xfrm>
-          <a:prstGeom prst="rect">
-            <a:avLst/>
-          </a:prstGeom>
-          <a:noFill/>
-        </p:spPr>
-        <p:txBody>
-          <a:bodyPr wrap="square" lIns="25400" rIns="25400" anchor="ctr">
-            <a:spAutoFit/>
-          </a:bodyPr>
-          <a:lstStyle/>
-          <a:p>
-            <a:pPr algn="l">
-              <a:defRPr sz="1100" b="1">
-                <a:solidFill>
-                  <a:srgbClr val="43BECA"/>
-                </a:solidFill>
-                <a:latin typeface="Apple SD Gothic Neo"/>
-              </a:defRPr>
-            </a:pPr>
-            <a:r>
-              <a:t>Self-attention</a:t>
-            </a:r>
-          </a:p>
-        </p:txBody>
-      </p:sp>
-      <p:sp>
-        <p:nvSpPr>
-          <p:cNvPr id="19" name="TextBox 18"/>
-          <p:cNvSpPr txBox="1"/>
-          <p:nvPr/>
-        </p:nvSpPr>
-        <p:spPr>
-          <a:xfrm>
-            <a:off x="8531351" y="3246120"/>
-            <a:ext cx="2560320" cy="685800"/>
-          </a:xfrm>
-          <a:prstGeom prst="rect">
-            <a:avLst/>
-          </a:prstGeom>
-          <a:noFill/>
-        </p:spPr>
-        <p:txBody>
-          <a:bodyPr wrap="square" lIns="25400" rIns="25400" anchor="ctr">
-            <a:spAutoFit/>
-          </a:bodyPr>
-          <a:lstStyle/>
-          <a:p>
-            <a:pPr algn="l">
-              <a:defRPr sz="1600" b="0">
-                <a:solidFill>
-                  <a:srgbClr val="1F2B35"/>
-                </a:solidFill>
-                <a:latin typeface="Apple SD Gothic Neo"/>
-              </a:defRPr>
-            </a:pPr>
-            <a:r>
-              <a:t>시간적 관계와</a:t>
-            </a:r>
-            <a:br/>
-            <a:r>
-              <a:t>다변량 상호작용 학습</a:t>
-            </a:r>
-          </a:p>
-        </p:txBody>
-      </p:sp>
-      <p:sp>
-        <p:nvSpPr>
-          <p:cNvPr id="20" name="TextBox 19"/>
-          <p:cNvSpPr txBox="1"/>
-          <p:nvPr/>
-        </p:nvSpPr>
-        <p:spPr>
-          <a:xfrm>
-            <a:off x="914400" y="5669280"/>
-            <a:ext cx="7772400" cy="320040"/>
-          </a:xfrm>
-          <a:prstGeom prst="rect">
-            <a:avLst/>
-          </a:prstGeom>
-          <a:noFill/>
-        </p:spPr>
-        <p:txBody>
-          <a:bodyPr wrap="square" lIns="25400" rIns="25400" anchor="ctr">
-            <a:spAutoFit/>
-          </a:bodyPr>
-          <a:lstStyle/>
-          <a:p>
-            <a:pPr algn="l">
-              <a:defRPr sz="1600" b="1">
-                <a:solidFill>
-                  <a:srgbClr val="0F1F30"/>
-                </a:solidFill>
-                <a:latin typeface="Apple SD Gothic Neo"/>
-              </a:defRPr>
-            </a:pPr>
-            <a:r>
-              <a:t>공통 입력: 지역 날씨 + 시간 특성 + 과거 전력수요</a:t>
-            </a:r>
-          </a:p>
-        </p:txBody>
-      </p:sp>
-      <p:sp>
-        <p:nvSpPr>
-          <p:cNvPr id="21" name="TextBox 20"/>
-          <p:cNvSpPr txBox="1"/>
-          <p:nvPr/>
-        </p:nvSpPr>
-        <p:spPr>
-          <a:xfrm>
-            <a:off x="594360" y="6547104"/>
-            <a:ext cx="4572000" cy="164592"/>
-          </a:xfrm>
-          <a:prstGeom prst="rect">
-            <a:avLst/>
-          </a:prstGeom>
-          <a:noFill/>
-        </p:spPr>
-        <p:txBody>
-          <a:bodyPr wrap="square" lIns="25400" rIns="25400" anchor="ctr">
-            <a:spAutoFit/>
-          </a:bodyPr>
-          <a:lstStyle/>
-          <a:p>
-            <a:pPr algn="l">
-              <a:defRPr sz="700" b="1">
-                <a:solidFill>
-                  <a:srgbClr val="607584"/>
-                </a:solidFill>
-                <a:latin typeface="Apple SD Gothic Neo"/>
-              </a:defRPr>
-            </a:pPr>
-            <a:r>
-              <a:t>ENERGY DEMAND FORECASTING  /  2025</a:t>
-            </a:r>
-          </a:p>
-        </p:txBody>
-      </p:sp>
-      <p:sp>
-        <p:nvSpPr>
-          <p:cNvPr id="22" name="TextBox 21"/>
           <p:cNvSpPr txBox="1"/>
           <p:nvPr/>
         </p:nvSpPr>
@@ -8666,7 +9866,7 @@
               </a:defRPr>
             </a:pPr>
             <a:r>
-              <a:t>06 / RESULTS</a:t>
+              <a:t>05 / MODELS</a:t>
             </a:r>
           </a:p>
         </p:txBody>
@@ -8702,7 +9902,7 @@
               </a:defRPr>
             </a:pPr>
             <a:r>
-              <a:t>성능 비교 결과</a:t>
+              <a:t>비교한 세 가지 모델</a:t>
             </a:r>
           </a:p>
         </p:txBody>
@@ -8754,14 +9954,59 @@
       </p:sp>
       <p:sp>
         <p:nvSpPr>
-          <p:cNvPr id="5" name="Rectangle 4"/>
+          <p:cNvPr id="5" name="Rounded Rectangle 4"/>
           <p:cNvSpPr/>
           <p:nvPr/>
         </p:nvSpPr>
         <p:spPr>
           <a:xfrm>
             <a:off x="777240" y="1645920"/>
-            <a:ext cx="10789920" cy="502920"/>
+            <a:ext cx="3246120" cy="3474720"/>
+          </a:xfrm>
+          <a:prstGeom prst="roundRect">
+            <a:avLst/>
+          </a:prstGeom>
+          <a:solidFill>
+            <a:srgbClr val="EFF5F8"/>
+          </a:solidFill>
+          <a:ln>
+            <a:solidFill>
+              <a:srgbClr val="EFF5F8"/>
+            </a:solidFill>
+          </a:ln>
+        </p:spPr>
+        <p:style>
+          <a:lnRef idx="1">
+            <a:schemeClr val="accent1"/>
+          </a:lnRef>
+          <a:fillRef idx="3">
+            <a:schemeClr val="accent1"/>
+          </a:fillRef>
+          <a:effectRef idx="2">
+            <a:schemeClr val="accent1"/>
+          </a:effectRef>
+          <a:fontRef idx="minor">
+            <a:schemeClr val="lt1"/>
+          </a:fontRef>
+        </p:style>
+        <p:txBody>
+          <a:bodyPr rtlCol="0" anchor="ctr"/>
+          <a:lstStyle/>
+          <a:p>
+            <a:pPr algn="ctr"/>
+          </a:p>
+        </p:txBody>
+      </p:sp>
+      <p:sp>
+        <p:nvSpPr>
+          <p:cNvPr id="6" name="Rectangle 5"/>
+          <p:cNvSpPr/>
+          <p:nvPr/>
+        </p:nvSpPr>
+        <p:spPr>
+          <a:xfrm>
+            <a:off x="777240" y="1645920"/>
+            <a:ext cx="3246120" cy="164592"/>
           </a:xfrm>
           <a:prstGeom prst="rect">
             <a:avLst/>
@@ -8799,72 +10044,36 @@
       </p:sp>
       <p:sp>
         <p:nvSpPr>
-          <p:cNvPr id="6" name="TextBox 5"/>
-          <p:cNvSpPr txBox="1"/>
-          <p:nvPr/>
-        </p:nvSpPr>
-        <p:spPr>
-          <a:xfrm>
-            <a:off x="777240" y="1728216"/>
-            <a:ext cx="1920240" cy="274320"/>
-          </a:xfrm>
-          <a:prstGeom prst="rect">
-            <a:avLst/>
-          </a:prstGeom>
-          <a:noFill/>
-        </p:spPr>
-        <p:txBody>
-          <a:bodyPr wrap="square" lIns="25400" rIns="25400" anchor="ctr">
-            <a:spAutoFit/>
-          </a:bodyPr>
-          <a:lstStyle/>
-          <a:p>
-            <a:pPr algn="ctr">
-              <a:defRPr sz="1000" b="1">
-                <a:solidFill>
-                  <a:srgbClr val="FFFFFF"/>
-                </a:solidFill>
-                <a:latin typeface="Apple SD Gothic Neo"/>
-              </a:defRPr>
-            </a:pPr>
-            <a:r>
-              <a:t>모델</a:t>
-            </a:r>
-          </a:p>
-        </p:txBody>
-      </p:sp>
-      <p:sp>
-        <p:nvSpPr>
           <p:cNvPr id="7" name="TextBox 6"/>
           <p:cNvSpPr txBox="1"/>
           <p:nvPr/>
         </p:nvSpPr>
         <p:spPr>
           <a:xfrm>
-            <a:off x="2697480" y="1728216"/>
-            <a:ext cx="2103120" cy="274320"/>
-          </a:xfrm>
-          <a:prstGeom prst="rect">
-            <a:avLst/>
-          </a:prstGeom>
-          <a:noFill/>
-        </p:spPr>
-        <p:txBody>
-          <a:bodyPr wrap="square" lIns="25400" rIns="25400" anchor="ctr">
-            <a:spAutoFit/>
-          </a:bodyPr>
-          <a:lstStyle/>
-          <a:p>
-            <a:pPr algn="ctr">
-              <a:defRPr sz="1000" b="1">
-                <a:solidFill>
-                  <a:srgbClr val="FFFFFF"/>
-                </a:solidFill>
-                <a:latin typeface="Apple SD Gothic Neo"/>
-              </a:defRPr>
-            </a:pPr>
-            <a:r>
-              <a:t>MAE</a:t>
+            <a:off x="1033271" y="2148840"/>
+            <a:ext cx="2743200" cy="347472"/>
+          </a:xfrm>
+          <a:prstGeom prst="rect">
+            <a:avLst/>
+          </a:prstGeom>
+          <a:noFill/>
+        </p:spPr>
+        <p:txBody>
+          <a:bodyPr wrap="square" lIns="25400" rIns="25400" anchor="ctr">
+            <a:spAutoFit/>
+          </a:bodyPr>
+          <a:lstStyle/>
+          <a:p>
+            <a:pPr algn="l">
+              <a:defRPr sz="1900" b="1">
+                <a:solidFill>
+                  <a:srgbClr val="0F1F30"/>
+                </a:solidFill>
+                <a:latin typeface="Apple SD Gothic Neo"/>
+              </a:defRPr>
+            </a:pPr>
+            <a:r>
+              <a:t>ARIMA / SARIMAX</a:t>
             </a:r>
           </a:p>
         </p:txBody>
@@ -8877,30 +10086,30 @@
         </p:nvSpPr>
         <p:spPr>
           <a:xfrm>
-            <a:off x="4800600" y="1728216"/>
-            <a:ext cx="2103120" cy="274320"/>
-          </a:xfrm>
-          <a:prstGeom prst="rect">
-            <a:avLst/>
-          </a:prstGeom>
-          <a:noFill/>
-        </p:spPr>
-        <p:txBody>
-          <a:bodyPr wrap="square" lIns="25400" rIns="25400" anchor="ctr">
-            <a:spAutoFit/>
-          </a:bodyPr>
-          <a:lstStyle/>
-          <a:p>
-            <a:pPr algn="ctr">
-              <a:defRPr sz="1000" b="1">
-                <a:solidFill>
-                  <a:srgbClr val="FFFFFF"/>
-                </a:solidFill>
-                <a:latin typeface="Apple SD Gothic Neo"/>
-              </a:defRPr>
-            </a:pPr>
-            <a:r>
-              <a:t>RMSE</a:t>
+            <a:off x="1033271" y="2606040"/>
+            <a:ext cx="2743200" cy="274320"/>
+          </a:xfrm>
+          <a:prstGeom prst="rect">
+            <a:avLst/>
+          </a:prstGeom>
+          <a:noFill/>
+        </p:spPr>
+        <p:txBody>
+          <a:bodyPr wrap="square" lIns="25400" rIns="25400" anchor="ctr">
+            <a:spAutoFit/>
+          </a:bodyPr>
+          <a:lstStyle/>
+          <a:p>
+            <a:pPr algn="l">
+              <a:defRPr sz="1100" b="1">
+                <a:solidFill>
+                  <a:srgbClr val="205B89"/>
+                </a:solidFill>
+                <a:latin typeface="Apple SD Gothic Neo"/>
+              </a:defRPr>
+            </a:pPr>
+            <a:r>
+              <a:t>고전 시계열 베이스라인</a:t>
             </a:r>
           </a:p>
         </p:txBody>
@@ -8913,118 +10122,50 @@
         </p:nvSpPr>
         <p:spPr>
           <a:xfrm>
-            <a:off x="6903719" y="1728216"/>
-            <a:ext cx="1645920" cy="274320"/>
-          </a:xfrm>
-          <a:prstGeom prst="rect">
-            <a:avLst/>
-          </a:prstGeom>
-          <a:noFill/>
-        </p:spPr>
-        <p:txBody>
-          <a:bodyPr wrap="square" lIns="25400" rIns="25400" anchor="ctr">
-            <a:spAutoFit/>
-          </a:bodyPr>
-          <a:lstStyle/>
-          <a:p>
-            <a:pPr algn="ctr">
-              <a:defRPr sz="1000" b="1">
-                <a:solidFill>
-                  <a:srgbClr val="FFFFFF"/>
-                </a:solidFill>
-                <a:latin typeface="Apple SD Gothic Neo"/>
-              </a:defRPr>
-            </a:pPr>
-            <a:r>
-              <a:t>MAPE</a:t>
-            </a:r>
-          </a:p>
-        </p:txBody>
-      </p:sp>
-      <p:sp>
-        <p:nvSpPr>
-          <p:cNvPr id="10" name="TextBox 9"/>
-          <p:cNvSpPr txBox="1"/>
-          <p:nvPr/>
-        </p:nvSpPr>
-        <p:spPr>
-          <a:xfrm>
-            <a:off x="8549640" y="1728216"/>
-            <a:ext cx="2743200" cy="274320"/>
-          </a:xfrm>
-          <a:prstGeom prst="rect">
-            <a:avLst/>
-          </a:prstGeom>
-          <a:noFill/>
-        </p:spPr>
-        <p:txBody>
-          <a:bodyPr wrap="square" lIns="25400" rIns="25400" anchor="ctr">
-            <a:spAutoFit/>
-          </a:bodyPr>
-          <a:lstStyle/>
-          <a:p>
-            <a:pPr algn="ctr">
-              <a:defRPr sz="1000" b="1">
-                <a:solidFill>
-                  <a:srgbClr val="FFFFFF"/>
-                </a:solidFill>
-                <a:latin typeface="Apple SD Gothic Neo"/>
-              </a:defRPr>
-            </a:pPr>
-            <a:r>
-              <a:t>표준편차 비율</a:t>
-            </a:r>
-          </a:p>
-        </p:txBody>
-      </p:sp>
-      <p:sp>
-        <p:nvSpPr>
-          <p:cNvPr id="11" name="TextBox 10"/>
-          <p:cNvSpPr txBox="1"/>
-          <p:nvPr/>
-        </p:nvSpPr>
-        <p:spPr>
-          <a:xfrm>
-            <a:off x="11292840" y="1728216"/>
-            <a:ext cx="2468880" cy="274320"/>
-          </a:xfrm>
-          <a:prstGeom prst="rect">
-            <a:avLst/>
-          </a:prstGeom>
-          <a:noFill/>
-        </p:spPr>
-        <p:txBody>
-          <a:bodyPr wrap="square" lIns="25400" rIns="25400" anchor="ctr">
-            <a:spAutoFit/>
-          </a:bodyPr>
-          <a:lstStyle/>
-          <a:p>
-            <a:pPr algn="ctr">
-              <a:defRPr sz="1000" b="1">
-                <a:solidFill>
-                  <a:srgbClr val="FFFFFF"/>
-                </a:solidFill>
-                <a:latin typeface="Apple SD Gothic Neo"/>
-              </a:defRPr>
-            </a:pPr>
-            <a:r>
-              <a:t>95% 포함률</a:t>
-            </a:r>
-          </a:p>
-        </p:txBody>
-      </p:sp>
-      <p:sp>
-        <p:nvSpPr>
-          <p:cNvPr id="12" name="Rectangle 11"/>
+            <a:off x="1033271" y="3246120"/>
+            <a:ext cx="2560320" cy="685800"/>
+          </a:xfrm>
+          <a:prstGeom prst="rect">
+            <a:avLst/>
+          </a:prstGeom>
+          <a:noFill/>
+        </p:spPr>
+        <p:txBody>
+          <a:bodyPr wrap="square" lIns="25400" rIns="25400" anchor="ctr">
+            <a:spAutoFit/>
+          </a:bodyPr>
+          <a:lstStyle/>
+          <a:p>
+            <a:pPr algn="l">
+              <a:defRPr sz="1600" b="0">
+                <a:solidFill>
+                  <a:srgbClr val="1F2B35"/>
+                </a:solidFill>
+                <a:latin typeface="Apple SD Gothic Neo"/>
+              </a:defRPr>
+            </a:pPr>
+            <a:r>
+              <a:t>추세와 24시간 계절성</a:t>
+            </a:r>
+            <a:br/>
+            <a:r>
+              <a:t>해석 가능한 기준선</a:t>
+            </a:r>
+          </a:p>
+        </p:txBody>
+      </p:sp>
+      <p:sp>
+        <p:nvSpPr>
+          <p:cNvPr id="10" name="Rounded Rectangle 9"/>
           <p:cNvSpPr/>
           <p:nvPr/>
         </p:nvSpPr>
         <p:spPr>
           <a:xfrm>
-            <a:off x="777240" y="2148840"/>
-            <a:ext cx="10789920" cy="502920"/>
-          </a:xfrm>
-          <a:prstGeom prst="rect">
+            <a:off x="4526279" y="1645920"/>
+            <a:ext cx="3246120" cy="3474720"/>
+          </a:xfrm>
+          <a:prstGeom prst="roundRect">
             <a:avLst/>
           </a:prstGeom>
           <a:solidFill>
@@ -9060,240 +10201,24 @@
       </p:sp>
       <p:sp>
         <p:nvSpPr>
-          <p:cNvPr id="13" name="TextBox 12"/>
-          <p:cNvSpPr txBox="1"/>
-          <p:nvPr/>
-        </p:nvSpPr>
-        <p:spPr>
-          <a:xfrm>
-            <a:off x="777240" y="2231136"/>
-            <a:ext cx="1920240" cy="274320"/>
-          </a:xfrm>
-          <a:prstGeom prst="rect">
-            <a:avLst/>
-          </a:prstGeom>
-          <a:noFill/>
-        </p:spPr>
-        <p:txBody>
-          <a:bodyPr wrap="square" lIns="25400" rIns="25400" anchor="ctr">
-            <a:spAutoFit/>
-          </a:bodyPr>
-          <a:lstStyle/>
-          <a:p>
-            <a:pPr algn="r">
-              <a:defRPr sz="1000" b="1">
-                <a:solidFill>
-                  <a:srgbClr val="1F2B35"/>
-                </a:solidFill>
-                <a:latin typeface="Apple SD Gothic Neo"/>
-              </a:defRPr>
-            </a:pPr>
-            <a:r>
-              <a:t>ARIMA</a:t>
-            </a:r>
-          </a:p>
-        </p:txBody>
-      </p:sp>
-      <p:sp>
-        <p:nvSpPr>
-          <p:cNvPr id="14" name="TextBox 13"/>
-          <p:cNvSpPr txBox="1"/>
-          <p:nvPr/>
-        </p:nvSpPr>
-        <p:spPr>
-          <a:xfrm>
-            <a:off x="2697480" y="2231136"/>
-            <a:ext cx="2103120" cy="274320"/>
-          </a:xfrm>
-          <a:prstGeom prst="rect">
-            <a:avLst/>
-          </a:prstGeom>
-          <a:noFill/>
-        </p:spPr>
-        <p:txBody>
-          <a:bodyPr wrap="square" lIns="25400" rIns="25400" anchor="ctr">
-            <a:spAutoFit/>
-          </a:bodyPr>
-          <a:lstStyle/>
-          <a:p>
-            <a:pPr algn="r">
-              <a:defRPr sz="1000" b="0">
-                <a:solidFill>
-                  <a:srgbClr val="1F2B35"/>
-                </a:solidFill>
-                <a:latin typeface="Apple SD Gothic Neo"/>
-              </a:defRPr>
-            </a:pPr>
-            <a:r>
-              <a:t>646.5</a:t>
-            </a:r>
-          </a:p>
-        </p:txBody>
-      </p:sp>
-      <p:sp>
-        <p:nvSpPr>
-          <p:cNvPr id="15" name="TextBox 14"/>
-          <p:cNvSpPr txBox="1"/>
-          <p:nvPr/>
-        </p:nvSpPr>
-        <p:spPr>
-          <a:xfrm>
-            <a:off x="4800600" y="2231136"/>
-            <a:ext cx="2103120" cy="274320"/>
-          </a:xfrm>
-          <a:prstGeom prst="rect">
-            <a:avLst/>
-          </a:prstGeom>
-          <a:noFill/>
-        </p:spPr>
-        <p:txBody>
-          <a:bodyPr wrap="square" lIns="25400" rIns="25400" anchor="ctr">
-            <a:spAutoFit/>
-          </a:bodyPr>
-          <a:lstStyle/>
-          <a:p>
-            <a:pPr algn="r">
-              <a:defRPr sz="1000" b="0">
-                <a:solidFill>
-                  <a:srgbClr val="1F2B35"/>
-                </a:solidFill>
-                <a:latin typeface="Apple SD Gothic Neo"/>
-              </a:defRPr>
-            </a:pPr>
-            <a:r>
-              <a:t>904.8</a:t>
-            </a:r>
-          </a:p>
-        </p:txBody>
-      </p:sp>
-      <p:sp>
-        <p:nvSpPr>
-          <p:cNvPr id="16" name="TextBox 15"/>
-          <p:cNvSpPr txBox="1"/>
-          <p:nvPr/>
-        </p:nvSpPr>
-        <p:spPr>
-          <a:xfrm>
-            <a:off x="6903719" y="2231136"/>
-            <a:ext cx="1645920" cy="274320"/>
-          </a:xfrm>
-          <a:prstGeom prst="rect">
-            <a:avLst/>
-          </a:prstGeom>
-          <a:noFill/>
-        </p:spPr>
-        <p:txBody>
-          <a:bodyPr wrap="square" lIns="25400" rIns="25400" anchor="ctr">
-            <a:spAutoFit/>
-          </a:bodyPr>
-          <a:lstStyle/>
-          <a:p>
-            <a:pPr algn="r">
-              <a:defRPr sz="1000" b="0">
-                <a:solidFill>
-                  <a:srgbClr val="1F2B35"/>
-                </a:solidFill>
-                <a:latin typeface="Apple SD Gothic Neo"/>
-              </a:defRPr>
-            </a:pPr>
-            <a:r>
-              <a:t>1.02%</a:t>
-            </a:r>
-          </a:p>
-        </p:txBody>
-      </p:sp>
-      <p:sp>
-        <p:nvSpPr>
-          <p:cNvPr id="17" name="TextBox 16"/>
-          <p:cNvSpPr txBox="1"/>
-          <p:nvPr/>
-        </p:nvSpPr>
-        <p:spPr>
-          <a:xfrm>
-            <a:off x="8549640" y="2231136"/>
-            <a:ext cx="2743200" cy="274320"/>
-          </a:xfrm>
-          <a:prstGeom prst="rect">
-            <a:avLst/>
-          </a:prstGeom>
-          <a:noFill/>
-        </p:spPr>
-        <p:txBody>
-          <a:bodyPr wrap="square" lIns="25400" rIns="25400" anchor="ctr">
-            <a:spAutoFit/>
-          </a:bodyPr>
-          <a:lstStyle/>
-          <a:p>
-            <a:pPr algn="r">
-              <a:defRPr sz="1000" b="0">
-                <a:solidFill>
-                  <a:srgbClr val="1F2B35"/>
-                </a:solidFill>
-                <a:latin typeface="Apple SD Gothic Neo"/>
-              </a:defRPr>
-            </a:pPr>
-            <a:r>
-              <a:t>1.011</a:t>
-            </a:r>
-          </a:p>
-        </p:txBody>
-      </p:sp>
-      <p:sp>
-        <p:nvSpPr>
-          <p:cNvPr id="18" name="TextBox 17"/>
-          <p:cNvSpPr txBox="1"/>
-          <p:nvPr/>
-        </p:nvSpPr>
-        <p:spPr>
-          <a:xfrm>
-            <a:off x="11292840" y="2231136"/>
-            <a:ext cx="2468880" cy="274320"/>
-          </a:xfrm>
-          <a:prstGeom prst="rect">
-            <a:avLst/>
-          </a:prstGeom>
-          <a:noFill/>
-        </p:spPr>
-        <p:txBody>
-          <a:bodyPr wrap="square" lIns="25400" rIns="25400" anchor="ctr">
-            <a:spAutoFit/>
-          </a:bodyPr>
-          <a:lstStyle/>
-          <a:p>
-            <a:pPr algn="r">
-              <a:defRPr sz="1000" b="0">
-                <a:solidFill>
-                  <a:srgbClr val="1F2B35"/>
-                </a:solidFill>
-                <a:latin typeface="Apple SD Gothic Neo"/>
-              </a:defRPr>
-            </a:pPr>
-            <a:r>
-              <a:t>88.51%</a:t>
-            </a:r>
-          </a:p>
-        </p:txBody>
-      </p:sp>
-      <p:sp>
-        <p:nvSpPr>
-          <p:cNvPr id="19" name="Rectangle 18"/>
+          <p:cNvPr id="11" name="Rectangle 10"/>
           <p:cNvSpPr/>
           <p:nvPr/>
         </p:nvSpPr>
         <p:spPr>
           <a:xfrm>
-            <a:off x="777240" y="2651760"/>
-            <a:ext cx="10789920" cy="502920"/>
+            <a:off x="4526279" y="1645920"/>
+            <a:ext cx="3246120" cy="164592"/>
           </a:xfrm>
           <a:prstGeom prst="rect">
             <a:avLst/>
           </a:prstGeom>
           <a:solidFill>
-            <a:srgbClr val="FFFFFF"/>
+            <a:srgbClr val="F09746"/>
           </a:solidFill>
           <a:ln>
             <a:solidFill>
-              <a:srgbClr val="FFFFFF"/>
+              <a:srgbClr val="F09746"/>
             </a:solidFill>
           </a:ln>
         </p:spPr>
@@ -9321,28 +10246,100 @@
       </p:sp>
       <p:sp>
         <p:nvSpPr>
-          <p:cNvPr id="20" name="TextBox 19"/>
-          <p:cNvSpPr txBox="1"/>
-          <p:nvPr/>
-        </p:nvSpPr>
-        <p:spPr>
-          <a:xfrm>
-            <a:off x="777240" y="2734056"/>
-            <a:ext cx="1920240" cy="274320"/>
-          </a:xfrm>
-          <a:prstGeom prst="rect">
-            <a:avLst/>
-          </a:prstGeom>
-          <a:noFill/>
-        </p:spPr>
-        <p:txBody>
-          <a:bodyPr wrap="square" lIns="25400" rIns="25400" anchor="ctr">
-            <a:spAutoFit/>
-          </a:bodyPr>
-          <a:lstStyle/>
-          <a:p>
-            <a:pPr algn="r">
-              <a:defRPr sz="1000" b="1">
+          <p:cNvPr id="12" name="TextBox 11"/>
+          <p:cNvSpPr txBox="1"/>
+          <p:nvPr/>
+        </p:nvSpPr>
+        <p:spPr>
+          <a:xfrm>
+            <a:off x="4782312" y="2148840"/>
+            <a:ext cx="2743200" cy="347472"/>
+          </a:xfrm>
+          <a:prstGeom prst="rect">
+            <a:avLst/>
+          </a:prstGeom>
+          <a:noFill/>
+        </p:spPr>
+        <p:txBody>
+          <a:bodyPr wrap="square" lIns="25400" rIns="25400" anchor="ctr">
+            <a:spAutoFit/>
+          </a:bodyPr>
+          <a:lstStyle/>
+          <a:p>
+            <a:pPr algn="l">
+              <a:defRPr sz="1900" b="1">
+                <a:solidFill>
+                  <a:srgbClr val="0F1F30"/>
+                </a:solidFill>
+                <a:latin typeface="Apple SD Gothic Neo"/>
+              </a:defRPr>
+            </a:pPr>
+            <a:r>
+              <a:t>LSTM</a:t>
+            </a:r>
+          </a:p>
+        </p:txBody>
+      </p:sp>
+      <p:sp>
+        <p:nvSpPr>
+          <p:cNvPr id="13" name="TextBox 12"/>
+          <p:cNvSpPr txBox="1"/>
+          <p:nvPr/>
+        </p:nvSpPr>
+        <p:spPr>
+          <a:xfrm>
+            <a:off x="4782312" y="2606040"/>
+            <a:ext cx="2743200" cy="274320"/>
+          </a:xfrm>
+          <a:prstGeom prst="rect">
+            <a:avLst/>
+          </a:prstGeom>
+          <a:noFill/>
+        </p:spPr>
+        <p:txBody>
+          <a:bodyPr wrap="square" lIns="25400" rIns="25400" anchor="ctr">
+            <a:spAutoFit/>
+          </a:bodyPr>
+          <a:lstStyle/>
+          <a:p>
+            <a:pPr algn="l">
+              <a:defRPr sz="1100" b="1">
+                <a:solidFill>
+                  <a:srgbClr val="F09746"/>
+                </a:solidFill>
+                <a:latin typeface="Apple SD Gothic Neo"/>
+              </a:defRPr>
+            </a:pPr>
+            <a:r>
+              <a:t>순환 신경망</a:t>
+            </a:r>
+          </a:p>
+        </p:txBody>
+      </p:sp>
+      <p:sp>
+        <p:nvSpPr>
+          <p:cNvPr id="14" name="TextBox 13"/>
+          <p:cNvSpPr txBox="1"/>
+          <p:nvPr/>
+        </p:nvSpPr>
+        <p:spPr>
+          <a:xfrm>
+            <a:off x="4782312" y="3246120"/>
+            <a:ext cx="2560320" cy="685800"/>
+          </a:xfrm>
+          <a:prstGeom prst="rect">
+            <a:avLst/>
+          </a:prstGeom>
+          <a:noFill/>
+        </p:spPr>
+        <p:txBody>
+          <a:bodyPr wrap="square" lIns="25400" rIns="25400" anchor="ctr">
+            <a:spAutoFit/>
+          </a:bodyPr>
+          <a:lstStyle/>
+          <a:p>
+            <a:pPr algn="l">
+              <a:defRPr sz="1600" b="0">
                 <a:solidFill>
                   <a:srgbClr val="1F2B35"/>
                 </a:solidFill>
@@ -9350,203 +10347,27 @@
               </a:defRPr>
             </a:pPr>
             <a:r>
-              <a:t>LSTM</a:t>
-            </a:r>
-          </a:p>
-        </p:txBody>
-      </p:sp>
-      <p:sp>
-        <p:nvSpPr>
-          <p:cNvPr id="21" name="TextBox 20"/>
-          <p:cNvSpPr txBox="1"/>
-          <p:nvPr/>
-        </p:nvSpPr>
-        <p:spPr>
-          <a:xfrm>
-            <a:off x="2697480" y="2734056"/>
-            <a:ext cx="2103120" cy="274320"/>
-          </a:xfrm>
-          <a:prstGeom prst="rect">
-            <a:avLst/>
-          </a:prstGeom>
-          <a:noFill/>
-        </p:spPr>
-        <p:txBody>
-          <a:bodyPr wrap="square" lIns="25400" rIns="25400" anchor="ctr">
-            <a:spAutoFit/>
-          </a:bodyPr>
-          <a:lstStyle/>
-          <a:p>
-            <a:pPr algn="r">
-              <a:defRPr sz="1000" b="0">
-                <a:solidFill>
-                  <a:srgbClr val="1F2B35"/>
-                </a:solidFill>
-                <a:latin typeface="Apple SD Gothic Neo"/>
-              </a:defRPr>
-            </a:pPr>
-            <a:r>
-              <a:t>1,895.5</a:t>
-            </a:r>
-          </a:p>
-        </p:txBody>
-      </p:sp>
-      <p:sp>
-        <p:nvSpPr>
-          <p:cNvPr id="22" name="TextBox 21"/>
-          <p:cNvSpPr txBox="1"/>
-          <p:nvPr/>
-        </p:nvSpPr>
-        <p:spPr>
-          <a:xfrm>
-            <a:off x="4800600" y="2734056"/>
-            <a:ext cx="2103120" cy="274320"/>
-          </a:xfrm>
-          <a:prstGeom prst="rect">
-            <a:avLst/>
-          </a:prstGeom>
-          <a:noFill/>
-        </p:spPr>
-        <p:txBody>
-          <a:bodyPr wrap="square" lIns="25400" rIns="25400" anchor="ctr">
-            <a:spAutoFit/>
-          </a:bodyPr>
-          <a:lstStyle/>
-          <a:p>
-            <a:pPr algn="r">
-              <a:defRPr sz="1000" b="0">
-                <a:solidFill>
-                  <a:srgbClr val="1F2B35"/>
-                </a:solidFill>
-                <a:latin typeface="Apple SD Gothic Neo"/>
-              </a:defRPr>
-            </a:pPr>
-            <a:r>
-              <a:t>2,481.9</a:t>
-            </a:r>
-          </a:p>
-        </p:txBody>
-      </p:sp>
-      <p:sp>
-        <p:nvSpPr>
-          <p:cNvPr id="23" name="TextBox 22"/>
-          <p:cNvSpPr txBox="1"/>
-          <p:nvPr/>
-        </p:nvSpPr>
-        <p:spPr>
-          <a:xfrm>
-            <a:off x="6903719" y="2734056"/>
-            <a:ext cx="1645920" cy="274320"/>
-          </a:xfrm>
-          <a:prstGeom prst="rect">
-            <a:avLst/>
-          </a:prstGeom>
-          <a:noFill/>
-        </p:spPr>
-        <p:txBody>
-          <a:bodyPr wrap="square" lIns="25400" rIns="25400" anchor="ctr">
-            <a:spAutoFit/>
-          </a:bodyPr>
-          <a:lstStyle/>
-          <a:p>
-            <a:pPr algn="r">
-              <a:defRPr sz="1000" b="0">
-                <a:solidFill>
-                  <a:srgbClr val="1F2B35"/>
-                </a:solidFill>
-                <a:latin typeface="Apple SD Gothic Neo"/>
-              </a:defRPr>
-            </a:pPr>
-            <a:r>
-              <a:t>3.05%</a:t>
-            </a:r>
-          </a:p>
-        </p:txBody>
-      </p:sp>
-      <p:sp>
-        <p:nvSpPr>
-          <p:cNvPr id="24" name="TextBox 23"/>
-          <p:cNvSpPr txBox="1"/>
-          <p:nvPr/>
-        </p:nvSpPr>
-        <p:spPr>
-          <a:xfrm>
-            <a:off x="8549640" y="2734056"/>
-            <a:ext cx="2743200" cy="274320"/>
-          </a:xfrm>
-          <a:prstGeom prst="rect">
-            <a:avLst/>
-          </a:prstGeom>
-          <a:noFill/>
-        </p:spPr>
-        <p:txBody>
-          <a:bodyPr wrap="square" lIns="25400" rIns="25400" anchor="ctr">
-            <a:spAutoFit/>
-          </a:bodyPr>
-          <a:lstStyle/>
-          <a:p>
-            <a:pPr algn="r">
-              <a:defRPr sz="1000" b="0">
-                <a:solidFill>
-                  <a:srgbClr val="1F2B35"/>
-                </a:solidFill>
-                <a:latin typeface="Apple SD Gothic Neo"/>
-              </a:defRPr>
-            </a:pPr>
-            <a:r>
-              <a:t>0.919</a:t>
-            </a:r>
-          </a:p>
-        </p:txBody>
-      </p:sp>
-      <p:sp>
-        <p:nvSpPr>
-          <p:cNvPr id="25" name="TextBox 24"/>
-          <p:cNvSpPr txBox="1"/>
-          <p:nvPr/>
-        </p:nvSpPr>
-        <p:spPr>
-          <a:xfrm>
-            <a:off x="11292840" y="2734056"/>
-            <a:ext cx="2468880" cy="274320"/>
-          </a:xfrm>
-          <a:prstGeom prst="rect">
-            <a:avLst/>
-          </a:prstGeom>
-          <a:noFill/>
-        </p:spPr>
-        <p:txBody>
-          <a:bodyPr wrap="square" lIns="25400" rIns="25400" anchor="ctr">
-            <a:spAutoFit/>
-          </a:bodyPr>
-          <a:lstStyle/>
-          <a:p>
-            <a:pPr algn="r">
-              <a:defRPr sz="1000" b="0">
-                <a:solidFill>
-                  <a:srgbClr val="1F2B35"/>
-                </a:solidFill>
-                <a:latin typeface="Apple SD Gothic Neo"/>
-              </a:defRPr>
-            </a:pPr>
-            <a:r>
-              <a:t>92.69%</a:t>
-            </a:r>
-          </a:p>
-        </p:txBody>
-      </p:sp>
-      <p:sp>
-        <p:nvSpPr>
-          <p:cNvPr id="26" name="Rectangle 25"/>
+              <a:t>최근 24시간의</a:t>
+            </a:r>
+            <a:br/>
+            <a:r>
+              <a:t>장기 의존성 학습</a:t>
+            </a:r>
+          </a:p>
+        </p:txBody>
+      </p:sp>
+      <p:sp>
+        <p:nvSpPr>
+          <p:cNvPr id="15" name="Rounded Rectangle 14"/>
           <p:cNvSpPr/>
           <p:nvPr/>
         </p:nvSpPr>
         <p:spPr>
           <a:xfrm>
-            <a:off x="777240" y="3154680"/>
-            <a:ext cx="10789920" cy="502920"/>
-          </a:xfrm>
-          <a:prstGeom prst="rect">
+            <a:off x="8275319" y="1645920"/>
+            <a:ext cx="3246120" cy="3474720"/>
+          </a:xfrm>
+          <a:prstGeom prst="roundRect">
             <a:avLst/>
           </a:prstGeom>
           <a:solidFill>
@@ -9582,28 +10403,145 @@
       </p:sp>
       <p:sp>
         <p:nvSpPr>
-          <p:cNvPr id="27" name="TextBox 26"/>
-          <p:cNvSpPr txBox="1"/>
-          <p:nvPr/>
-        </p:nvSpPr>
-        <p:spPr>
-          <a:xfrm>
-            <a:off x="777240" y="3236976"/>
-            <a:ext cx="1920240" cy="274320"/>
-          </a:xfrm>
-          <a:prstGeom prst="rect">
-            <a:avLst/>
-          </a:prstGeom>
-          <a:noFill/>
-        </p:spPr>
-        <p:txBody>
-          <a:bodyPr wrap="square" lIns="25400" rIns="25400" anchor="ctr">
-            <a:spAutoFit/>
-          </a:bodyPr>
-          <a:lstStyle/>
-          <a:p>
-            <a:pPr algn="r">
-              <a:defRPr sz="1000" b="1">
+          <p:cNvPr id="16" name="Rectangle 15"/>
+          <p:cNvSpPr/>
+          <p:nvPr/>
+        </p:nvSpPr>
+        <p:spPr>
+          <a:xfrm>
+            <a:off x="8275319" y="1645920"/>
+            <a:ext cx="3246120" cy="164592"/>
+          </a:xfrm>
+          <a:prstGeom prst="rect">
+            <a:avLst/>
+          </a:prstGeom>
+          <a:solidFill>
+            <a:srgbClr val="43BECA"/>
+          </a:solidFill>
+          <a:ln>
+            <a:solidFill>
+              <a:srgbClr val="43BECA"/>
+            </a:solidFill>
+          </a:ln>
+        </p:spPr>
+        <p:style>
+          <a:lnRef idx="1">
+            <a:schemeClr val="accent1"/>
+          </a:lnRef>
+          <a:fillRef idx="3">
+            <a:schemeClr val="accent1"/>
+          </a:fillRef>
+          <a:effectRef idx="2">
+            <a:schemeClr val="accent1"/>
+          </a:effectRef>
+          <a:fontRef idx="minor">
+            <a:schemeClr val="lt1"/>
+          </a:fontRef>
+        </p:style>
+        <p:txBody>
+          <a:bodyPr rtlCol="0" anchor="ctr"/>
+          <a:lstStyle/>
+          <a:p>
+            <a:pPr algn="ctr"/>
+          </a:p>
+        </p:txBody>
+      </p:sp>
+      <p:sp>
+        <p:nvSpPr>
+          <p:cNvPr id="17" name="TextBox 16"/>
+          <p:cNvSpPr txBox="1"/>
+          <p:nvPr/>
+        </p:nvSpPr>
+        <p:spPr>
+          <a:xfrm>
+            <a:off x="8531351" y="2148840"/>
+            <a:ext cx="2743200" cy="347472"/>
+          </a:xfrm>
+          <a:prstGeom prst="rect">
+            <a:avLst/>
+          </a:prstGeom>
+          <a:noFill/>
+        </p:spPr>
+        <p:txBody>
+          <a:bodyPr wrap="square" lIns="25400" rIns="25400" anchor="ctr">
+            <a:spAutoFit/>
+          </a:bodyPr>
+          <a:lstStyle/>
+          <a:p>
+            <a:pPr algn="l">
+              <a:defRPr sz="1900" b="1">
+                <a:solidFill>
+                  <a:srgbClr val="0F1F30"/>
+                </a:solidFill>
+                <a:latin typeface="Apple SD Gothic Neo"/>
+              </a:defRPr>
+            </a:pPr>
+            <a:r>
+              <a:t>Transformer</a:t>
+            </a:r>
+          </a:p>
+        </p:txBody>
+      </p:sp>
+      <p:sp>
+        <p:nvSpPr>
+          <p:cNvPr id="18" name="TextBox 17"/>
+          <p:cNvSpPr txBox="1"/>
+          <p:nvPr/>
+        </p:nvSpPr>
+        <p:spPr>
+          <a:xfrm>
+            <a:off x="8531351" y="2606040"/>
+            <a:ext cx="2743200" cy="274320"/>
+          </a:xfrm>
+          <a:prstGeom prst="rect">
+            <a:avLst/>
+          </a:prstGeom>
+          <a:noFill/>
+        </p:spPr>
+        <p:txBody>
+          <a:bodyPr wrap="square" lIns="25400" rIns="25400" anchor="ctr">
+            <a:spAutoFit/>
+          </a:bodyPr>
+          <a:lstStyle/>
+          <a:p>
+            <a:pPr algn="l">
+              <a:defRPr sz="1100" b="1">
+                <a:solidFill>
+                  <a:srgbClr val="43BECA"/>
+                </a:solidFill>
+                <a:latin typeface="Apple SD Gothic Neo"/>
+              </a:defRPr>
+            </a:pPr>
+            <a:r>
+              <a:t>Self-attention</a:t>
+            </a:r>
+          </a:p>
+        </p:txBody>
+      </p:sp>
+      <p:sp>
+        <p:nvSpPr>
+          <p:cNvPr id="19" name="TextBox 18"/>
+          <p:cNvSpPr txBox="1"/>
+          <p:nvPr/>
+        </p:nvSpPr>
+        <p:spPr>
+          <a:xfrm>
+            <a:off x="8531351" y="3246120"/>
+            <a:ext cx="2560320" cy="685800"/>
+          </a:xfrm>
+          <a:prstGeom prst="rect">
+            <a:avLst/>
+          </a:prstGeom>
+          <a:noFill/>
+        </p:spPr>
+        <p:txBody>
+          <a:bodyPr wrap="square" lIns="25400" rIns="25400" anchor="ctr">
+            <a:spAutoFit/>
+          </a:bodyPr>
+          <a:lstStyle/>
+          <a:p>
+            <a:pPr algn="l">
+              <a:defRPr sz="1600" b="0">
                 <a:solidFill>
                   <a:srgbClr val="1F2B35"/>
                 </a:solidFill>
@@ -9611,201 +10549,25 @@
               </a:defRPr>
             </a:pPr>
             <a:r>
-              <a:t>Transformer</a:t>
-            </a:r>
-          </a:p>
-        </p:txBody>
-      </p:sp>
-      <p:sp>
-        <p:nvSpPr>
-          <p:cNvPr id="28" name="TextBox 27"/>
-          <p:cNvSpPr txBox="1"/>
-          <p:nvPr/>
-        </p:nvSpPr>
-        <p:spPr>
-          <a:xfrm>
-            <a:off x="2697480" y="3236976"/>
-            <a:ext cx="2103120" cy="274320"/>
-          </a:xfrm>
-          <a:prstGeom prst="rect">
-            <a:avLst/>
-          </a:prstGeom>
-          <a:noFill/>
-        </p:spPr>
-        <p:txBody>
-          <a:bodyPr wrap="square" lIns="25400" rIns="25400" anchor="ctr">
-            <a:spAutoFit/>
-          </a:bodyPr>
-          <a:lstStyle/>
-          <a:p>
-            <a:pPr algn="r">
-              <a:defRPr sz="1000" b="0">
-                <a:solidFill>
-                  <a:srgbClr val="1F2B35"/>
-                </a:solidFill>
-                <a:latin typeface="Apple SD Gothic Neo"/>
-              </a:defRPr>
-            </a:pPr>
-            <a:r>
-              <a:t>1,883.8</a:t>
-            </a:r>
-          </a:p>
-        </p:txBody>
-      </p:sp>
-      <p:sp>
-        <p:nvSpPr>
-          <p:cNvPr id="29" name="TextBox 28"/>
-          <p:cNvSpPr txBox="1"/>
-          <p:nvPr/>
-        </p:nvSpPr>
-        <p:spPr>
-          <a:xfrm>
-            <a:off x="4800600" y="3236976"/>
-            <a:ext cx="2103120" cy="274320"/>
-          </a:xfrm>
-          <a:prstGeom prst="rect">
-            <a:avLst/>
-          </a:prstGeom>
-          <a:noFill/>
-        </p:spPr>
-        <p:txBody>
-          <a:bodyPr wrap="square" lIns="25400" rIns="25400" anchor="ctr">
-            <a:spAutoFit/>
-          </a:bodyPr>
-          <a:lstStyle/>
-          <a:p>
-            <a:pPr algn="r">
-              <a:defRPr sz="1000" b="0">
-                <a:solidFill>
-                  <a:srgbClr val="1F2B35"/>
-                </a:solidFill>
-                <a:latin typeface="Apple SD Gothic Neo"/>
-              </a:defRPr>
-            </a:pPr>
-            <a:r>
-              <a:t>2,502.1</a:t>
-            </a:r>
-          </a:p>
-        </p:txBody>
-      </p:sp>
-      <p:sp>
-        <p:nvSpPr>
-          <p:cNvPr id="30" name="TextBox 29"/>
-          <p:cNvSpPr txBox="1"/>
-          <p:nvPr/>
-        </p:nvSpPr>
-        <p:spPr>
-          <a:xfrm>
-            <a:off x="6903719" y="3236976"/>
-            <a:ext cx="1645920" cy="274320"/>
-          </a:xfrm>
-          <a:prstGeom prst="rect">
-            <a:avLst/>
-          </a:prstGeom>
-          <a:noFill/>
-        </p:spPr>
-        <p:txBody>
-          <a:bodyPr wrap="square" lIns="25400" rIns="25400" anchor="ctr">
-            <a:spAutoFit/>
-          </a:bodyPr>
-          <a:lstStyle/>
-          <a:p>
-            <a:pPr algn="r">
-              <a:defRPr sz="1000" b="0">
-                <a:solidFill>
-                  <a:srgbClr val="1F2B35"/>
-                </a:solidFill>
-                <a:latin typeface="Apple SD Gothic Neo"/>
-              </a:defRPr>
-            </a:pPr>
-            <a:r>
-              <a:t>2.96%</a:t>
-            </a:r>
-          </a:p>
-        </p:txBody>
-      </p:sp>
-      <p:sp>
-        <p:nvSpPr>
-          <p:cNvPr id="31" name="TextBox 30"/>
-          <p:cNvSpPr txBox="1"/>
-          <p:nvPr/>
-        </p:nvSpPr>
-        <p:spPr>
-          <a:xfrm>
-            <a:off x="8549640" y="3236976"/>
-            <a:ext cx="2743200" cy="274320"/>
-          </a:xfrm>
-          <a:prstGeom prst="rect">
-            <a:avLst/>
-          </a:prstGeom>
-          <a:noFill/>
-        </p:spPr>
-        <p:txBody>
-          <a:bodyPr wrap="square" lIns="25400" rIns="25400" anchor="ctr">
-            <a:spAutoFit/>
-          </a:bodyPr>
-          <a:lstStyle/>
-          <a:p>
-            <a:pPr algn="r">
-              <a:defRPr sz="1000" b="0">
-                <a:solidFill>
-                  <a:srgbClr val="1F2B35"/>
-                </a:solidFill>
-                <a:latin typeface="Apple SD Gothic Neo"/>
-              </a:defRPr>
-            </a:pPr>
-            <a:r>
-              <a:t>1.029</a:t>
-            </a:r>
-          </a:p>
-        </p:txBody>
-      </p:sp>
-      <p:sp>
-        <p:nvSpPr>
-          <p:cNvPr id="32" name="TextBox 31"/>
-          <p:cNvSpPr txBox="1"/>
-          <p:nvPr/>
-        </p:nvSpPr>
-        <p:spPr>
-          <a:xfrm>
-            <a:off x="11292840" y="3236976"/>
-            <a:ext cx="2468880" cy="274320"/>
-          </a:xfrm>
-          <a:prstGeom prst="rect">
-            <a:avLst/>
-          </a:prstGeom>
-          <a:noFill/>
-        </p:spPr>
-        <p:txBody>
-          <a:bodyPr wrap="square" lIns="25400" rIns="25400" anchor="ctr">
-            <a:spAutoFit/>
-          </a:bodyPr>
-          <a:lstStyle/>
-          <a:p>
-            <a:pPr algn="r">
-              <a:defRPr sz="1000" b="0">
-                <a:solidFill>
-                  <a:srgbClr val="1F2B35"/>
-                </a:solidFill>
-                <a:latin typeface="Apple SD Gothic Neo"/>
-              </a:defRPr>
-            </a:pPr>
-            <a:r>
-              <a:t>88.43%</a:t>
-            </a:r>
-          </a:p>
-        </p:txBody>
-      </p:sp>
-      <p:sp>
-        <p:nvSpPr>
-          <p:cNvPr id="33" name="TextBox 32"/>
-          <p:cNvSpPr txBox="1"/>
-          <p:nvPr/>
-        </p:nvSpPr>
-        <p:spPr>
-          <a:xfrm>
-            <a:off x="868680" y="4160520"/>
-            <a:ext cx="10241280" cy="457200"/>
+              <a:t>시간적 관계와</a:t>
+            </a:r>
+            <a:br/>
+            <a:r>
+              <a:t>다변량 상호작용 학습</a:t>
+            </a:r>
+          </a:p>
+        </p:txBody>
+      </p:sp>
+      <p:sp>
+        <p:nvSpPr>
+          <p:cNvPr id="20" name="TextBox 19"/>
+          <p:cNvSpPr txBox="1"/>
+          <p:nvPr/>
+        </p:nvSpPr>
+        <p:spPr>
+          <a:xfrm>
+            <a:off x="914400" y="5669280"/>
+            <a:ext cx="7772400" cy="320040"/>
           </a:xfrm>
           <a:prstGeom prst="rect">
             <a:avLst/>
@@ -9827,74 +10589,14 @@
               </a:defRPr>
             </a:pPr>
             <a:r>
-              <a:t>표준편차 비율이 0에 가깝지 않아 LSTM·Transformer의 상수 예측 붕괴는 관찰되지 않았습니다.</a:t>
-            </a:r>
-          </a:p>
-        </p:txBody>
-      </p:sp>
-      <p:pic>
-        <p:nvPicPr>
-          <p:cNvPr id="34" name="Picture 33" descr="forecast_comparison.png"/>
-          <p:cNvPicPr>
-            <a:picLocks noChangeAspect="1"/>
-          </p:cNvPicPr>
-          <p:nvPr/>
-        </p:nvPicPr>
-        <p:blipFill>
-          <a:blip r:embed="rId2"/>
-          <a:stretch>
-            <a:fillRect/>
-          </a:stretch>
-        </p:blipFill>
-        <p:spPr>
-          <a:xfrm>
-            <a:off x="868680" y="4663440"/>
-            <a:ext cx="5257800" cy="1691640"/>
-          </a:xfrm>
-          <a:prstGeom prst="rect">
-            <a:avLst/>
-          </a:prstGeom>
-        </p:spPr>
-      </p:pic>
-      <p:sp>
-        <p:nvSpPr>
-          <p:cNvPr id="35" name="TextBox 34"/>
-          <p:cNvSpPr txBox="1"/>
-          <p:nvPr/>
-        </p:nvSpPr>
-        <p:spPr>
-          <a:xfrm>
-            <a:off x="6492240" y="4983480"/>
-            <a:ext cx="4206240" cy="685800"/>
-          </a:xfrm>
-          <a:prstGeom prst="rect">
-            <a:avLst/>
-          </a:prstGeom>
-          <a:noFill/>
-        </p:spPr>
-        <p:txBody>
-          <a:bodyPr wrap="square" lIns="25400" rIns="25400" anchor="ctr">
-            <a:spAutoFit/>
-          </a:bodyPr>
-          <a:lstStyle/>
-          <a:p>
-            <a:pPr algn="l">
-              <a:defRPr sz="1600" b="1">
-                <a:solidFill>
-                  <a:srgbClr val="1F2B35"/>
-                </a:solidFill>
-                <a:latin typeface="Apple SD Gothic Neo"/>
-              </a:defRPr>
-            </a:pPr>
-            <a:r>
-              <a:t>그래프와 수치를 함께 읽어야 모델의 실제 성능을 판단할 수 있습니다.</a:t>
-            </a:r>
-          </a:p>
-        </p:txBody>
-      </p:sp>
-      <p:sp>
-        <p:nvSpPr>
-          <p:cNvPr id="36" name="TextBox 35"/>
+              <a:t>공통 입력: 지역 날씨 + 시간 특성 + 과거 전력수요</a:t>
+            </a:r>
+          </a:p>
+        </p:txBody>
+      </p:sp>
+      <p:sp>
+        <p:nvSpPr>
+          <p:cNvPr id="21" name="TextBox 20"/>
           <p:cNvSpPr txBox="1"/>
           <p:nvPr/>
         </p:nvSpPr>
@@ -9930,7 +10632,7 @@
       </p:sp>
       <p:sp>
         <p:nvSpPr>
-          <p:cNvPr id="37" name="TextBox 36"/>
+          <p:cNvPr id="22" name="TextBox 21"/>
           <p:cNvSpPr txBox="1"/>
           <p:nvPr/>
         </p:nvSpPr>
@@ -10021,7 +10723,7 @@
               </a:defRPr>
             </a:pPr>
             <a:r>
-              <a:t>07 / UNCERTAINTY</a:t>
+              <a:t>06 / TRAINING</a:t>
             </a:r>
           </a:p>
         </p:txBody>
@@ -10057,7 +10759,7 @@
               </a:defRPr>
             </a:pPr>
             <a:r>
-              <a:t>예측 구간과 불확실성</a:t>
+              <a:t>학습 설정과 평가 지표</a:t>
             </a:r>
           </a:p>
         </p:txBody>
@@ -10107,195 +10809,96 @@
           </a:p>
         </p:txBody>
       </p:sp>
-      <p:pic>
-        <p:nvPicPr>
-          <p:cNvPr id="5" name="Picture 4" descr="arima_interval.png"/>
-          <p:cNvPicPr>
-            <a:picLocks noChangeAspect="1"/>
-          </p:cNvPicPr>
-          <p:nvPr/>
-        </p:nvPicPr>
-        <p:blipFill>
-          <a:blip r:embed="rId2"/>
-          <a:stretch>
-            <a:fillRect/>
-          </a:stretch>
-        </p:blipFill>
-        <p:spPr>
-          <a:xfrm>
-            <a:off x="685800" y="1417320"/>
-            <a:ext cx="3611880" cy="1828800"/>
-          </a:xfrm>
-          <a:prstGeom prst="rect">
-            <a:avLst/>
-          </a:prstGeom>
-        </p:spPr>
-      </p:pic>
-      <p:pic>
-        <p:nvPicPr>
-          <p:cNvPr id="6" name="Picture 5" descr="lstm_interval.png"/>
-          <p:cNvPicPr>
-            <a:picLocks noChangeAspect="1"/>
-          </p:cNvPicPr>
-          <p:nvPr/>
-        </p:nvPicPr>
-        <p:blipFill>
-          <a:blip r:embed="rId3"/>
-          <a:stretch>
-            <a:fillRect/>
-          </a:stretch>
-        </p:blipFill>
-        <p:spPr>
-          <a:xfrm>
-            <a:off x="4297680" y="1417320"/>
-            <a:ext cx="3611880" cy="1828800"/>
-          </a:xfrm>
-          <a:prstGeom prst="rect">
-            <a:avLst/>
-          </a:prstGeom>
-        </p:spPr>
-      </p:pic>
-      <p:pic>
-        <p:nvPicPr>
-          <p:cNvPr id="7" name="Picture 6" descr="transformer_interval.png"/>
-          <p:cNvPicPr>
-            <a:picLocks noChangeAspect="1"/>
-          </p:cNvPicPr>
-          <p:nvPr/>
-        </p:nvPicPr>
-        <p:blipFill>
-          <a:blip r:embed="rId4"/>
-          <a:stretch>
-            <a:fillRect/>
-          </a:stretch>
-        </p:blipFill>
-        <p:spPr>
-          <a:xfrm>
-            <a:off x="7909560" y="1417320"/>
-            <a:ext cx="3611880" cy="1828800"/>
-          </a:xfrm>
-          <a:prstGeom prst="rect">
-            <a:avLst/>
-          </a:prstGeom>
-        </p:spPr>
-      </p:pic>
-      <p:sp>
-        <p:nvSpPr>
-          <p:cNvPr id="8" name="TextBox 7"/>
-          <p:cNvSpPr txBox="1"/>
-          <p:nvPr/>
-        </p:nvSpPr>
-        <p:spPr>
-          <a:xfrm>
-            <a:off x="1920240" y="3383280"/>
-            <a:ext cx="1188720" cy="228600"/>
-          </a:xfrm>
-          <a:prstGeom prst="rect">
-            <a:avLst/>
-          </a:prstGeom>
-          <a:noFill/>
-        </p:spPr>
-        <p:txBody>
-          <a:bodyPr wrap="square" lIns="25400" rIns="25400" anchor="ctr">
-            <a:spAutoFit/>
-          </a:bodyPr>
-          <a:lstStyle/>
-          <a:p>
-            <a:pPr algn="ctr">
-              <a:defRPr sz="1100" b="1">
-                <a:solidFill>
-                  <a:srgbClr val="205B89"/>
-                </a:solidFill>
-                <a:latin typeface="Apple SD Gothic Neo"/>
-              </a:defRPr>
-            </a:pPr>
-            <a:r>
-              <a:t>ARIMA</a:t>
-            </a:r>
-          </a:p>
-        </p:txBody>
-      </p:sp>
-      <p:sp>
-        <p:nvSpPr>
-          <p:cNvPr id="9" name="TextBox 8"/>
-          <p:cNvSpPr txBox="1"/>
-          <p:nvPr/>
-        </p:nvSpPr>
-        <p:spPr>
-          <a:xfrm>
-            <a:off x="5577840" y="3383280"/>
-            <a:ext cx="1188720" cy="228600"/>
-          </a:xfrm>
-          <a:prstGeom prst="rect">
-            <a:avLst/>
-          </a:prstGeom>
-          <a:noFill/>
-        </p:spPr>
-        <p:txBody>
-          <a:bodyPr wrap="square" lIns="25400" rIns="25400" anchor="ctr">
-            <a:spAutoFit/>
-          </a:bodyPr>
-          <a:lstStyle/>
-          <a:p>
-            <a:pPr algn="ctr">
-              <a:defRPr sz="1100" b="1">
-                <a:solidFill>
-                  <a:srgbClr val="F09746"/>
-                </a:solidFill>
-                <a:latin typeface="Apple SD Gothic Neo"/>
-              </a:defRPr>
-            </a:pPr>
-            <a:r>
-              <a:t>LSTM</a:t>
-            </a:r>
-          </a:p>
-        </p:txBody>
-      </p:sp>
-      <p:sp>
-        <p:nvSpPr>
-          <p:cNvPr id="10" name="TextBox 9"/>
-          <p:cNvSpPr txBox="1"/>
-          <p:nvPr/>
-        </p:nvSpPr>
-        <p:spPr>
-          <a:xfrm>
-            <a:off x="9052560" y="3383280"/>
-            <a:ext cx="1371600" cy="228600"/>
-          </a:xfrm>
-          <a:prstGeom prst="rect">
-            <a:avLst/>
-          </a:prstGeom>
-          <a:noFill/>
-        </p:spPr>
-        <p:txBody>
-          <a:bodyPr wrap="square" lIns="25400" rIns="25400" anchor="ctr">
-            <a:spAutoFit/>
-          </a:bodyPr>
-          <a:lstStyle/>
-          <a:p>
-            <a:pPr algn="ctr">
-              <a:defRPr sz="1100" b="1">
-                <a:solidFill>
-                  <a:srgbClr val="43BECA"/>
-                </a:solidFill>
-                <a:latin typeface="Apple SD Gothic Neo"/>
-              </a:defRPr>
-            </a:pPr>
-            <a:r>
-              <a:t>Transformer</a:t>
-            </a:r>
-          </a:p>
-        </p:txBody>
-      </p:sp>
-      <p:sp>
-        <p:nvSpPr>
-          <p:cNvPr id="11" name="Rectangle 10"/>
+      <p:sp>
+        <p:nvSpPr>
+          <p:cNvPr id="5" name="Rounded Rectangle 4"/>
           <p:cNvSpPr/>
           <p:nvPr/>
         </p:nvSpPr>
         <p:spPr>
           <a:xfrm>
-            <a:off x="914400" y="4187952"/>
+            <a:off x="777240" y="1600200"/>
+            <a:ext cx="5029200" cy="3977639"/>
+          </a:xfrm>
+          <a:prstGeom prst="roundRect">
+            <a:avLst/>
+          </a:prstGeom>
+          <a:solidFill>
+            <a:srgbClr val="EFF5F8"/>
+          </a:solidFill>
+          <a:ln>
+            <a:solidFill>
+              <a:srgbClr val="EFF5F8"/>
+            </a:solidFill>
+          </a:ln>
+        </p:spPr>
+        <p:style>
+          <a:lnRef idx="1">
+            <a:schemeClr val="accent1"/>
+          </a:lnRef>
+          <a:fillRef idx="3">
+            <a:schemeClr val="accent1"/>
+          </a:fillRef>
+          <a:effectRef idx="2">
+            <a:schemeClr val="accent1"/>
+          </a:effectRef>
+          <a:fontRef idx="minor">
+            <a:schemeClr val="lt1"/>
+          </a:fontRef>
+        </p:style>
+        <p:txBody>
+          <a:bodyPr rtlCol="0" anchor="ctr"/>
+          <a:lstStyle/>
+          <a:p>
+            <a:pPr algn="ctr"/>
+          </a:p>
+        </p:txBody>
+      </p:sp>
+      <p:sp>
+        <p:nvSpPr>
+          <p:cNvPr id="6" name="TextBox 5"/>
+          <p:cNvSpPr txBox="1"/>
+          <p:nvPr/>
+        </p:nvSpPr>
+        <p:spPr>
+          <a:xfrm>
+            <a:off x="1097280" y="1920240"/>
+            <a:ext cx="3200400" cy="320040"/>
+          </a:xfrm>
+          <a:prstGeom prst="rect">
+            <a:avLst/>
+          </a:prstGeom>
+          <a:noFill/>
+        </p:spPr>
+        <p:txBody>
+          <a:bodyPr wrap="square" lIns="25400" rIns="25400" anchor="ctr">
+            <a:spAutoFit/>
+          </a:bodyPr>
+          <a:lstStyle/>
+          <a:p>
+            <a:pPr algn="l">
+              <a:defRPr sz="1800" b="1">
+                <a:solidFill>
+                  <a:srgbClr val="0F1F30"/>
+                </a:solidFill>
+                <a:latin typeface="Apple SD Gothic Neo"/>
+              </a:defRPr>
+            </a:pPr>
+            <a:r>
+              <a:t>학습 설정</a:t>
+            </a:r>
+          </a:p>
+        </p:txBody>
+      </p:sp>
+      <p:sp>
+        <p:nvSpPr>
+          <p:cNvPr id="7" name="Rectangle 6"/>
+          <p:cNvSpPr/>
+          <p:nvPr/>
+        </p:nvSpPr>
+        <p:spPr>
+          <a:xfrm>
+            <a:off x="1097280" y="2679191"/>
             <a:ext cx="82296" cy="82296"/>
           </a:xfrm>
           <a:prstGeom prst="rect">
@@ -10334,14 +10937,14 @@
       </p:sp>
       <p:sp>
         <p:nvSpPr>
-          <p:cNvPr id="12" name="TextBox 11"/>
-          <p:cNvSpPr txBox="1"/>
-          <p:nvPr/>
-        </p:nvSpPr>
-        <p:spPr>
-          <a:xfrm>
-            <a:off x="1115568" y="4069080"/>
-            <a:ext cx="9857232" cy="329184"/>
+          <p:cNvPr id="8" name="TextBox 7"/>
+          <p:cNvSpPr txBox="1"/>
+          <p:nvPr/>
+        </p:nvSpPr>
+        <p:spPr>
+          <a:xfrm>
+            <a:off x="1298448" y="2560320"/>
+            <a:ext cx="4005072" cy="329184"/>
           </a:xfrm>
           <a:prstGeom prst="rect">
             <a:avLst/>
@@ -10355,7 +10958,7 @@
           <a:lstStyle/>
           <a:p>
             <a:pPr algn="l">
-              <a:defRPr sz="1500" b="0">
+              <a:defRPr sz="1400" b="0">
                 <a:solidFill>
                   <a:srgbClr val="1F2B35"/>
                 </a:solidFill>
@@ -10363,20 +10966,20 @@
               </a:defRPr>
             </a:pPr>
             <a:r>
-              <a:t>95% 구간 폭은 검증 잔차 표준편차로 계산</a:t>
-            </a:r>
-          </a:p>
-        </p:txBody>
-      </p:sp>
-      <p:sp>
-        <p:nvSpPr>
-          <p:cNvPr id="13" name="Rectangle 12"/>
+              <a:t>손실 함수: MSELoss</a:t>
+            </a:r>
+          </a:p>
+        </p:txBody>
+      </p:sp>
+      <p:sp>
+        <p:nvSpPr>
+          <p:cNvPr id="9" name="Rectangle 8"/>
           <p:cNvSpPr/>
           <p:nvPr/>
         </p:nvSpPr>
         <p:spPr>
           <a:xfrm>
-            <a:off x="914400" y="4626864"/>
+            <a:off x="1097280" y="3209544"/>
             <a:ext cx="82296" cy="82296"/>
           </a:xfrm>
           <a:prstGeom prst="rect">
@@ -10415,14 +11018,14 @@
       </p:sp>
       <p:sp>
         <p:nvSpPr>
-          <p:cNvPr id="14" name="TextBox 13"/>
-          <p:cNvSpPr txBox="1"/>
-          <p:nvPr/>
-        </p:nvSpPr>
-        <p:spPr>
-          <a:xfrm>
-            <a:off x="1115568" y="4507992"/>
-            <a:ext cx="9857232" cy="329184"/>
+          <p:cNvPr id="10" name="TextBox 9"/>
+          <p:cNvSpPr txBox="1"/>
+          <p:nvPr/>
+        </p:nvSpPr>
+        <p:spPr>
+          <a:xfrm>
+            <a:off x="1298448" y="3090672"/>
+            <a:ext cx="4005072" cy="329184"/>
           </a:xfrm>
           <a:prstGeom prst="rect">
             <a:avLst/>
@@ -10436,7 +11039,7 @@
           <a:lstStyle/>
           <a:p>
             <a:pPr algn="l">
-              <a:defRPr sz="1500" b="0">
+              <a:defRPr sz="1400" b="0">
                 <a:solidFill>
                   <a:srgbClr val="1F2B35"/>
                 </a:solidFill>
@@ -10444,20 +11047,20 @@
               </a:defRPr>
             </a:pPr>
             <a:r>
-              <a:t>평가 정답을 구간 계산에 사용하지 않아 누출 방지</a:t>
-            </a:r>
-          </a:p>
-        </p:txBody>
-      </p:sp>
-      <p:sp>
-        <p:nvSpPr>
-          <p:cNvPr id="15" name="Rectangle 14"/>
+              <a:t>Optimizer: Adam, learning rate 0.001</a:t>
+            </a:r>
+          </a:p>
+        </p:txBody>
+      </p:sp>
+      <p:sp>
+        <p:nvSpPr>
+          <p:cNvPr id="11" name="Rectangle 10"/>
           <p:cNvSpPr/>
           <p:nvPr/>
         </p:nvSpPr>
         <p:spPr>
           <a:xfrm>
-            <a:off x="914400" y="5065776"/>
+            <a:off x="1097280" y="3739896"/>
             <a:ext cx="82296" cy="82296"/>
           </a:xfrm>
           <a:prstGeom prst="rect">
@@ -10496,14 +11099,14 @@
       </p:sp>
       <p:sp>
         <p:nvSpPr>
-          <p:cNvPr id="16" name="TextBox 15"/>
-          <p:cNvSpPr txBox="1"/>
-          <p:nvPr/>
-        </p:nvSpPr>
-        <p:spPr>
-          <a:xfrm>
-            <a:off x="1115568" y="4946904"/>
-            <a:ext cx="9857232" cy="329184"/>
+          <p:cNvPr id="12" name="TextBox 11"/>
+          <p:cNvSpPr txBox="1"/>
+          <p:nvPr/>
+        </p:nvSpPr>
+        <p:spPr>
+          <a:xfrm>
+            <a:off x="1298448" y="3621024"/>
+            <a:ext cx="4005072" cy="329184"/>
           </a:xfrm>
           <a:prstGeom prst="rect">
             <a:avLst/>
@@ -10517,7 +11120,7 @@
           <a:lstStyle/>
           <a:p>
             <a:pPr algn="l">
-              <a:defRPr sz="1500" b="0">
+              <a:defRPr sz="1400" b="0">
                 <a:solidFill>
                   <a:srgbClr val="1F2B35"/>
                 </a:solidFill>
@@ -10525,20 +11128,20 @@
               </a:defRPr>
             </a:pPr>
             <a:r>
-              <a:t>포함률은 실제값이 구간 안에 들어간 비율</a:t>
-            </a:r>
-          </a:p>
-        </p:txBody>
-      </p:sp>
-      <p:sp>
-        <p:nvSpPr>
-          <p:cNvPr id="17" name="Rectangle 16"/>
+              <a:t>LSTM: hidden size 64, 2 layers</a:t>
+            </a:r>
+          </a:p>
+        </p:txBody>
+      </p:sp>
+      <p:sp>
+        <p:nvSpPr>
+          <p:cNvPr id="13" name="Rectangle 12"/>
           <p:cNvSpPr/>
           <p:nvPr/>
         </p:nvSpPr>
         <p:spPr>
           <a:xfrm>
-            <a:off x="914400" y="5504688"/>
+            <a:off x="1097280" y="4270247"/>
             <a:ext cx="82296" cy="82296"/>
           </a:xfrm>
           <a:prstGeom prst="rect">
@@ -10577,14 +11180,176 @@
       </p:sp>
       <p:sp>
         <p:nvSpPr>
+          <p:cNvPr id="14" name="TextBox 13"/>
+          <p:cNvSpPr txBox="1"/>
+          <p:nvPr/>
+        </p:nvSpPr>
+        <p:spPr>
+          <a:xfrm>
+            <a:off x="1298448" y="4151375"/>
+            <a:ext cx="4005072" cy="329184"/>
+          </a:xfrm>
+          <a:prstGeom prst="rect">
+            <a:avLst/>
+          </a:prstGeom>
+          <a:noFill/>
+        </p:spPr>
+        <p:txBody>
+          <a:bodyPr wrap="square" lIns="25400" rIns="25400" anchor="ctr">
+            <a:spAutoFit/>
+          </a:bodyPr>
+          <a:lstStyle/>
+          <a:p>
+            <a:pPr algn="l">
+              <a:defRPr sz="1400" b="0">
+                <a:solidFill>
+                  <a:srgbClr val="1F2B35"/>
+                </a:solidFill>
+                <a:latin typeface="Apple SD Gothic Neo"/>
+              </a:defRPr>
+            </a:pPr>
+            <a:r>
+              <a:t>Transformer: d_model 64, 4 heads, 2 layers</a:t>
+            </a:r>
+          </a:p>
+        </p:txBody>
+      </p:sp>
+      <p:sp>
+        <p:nvSpPr>
+          <p:cNvPr id="15" name="Rectangle 14"/>
+          <p:cNvSpPr/>
+          <p:nvPr/>
+        </p:nvSpPr>
+        <p:spPr>
+          <a:xfrm>
+            <a:off x="1097280" y="4800599"/>
+            <a:ext cx="82296" cy="82296"/>
+          </a:xfrm>
+          <a:prstGeom prst="rect">
+            <a:avLst/>
+          </a:prstGeom>
+          <a:solidFill>
+            <a:srgbClr val="43BECA"/>
+          </a:solidFill>
+          <a:ln>
+            <a:solidFill>
+              <a:srgbClr val="43BECA"/>
+            </a:solidFill>
+          </a:ln>
+        </p:spPr>
+        <p:style>
+          <a:lnRef idx="1">
+            <a:schemeClr val="accent1"/>
+          </a:lnRef>
+          <a:fillRef idx="3">
+            <a:schemeClr val="accent1"/>
+          </a:fillRef>
+          <a:effectRef idx="2">
+            <a:schemeClr val="accent1"/>
+          </a:effectRef>
+          <a:fontRef idx="minor">
+            <a:schemeClr val="lt1"/>
+          </a:fontRef>
+        </p:style>
+        <p:txBody>
+          <a:bodyPr rtlCol="0" anchor="ctr"/>
+          <a:lstStyle/>
+          <a:p>
+            <a:pPr algn="ctr"/>
+          </a:p>
+        </p:txBody>
+      </p:sp>
+      <p:sp>
+        <p:nvSpPr>
+          <p:cNvPr id="16" name="TextBox 15"/>
+          <p:cNvSpPr txBox="1"/>
+          <p:nvPr/>
+        </p:nvSpPr>
+        <p:spPr>
+          <a:xfrm>
+            <a:off x="1298448" y="4681727"/>
+            <a:ext cx="4005072" cy="329184"/>
+          </a:xfrm>
+          <a:prstGeom prst="rect">
+            <a:avLst/>
+          </a:prstGeom>
+          <a:noFill/>
+        </p:spPr>
+        <p:txBody>
+          <a:bodyPr wrap="square" lIns="25400" rIns="25400" anchor="ctr">
+            <a:spAutoFit/>
+          </a:bodyPr>
+          <a:lstStyle/>
+          <a:p>
+            <a:pPr algn="l">
+              <a:defRPr sz="1400" b="0">
+                <a:solidFill>
+                  <a:srgbClr val="1F2B35"/>
+                </a:solidFill>
+                <a:latin typeface="Apple SD Gothic Neo"/>
+              </a:defRPr>
+            </a:pPr>
+            <a:r>
+              <a:t>lookback: 최근 24시간</a:t>
+            </a:r>
+          </a:p>
+        </p:txBody>
+      </p:sp>
+      <p:sp>
+        <p:nvSpPr>
+          <p:cNvPr id="17" name="Rounded Rectangle 16"/>
+          <p:cNvSpPr/>
+          <p:nvPr/>
+        </p:nvSpPr>
+        <p:spPr>
+          <a:xfrm>
+            <a:off x="6217920" y="1600200"/>
+            <a:ext cx="5074920" cy="3977639"/>
+          </a:xfrm>
+          <a:prstGeom prst="roundRect">
+            <a:avLst/>
+          </a:prstGeom>
+          <a:solidFill>
+            <a:srgbClr val="0F1F30"/>
+          </a:solidFill>
+          <a:ln>
+            <a:solidFill>
+              <a:srgbClr val="0F1F30"/>
+            </a:solidFill>
+          </a:ln>
+        </p:spPr>
+        <p:style>
+          <a:lnRef idx="1">
+            <a:schemeClr val="accent1"/>
+          </a:lnRef>
+          <a:fillRef idx="3">
+            <a:schemeClr val="accent1"/>
+          </a:fillRef>
+          <a:effectRef idx="2">
+            <a:schemeClr val="accent1"/>
+          </a:effectRef>
+          <a:fontRef idx="minor">
+            <a:schemeClr val="lt1"/>
+          </a:fontRef>
+        </p:style>
+        <p:txBody>
+          <a:bodyPr rtlCol="0" anchor="ctr"/>
+          <a:lstStyle/>
+          <a:p>
+            <a:pPr algn="ctr"/>
+          </a:p>
+        </p:txBody>
+      </p:sp>
+      <p:sp>
+        <p:nvSpPr>
           <p:cNvPr id="18" name="TextBox 17"/>
           <p:cNvSpPr txBox="1"/>
           <p:nvPr/>
         </p:nvSpPr>
         <p:spPr>
           <a:xfrm>
-            <a:off x="1115568" y="5385816"/>
-            <a:ext cx="9857232" cy="329184"/>
+            <a:off x="6583680" y="1920240"/>
+            <a:ext cx="3200400" cy="320040"/>
           </a:xfrm>
           <a:prstGeom prst="rect">
             <a:avLst/>
@@ -10598,22 +11363,427 @@
           <a:lstStyle/>
           <a:p>
             <a:pPr algn="l">
-              <a:defRPr sz="1500" b="0">
-                <a:solidFill>
-                  <a:srgbClr val="1F2B35"/>
-                </a:solidFill>
-                <a:latin typeface="Apple SD Gothic Neo"/>
-              </a:defRPr>
-            </a:pPr>
-            <a:r>
-              <a:t>현재 구간은 잔차 기반 근사이며 확률 보장은 아님</a:t>
-            </a:r>
-          </a:p>
-        </p:txBody>
-      </p:sp>
-      <p:sp>
-        <p:nvSpPr>
-          <p:cNvPr id="19" name="TextBox 18"/>
+              <a:defRPr sz="1800" b="1">
+                <a:solidFill>
+                  <a:srgbClr val="FFFFFF"/>
+                </a:solidFill>
+                <a:latin typeface="Apple SD Gothic Neo"/>
+              </a:defRPr>
+            </a:pPr>
+            <a:r>
+              <a:t>평가 지표</a:t>
+            </a:r>
+          </a:p>
+        </p:txBody>
+      </p:sp>
+      <p:sp>
+        <p:nvSpPr>
+          <p:cNvPr id="19" name="Rectangle 18"/>
+          <p:cNvSpPr/>
+          <p:nvPr/>
+        </p:nvSpPr>
+        <p:spPr>
+          <a:xfrm>
+            <a:off x="6583680" y="2679191"/>
+            <a:ext cx="82296" cy="82296"/>
+          </a:xfrm>
+          <a:prstGeom prst="rect">
+            <a:avLst/>
+          </a:prstGeom>
+          <a:solidFill>
+            <a:srgbClr val="43BECA"/>
+          </a:solidFill>
+          <a:ln>
+            <a:solidFill>
+              <a:srgbClr val="43BECA"/>
+            </a:solidFill>
+          </a:ln>
+        </p:spPr>
+        <p:style>
+          <a:lnRef idx="1">
+            <a:schemeClr val="accent1"/>
+          </a:lnRef>
+          <a:fillRef idx="3">
+            <a:schemeClr val="accent1"/>
+          </a:fillRef>
+          <a:effectRef idx="2">
+            <a:schemeClr val="accent1"/>
+          </a:effectRef>
+          <a:fontRef idx="minor">
+            <a:schemeClr val="lt1"/>
+          </a:fontRef>
+        </p:style>
+        <p:txBody>
+          <a:bodyPr rtlCol="0" anchor="ctr"/>
+          <a:lstStyle/>
+          <a:p>
+            <a:pPr algn="ctr"/>
+          </a:p>
+        </p:txBody>
+      </p:sp>
+      <p:sp>
+        <p:nvSpPr>
+          <p:cNvPr id="20" name="TextBox 19"/>
+          <p:cNvSpPr txBox="1"/>
+          <p:nvPr/>
+        </p:nvSpPr>
+        <p:spPr>
+          <a:xfrm>
+            <a:off x="6784848" y="2560320"/>
+            <a:ext cx="4005072" cy="329184"/>
+          </a:xfrm>
+          <a:prstGeom prst="rect">
+            <a:avLst/>
+          </a:prstGeom>
+          <a:noFill/>
+        </p:spPr>
+        <p:txBody>
+          <a:bodyPr wrap="square" lIns="25400" rIns="25400" anchor="ctr">
+            <a:spAutoFit/>
+          </a:bodyPr>
+          <a:lstStyle/>
+          <a:p>
+            <a:pPr algn="l">
+              <a:defRPr sz="1400" b="0">
+                <a:solidFill>
+                  <a:srgbClr val="DCEBF1"/>
+                </a:solidFill>
+                <a:latin typeface="Apple SD Gothic Neo"/>
+              </a:defRPr>
+            </a:pPr>
+            <a:r>
+              <a:t>MAE: 평균 절대오차</a:t>
+            </a:r>
+          </a:p>
+        </p:txBody>
+      </p:sp>
+      <p:sp>
+        <p:nvSpPr>
+          <p:cNvPr id="21" name="Rectangle 20"/>
+          <p:cNvSpPr/>
+          <p:nvPr/>
+        </p:nvSpPr>
+        <p:spPr>
+          <a:xfrm>
+            <a:off x="6583680" y="3209544"/>
+            <a:ext cx="82296" cy="82296"/>
+          </a:xfrm>
+          <a:prstGeom prst="rect">
+            <a:avLst/>
+          </a:prstGeom>
+          <a:solidFill>
+            <a:srgbClr val="43BECA"/>
+          </a:solidFill>
+          <a:ln>
+            <a:solidFill>
+              <a:srgbClr val="43BECA"/>
+            </a:solidFill>
+          </a:ln>
+        </p:spPr>
+        <p:style>
+          <a:lnRef idx="1">
+            <a:schemeClr val="accent1"/>
+          </a:lnRef>
+          <a:fillRef idx="3">
+            <a:schemeClr val="accent1"/>
+          </a:fillRef>
+          <a:effectRef idx="2">
+            <a:schemeClr val="accent1"/>
+          </a:effectRef>
+          <a:fontRef idx="minor">
+            <a:schemeClr val="lt1"/>
+          </a:fontRef>
+        </p:style>
+        <p:txBody>
+          <a:bodyPr rtlCol="0" anchor="ctr"/>
+          <a:lstStyle/>
+          <a:p>
+            <a:pPr algn="ctr"/>
+          </a:p>
+        </p:txBody>
+      </p:sp>
+      <p:sp>
+        <p:nvSpPr>
+          <p:cNvPr id="22" name="TextBox 21"/>
+          <p:cNvSpPr txBox="1"/>
+          <p:nvPr/>
+        </p:nvSpPr>
+        <p:spPr>
+          <a:xfrm>
+            <a:off x="6784848" y="3090672"/>
+            <a:ext cx="4005072" cy="329184"/>
+          </a:xfrm>
+          <a:prstGeom prst="rect">
+            <a:avLst/>
+          </a:prstGeom>
+          <a:noFill/>
+        </p:spPr>
+        <p:txBody>
+          <a:bodyPr wrap="square" lIns="25400" rIns="25400" anchor="ctr">
+            <a:spAutoFit/>
+          </a:bodyPr>
+          <a:lstStyle/>
+          <a:p>
+            <a:pPr algn="l">
+              <a:defRPr sz="1400" b="0">
+                <a:solidFill>
+                  <a:srgbClr val="DCEBF1"/>
+                </a:solidFill>
+                <a:latin typeface="Apple SD Gothic Neo"/>
+              </a:defRPr>
+            </a:pPr>
+            <a:r>
+              <a:t>RMSE: 큰 오차에 더 민감</a:t>
+            </a:r>
+          </a:p>
+        </p:txBody>
+      </p:sp>
+      <p:sp>
+        <p:nvSpPr>
+          <p:cNvPr id="23" name="Rectangle 22"/>
+          <p:cNvSpPr/>
+          <p:nvPr/>
+        </p:nvSpPr>
+        <p:spPr>
+          <a:xfrm>
+            <a:off x="6583680" y="3739896"/>
+            <a:ext cx="82296" cy="82296"/>
+          </a:xfrm>
+          <a:prstGeom prst="rect">
+            <a:avLst/>
+          </a:prstGeom>
+          <a:solidFill>
+            <a:srgbClr val="43BECA"/>
+          </a:solidFill>
+          <a:ln>
+            <a:solidFill>
+              <a:srgbClr val="43BECA"/>
+            </a:solidFill>
+          </a:ln>
+        </p:spPr>
+        <p:style>
+          <a:lnRef idx="1">
+            <a:schemeClr val="accent1"/>
+          </a:lnRef>
+          <a:fillRef idx="3">
+            <a:schemeClr val="accent1"/>
+          </a:fillRef>
+          <a:effectRef idx="2">
+            <a:schemeClr val="accent1"/>
+          </a:effectRef>
+          <a:fontRef idx="minor">
+            <a:schemeClr val="lt1"/>
+          </a:fontRef>
+        </p:style>
+        <p:txBody>
+          <a:bodyPr rtlCol="0" anchor="ctr"/>
+          <a:lstStyle/>
+          <a:p>
+            <a:pPr algn="ctr"/>
+          </a:p>
+        </p:txBody>
+      </p:sp>
+      <p:sp>
+        <p:nvSpPr>
+          <p:cNvPr id="24" name="TextBox 23"/>
+          <p:cNvSpPr txBox="1"/>
+          <p:nvPr/>
+        </p:nvSpPr>
+        <p:spPr>
+          <a:xfrm>
+            <a:off x="6784848" y="3621024"/>
+            <a:ext cx="4005072" cy="329184"/>
+          </a:xfrm>
+          <a:prstGeom prst="rect">
+            <a:avLst/>
+          </a:prstGeom>
+          <a:noFill/>
+        </p:spPr>
+        <p:txBody>
+          <a:bodyPr wrap="square" lIns="25400" rIns="25400" anchor="ctr">
+            <a:spAutoFit/>
+          </a:bodyPr>
+          <a:lstStyle/>
+          <a:p>
+            <a:pPr algn="l">
+              <a:defRPr sz="1400" b="0">
+                <a:solidFill>
+                  <a:srgbClr val="DCEBF1"/>
+                </a:solidFill>
+                <a:latin typeface="Apple SD Gothic Neo"/>
+              </a:defRPr>
+            </a:pPr>
+            <a:r>
+              <a:t>MAPE: 상대 오차 비율</a:t>
+            </a:r>
+          </a:p>
+        </p:txBody>
+      </p:sp>
+      <p:sp>
+        <p:nvSpPr>
+          <p:cNvPr id="25" name="Rectangle 24"/>
+          <p:cNvSpPr/>
+          <p:nvPr/>
+        </p:nvSpPr>
+        <p:spPr>
+          <a:xfrm>
+            <a:off x="6583680" y="4270247"/>
+            <a:ext cx="82296" cy="82296"/>
+          </a:xfrm>
+          <a:prstGeom prst="rect">
+            <a:avLst/>
+          </a:prstGeom>
+          <a:solidFill>
+            <a:srgbClr val="43BECA"/>
+          </a:solidFill>
+          <a:ln>
+            <a:solidFill>
+              <a:srgbClr val="43BECA"/>
+            </a:solidFill>
+          </a:ln>
+        </p:spPr>
+        <p:style>
+          <a:lnRef idx="1">
+            <a:schemeClr val="accent1"/>
+          </a:lnRef>
+          <a:fillRef idx="3">
+            <a:schemeClr val="accent1"/>
+          </a:fillRef>
+          <a:effectRef idx="2">
+            <a:schemeClr val="accent1"/>
+          </a:effectRef>
+          <a:fontRef idx="minor">
+            <a:schemeClr val="lt1"/>
+          </a:fontRef>
+        </p:style>
+        <p:txBody>
+          <a:bodyPr rtlCol="0" anchor="ctr"/>
+          <a:lstStyle/>
+          <a:p>
+            <a:pPr algn="ctr"/>
+          </a:p>
+        </p:txBody>
+      </p:sp>
+      <p:sp>
+        <p:nvSpPr>
+          <p:cNvPr id="26" name="TextBox 25"/>
+          <p:cNvSpPr txBox="1"/>
+          <p:nvPr/>
+        </p:nvSpPr>
+        <p:spPr>
+          <a:xfrm>
+            <a:off x="6784848" y="4151375"/>
+            <a:ext cx="4005072" cy="329184"/>
+          </a:xfrm>
+          <a:prstGeom prst="rect">
+            <a:avLst/>
+          </a:prstGeom>
+          <a:noFill/>
+        </p:spPr>
+        <p:txBody>
+          <a:bodyPr wrap="square" lIns="25400" rIns="25400" anchor="ctr">
+            <a:spAutoFit/>
+          </a:bodyPr>
+          <a:lstStyle/>
+          <a:p>
+            <a:pPr algn="l">
+              <a:defRPr sz="1400" b="0">
+                <a:solidFill>
+                  <a:srgbClr val="DCEBF1"/>
+                </a:solidFill>
+                <a:latin typeface="Apple SD Gothic Neo"/>
+              </a:defRPr>
+            </a:pPr>
+            <a:r>
+              <a:t>표준편차 비율: 상수 예측 붕괴 확인</a:t>
+            </a:r>
+          </a:p>
+        </p:txBody>
+      </p:sp>
+      <p:sp>
+        <p:nvSpPr>
+          <p:cNvPr id="27" name="Rectangle 26"/>
+          <p:cNvSpPr/>
+          <p:nvPr/>
+        </p:nvSpPr>
+        <p:spPr>
+          <a:xfrm>
+            <a:off x="6583680" y="4800599"/>
+            <a:ext cx="82296" cy="82296"/>
+          </a:xfrm>
+          <a:prstGeom prst="rect">
+            <a:avLst/>
+          </a:prstGeom>
+          <a:solidFill>
+            <a:srgbClr val="43BECA"/>
+          </a:solidFill>
+          <a:ln>
+            <a:solidFill>
+              <a:srgbClr val="43BECA"/>
+            </a:solidFill>
+          </a:ln>
+        </p:spPr>
+        <p:style>
+          <a:lnRef idx="1">
+            <a:schemeClr val="accent1"/>
+          </a:lnRef>
+          <a:fillRef idx="3">
+            <a:schemeClr val="accent1"/>
+          </a:fillRef>
+          <a:effectRef idx="2">
+            <a:schemeClr val="accent1"/>
+          </a:effectRef>
+          <a:fontRef idx="minor">
+            <a:schemeClr val="lt1"/>
+          </a:fontRef>
+        </p:style>
+        <p:txBody>
+          <a:bodyPr rtlCol="0" anchor="ctr"/>
+          <a:lstStyle/>
+          <a:p>
+            <a:pPr algn="ctr"/>
+          </a:p>
+        </p:txBody>
+      </p:sp>
+      <p:sp>
+        <p:nvSpPr>
+          <p:cNvPr id="28" name="TextBox 27"/>
+          <p:cNvSpPr txBox="1"/>
+          <p:nvPr/>
+        </p:nvSpPr>
+        <p:spPr>
+          <a:xfrm>
+            <a:off x="6784848" y="4681727"/>
+            <a:ext cx="4005072" cy="329184"/>
+          </a:xfrm>
+          <a:prstGeom prst="rect">
+            <a:avLst/>
+          </a:prstGeom>
+          <a:noFill/>
+        </p:spPr>
+        <p:txBody>
+          <a:bodyPr wrap="square" lIns="25400" rIns="25400" anchor="ctr">
+            <a:spAutoFit/>
+          </a:bodyPr>
+          <a:lstStyle/>
+          <a:p>
+            <a:pPr algn="l">
+              <a:defRPr sz="1400" b="0">
+                <a:solidFill>
+                  <a:srgbClr val="DCEBF1"/>
+                </a:solidFill>
+                <a:latin typeface="Apple SD Gothic Neo"/>
+              </a:defRPr>
+            </a:pPr>
+            <a:r>
+              <a:t>95% coverage: 구간 안 실제값 비율</a:t>
+            </a:r>
+          </a:p>
+        </p:txBody>
+      </p:sp>
+      <p:sp>
+        <p:nvSpPr>
+          <p:cNvPr id="29" name="TextBox 28"/>
           <p:cNvSpPr txBox="1"/>
           <p:nvPr/>
         </p:nvSpPr>
@@ -10649,7 +11819,7 @@
       </p:sp>
       <p:sp>
         <p:nvSpPr>
-          <p:cNvPr id="20" name="TextBox 19"/>
+          <p:cNvPr id="30" name="TextBox 29"/>
           <p:cNvSpPr txBox="1"/>
           <p:nvPr/>
         </p:nvSpPr>
@@ -10697,7 +11867,7 @@
     <p:bg>
       <p:bgPr>
         <a:solidFill>
-          <a:srgbClr val="EFF5F8"/>
+          <a:srgbClr val="FFFFFF"/>
         </a:solidFill>
         <a:effectLst/>
       </p:bgPr>
@@ -10740,7 +11910,7 @@
               </a:defRPr>
             </a:pPr>
             <a:r>
-              <a:t>08 / INTERPRETATION</a:t>
+              <a:t>06 / RESULTS</a:t>
             </a:r>
           </a:p>
         </p:txBody>
@@ -10776,7 +11946,7 @@
               </a:defRPr>
             </a:pPr>
             <a:r>
-              <a:t>결과 해석</a:t>
+              <a:t>성능 비교 결과</a:t>
             </a:r>
           </a:p>
         </p:txBody>
@@ -10828,16 +11998,538 @@
       </p:sp>
       <p:sp>
         <p:nvSpPr>
-          <p:cNvPr id="5" name="Rounded Rectangle 4"/>
+          <p:cNvPr id="5" name="Rectangle 4"/>
           <p:cNvSpPr/>
           <p:nvPr/>
         </p:nvSpPr>
         <p:spPr>
           <a:xfrm>
-            <a:off x="777240" y="1554480"/>
-            <a:ext cx="5166360" cy="4114800"/>
-          </a:xfrm>
-          <a:prstGeom prst="roundRect">
+            <a:off x="777240" y="1645920"/>
+            <a:ext cx="10789920" cy="502920"/>
+          </a:xfrm>
+          <a:prstGeom prst="rect">
+            <a:avLst/>
+          </a:prstGeom>
+          <a:solidFill>
+            <a:srgbClr val="205B89"/>
+          </a:solidFill>
+          <a:ln>
+            <a:solidFill>
+              <a:srgbClr val="205B89"/>
+            </a:solidFill>
+          </a:ln>
+        </p:spPr>
+        <p:style>
+          <a:lnRef idx="1">
+            <a:schemeClr val="accent1"/>
+          </a:lnRef>
+          <a:fillRef idx="3">
+            <a:schemeClr val="accent1"/>
+          </a:fillRef>
+          <a:effectRef idx="2">
+            <a:schemeClr val="accent1"/>
+          </a:effectRef>
+          <a:fontRef idx="minor">
+            <a:schemeClr val="lt1"/>
+          </a:fontRef>
+        </p:style>
+        <p:txBody>
+          <a:bodyPr rtlCol="0" anchor="ctr"/>
+          <a:lstStyle/>
+          <a:p>
+            <a:pPr algn="ctr"/>
+          </a:p>
+        </p:txBody>
+      </p:sp>
+      <p:sp>
+        <p:nvSpPr>
+          <p:cNvPr id="6" name="TextBox 5"/>
+          <p:cNvSpPr txBox="1"/>
+          <p:nvPr/>
+        </p:nvSpPr>
+        <p:spPr>
+          <a:xfrm>
+            <a:off x="777240" y="1728216"/>
+            <a:ext cx="1920240" cy="274320"/>
+          </a:xfrm>
+          <a:prstGeom prst="rect">
+            <a:avLst/>
+          </a:prstGeom>
+          <a:noFill/>
+        </p:spPr>
+        <p:txBody>
+          <a:bodyPr wrap="square" lIns="25400" rIns="25400" anchor="ctr">
+            <a:spAutoFit/>
+          </a:bodyPr>
+          <a:lstStyle/>
+          <a:p>
+            <a:pPr algn="ctr">
+              <a:defRPr sz="1000" b="1">
+                <a:solidFill>
+                  <a:srgbClr val="FFFFFF"/>
+                </a:solidFill>
+                <a:latin typeface="Apple SD Gothic Neo"/>
+              </a:defRPr>
+            </a:pPr>
+            <a:r>
+              <a:t>모델</a:t>
+            </a:r>
+          </a:p>
+        </p:txBody>
+      </p:sp>
+      <p:sp>
+        <p:nvSpPr>
+          <p:cNvPr id="7" name="TextBox 6"/>
+          <p:cNvSpPr txBox="1"/>
+          <p:nvPr/>
+        </p:nvSpPr>
+        <p:spPr>
+          <a:xfrm>
+            <a:off x="2697480" y="1728216"/>
+            <a:ext cx="2103120" cy="274320"/>
+          </a:xfrm>
+          <a:prstGeom prst="rect">
+            <a:avLst/>
+          </a:prstGeom>
+          <a:noFill/>
+        </p:spPr>
+        <p:txBody>
+          <a:bodyPr wrap="square" lIns="25400" rIns="25400" anchor="ctr">
+            <a:spAutoFit/>
+          </a:bodyPr>
+          <a:lstStyle/>
+          <a:p>
+            <a:pPr algn="ctr">
+              <a:defRPr sz="1000" b="1">
+                <a:solidFill>
+                  <a:srgbClr val="FFFFFF"/>
+                </a:solidFill>
+                <a:latin typeface="Apple SD Gothic Neo"/>
+              </a:defRPr>
+            </a:pPr>
+            <a:r>
+              <a:t>MAE</a:t>
+            </a:r>
+          </a:p>
+        </p:txBody>
+      </p:sp>
+      <p:sp>
+        <p:nvSpPr>
+          <p:cNvPr id="8" name="TextBox 7"/>
+          <p:cNvSpPr txBox="1"/>
+          <p:nvPr/>
+        </p:nvSpPr>
+        <p:spPr>
+          <a:xfrm>
+            <a:off x="4800600" y="1728216"/>
+            <a:ext cx="2103120" cy="274320"/>
+          </a:xfrm>
+          <a:prstGeom prst="rect">
+            <a:avLst/>
+          </a:prstGeom>
+          <a:noFill/>
+        </p:spPr>
+        <p:txBody>
+          <a:bodyPr wrap="square" lIns="25400" rIns="25400" anchor="ctr">
+            <a:spAutoFit/>
+          </a:bodyPr>
+          <a:lstStyle/>
+          <a:p>
+            <a:pPr algn="ctr">
+              <a:defRPr sz="1000" b="1">
+                <a:solidFill>
+                  <a:srgbClr val="FFFFFF"/>
+                </a:solidFill>
+                <a:latin typeface="Apple SD Gothic Neo"/>
+              </a:defRPr>
+            </a:pPr>
+            <a:r>
+              <a:t>RMSE</a:t>
+            </a:r>
+          </a:p>
+        </p:txBody>
+      </p:sp>
+      <p:sp>
+        <p:nvSpPr>
+          <p:cNvPr id="9" name="TextBox 8"/>
+          <p:cNvSpPr txBox="1"/>
+          <p:nvPr/>
+        </p:nvSpPr>
+        <p:spPr>
+          <a:xfrm>
+            <a:off x="6903719" y="1728216"/>
+            <a:ext cx="1645920" cy="274320"/>
+          </a:xfrm>
+          <a:prstGeom prst="rect">
+            <a:avLst/>
+          </a:prstGeom>
+          <a:noFill/>
+        </p:spPr>
+        <p:txBody>
+          <a:bodyPr wrap="square" lIns="25400" rIns="25400" anchor="ctr">
+            <a:spAutoFit/>
+          </a:bodyPr>
+          <a:lstStyle/>
+          <a:p>
+            <a:pPr algn="ctr">
+              <a:defRPr sz="1000" b="1">
+                <a:solidFill>
+                  <a:srgbClr val="FFFFFF"/>
+                </a:solidFill>
+                <a:latin typeface="Apple SD Gothic Neo"/>
+              </a:defRPr>
+            </a:pPr>
+            <a:r>
+              <a:t>MAPE</a:t>
+            </a:r>
+          </a:p>
+        </p:txBody>
+      </p:sp>
+      <p:sp>
+        <p:nvSpPr>
+          <p:cNvPr id="10" name="TextBox 9"/>
+          <p:cNvSpPr txBox="1"/>
+          <p:nvPr/>
+        </p:nvSpPr>
+        <p:spPr>
+          <a:xfrm>
+            <a:off x="8549640" y="1728216"/>
+            <a:ext cx="2743200" cy="274320"/>
+          </a:xfrm>
+          <a:prstGeom prst="rect">
+            <a:avLst/>
+          </a:prstGeom>
+          <a:noFill/>
+        </p:spPr>
+        <p:txBody>
+          <a:bodyPr wrap="square" lIns="25400" rIns="25400" anchor="ctr">
+            <a:spAutoFit/>
+          </a:bodyPr>
+          <a:lstStyle/>
+          <a:p>
+            <a:pPr algn="ctr">
+              <a:defRPr sz="1000" b="1">
+                <a:solidFill>
+                  <a:srgbClr val="FFFFFF"/>
+                </a:solidFill>
+                <a:latin typeface="Apple SD Gothic Neo"/>
+              </a:defRPr>
+            </a:pPr>
+            <a:r>
+              <a:t>표준편차 비율</a:t>
+            </a:r>
+          </a:p>
+        </p:txBody>
+      </p:sp>
+      <p:sp>
+        <p:nvSpPr>
+          <p:cNvPr id="11" name="TextBox 10"/>
+          <p:cNvSpPr txBox="1"/>
+          <p:nvPr/>
+        </p:nvSpPr>
+        <p:spPr>
+          <a:xfrm>
+            <a:off x="11292840" y="1728216"/>
+            <a:ext cx="2468880" cy="274320"/>
+          </a:xfrm>
+          <a:prstGeom prst="rect">
+            <a:avLst/>
+          </a:prstGeom>
+          <a:noFill/>
+        </p:spPr>
+        <p:txBody>
+          <a:bodyPr wrap="square" lIns="25400" rIns="25400" anchor="ctr">
+            <a:spAutoFit/>
+          </a:bodyPr>
+          <a:lstStyle/>
+          <a:p>
+            <a:pPr algn="ctr">
+              <a:defRPr sz="1000" b="1">
+                <a:solidFill>
+                  <a:srgbClr val="FFFFFF"/>
+                </a:solidFill>
+                <a:latin typeface="Apple SD Gothic Neo"/>
+              </a:defRPr>
+            </a:pPr>
+            <a:r>
+              <a:t>95% 포함률</a:t>
+            </a:r>
+          </a:p>
+        </p:txBody>
+      </p:sp>
+      <p:sp>
+        <p:nvSpPr>
+          <p:cNvPr id="12" name="Rectangle 11"/>
+          <p:cNvSpPr/>
+          <p:nvPr/>
+        </p:nvSpPr>
+        <p:spPr>
+          <a:xfrm>
+            <a:off x="777240" y="2148840"/>
+            <a:ext cx="10789920" cy="502920"/>
+          </a:xfrm>
+          <a:prstGeom prst="rect">
+            <a:avLst/>
+          </a:prstGeom>
+          <a:solidFill>
+            <a:srgbClr val="EFF5F8"/>
+          </a:solidFill>
+          <a:ln>
+            <a:solidFill>
+              <a:srgbClr val="EFF5F8"/>
+            </a:solidFill>
+          </a:ln>
+        </p:spPr>
+        <p:style>
+          <a:lnRef idx="1">
+            <a:schemeClr val="accent1"/>
+          </a:lnRef>
+          <a:fillRef idx="3">
+            <a:schemeClr val="accent1"/>
+          </a:fillRef>
+          <a:effectRef idx="2">
+            <a:schemeClr val="accent1"/>
+          </a:effectRef>
+          <a:fontRef idx="minor">
+            <a:schemeClr val="lt1"/>
+          </a:fontRef>
+        </p:style>
+        <p:txBody>
+          <a:bodyPr rtlCol="0" anchor="ctr"/>
+          <a:lstStyle/>
+          <a:p>
+            <a:pPr algn="ctr"/>
+          </a:p>
+        </p:txBody>
+      </p:sp>
+      <p:sp>
+        <p:nvSpPr>
+          <p:cNvPr id="13" name="TextBox 12"/>
+          <p:cNvSpPr txBox="1"/>
+          <p:nvPr/>
+        </p:nvSpPr>
+        <p:spPr>
+          <a:xfrm>
+            <a:off x="777240" y="2231136"/>
+            <a:ext cx="1920240" cy="274320"/>
+          </a:xfrm>
+          <a:prstGeom prst="rect">
+            <a:avLst/>
+          </a:prstGeom>
+          <a:noFill/>
+        </p:spPr>
+        <p:txBody>
+          <a:bodyPr wrap="square" lIns="25400" rIns="25400" anchor="ctr">
+            <a:spAutoFit/>
+          </a:bodyPr>
+          <a:lstStyle/>
+          <a:p>
+            <a:pPr algn="r">
+              <a:defRPr sz="1000" b="1">
+                <a:solidFill>
+                  <a:srgbClr val="1F2B35"/>
+                </a:solidFill>
+                <a:latin typeface="Apple SD Gothic Neo"/>
+              </a:defRPr>
+            </a:pPr>
+            <a:r>
+              <a:t>ARIMA</a:t>
+            </a:r>
+          </a:p>
+        </p:txBody>
+      </p:sp>
+      <p:sp>
+        <p:nvSpPr>
+          <p:cNvPr id="14" name="TextBox 13"/>
+          <p:cNvSpPr txBox="1"/>
+          <p:nvPr/>
+        </p:nvSpPr>
+        <p:spPr>
+          <a:xfrm>
+            <a:off x="2697480" y="2231136"/>
+            <a:ext cx="2103120" cy="274320"/>
+          </a:xfrm>
+          <a:prstGeom prst="rect">
+            <a:avLst/>
+          </a:prstGeom>
+          <a:noFill/>
+        </p:spPr>
+        <p:txBody>
+          <a:bodyPr wrap="square" lIns="25400" rIns="25400" anchor="ctr">
+            <a:spAutoFit/>
+          </a:bodyPr>
+          <a:lstStyle/>
+          <a:p>
+            <a:pPr algn="r">
+              <a:defRPr sz="1000" b="0">
+                <a:solidFill>
+                  <a:srgbClr val="1F2B35"/>
+                </a:solidFill>
+                <a:latin typeface="Apple SD Gothic Neo"/>
+              </a:defRPr>
+            </a:pPr>
+            <a:r>
+              <a:t>646.5</a:t>
+            </a:r>
+          </a:p>
+        </p:txBody>
+      </p:sp>
+      <p:sp>
+        <p:nvSpPr>
+          <p:cNvPr id="15" name="TextBox 14"/>
+          <p:cNvSpPr txBox="1"/>
+          <p:nvPr/>
+        </p:nvSpPr>
+        <p:spPr>
+          <a:xfrm>
+            <a:off x="4800600" y="2231136"/>
+            <a:ext cx="2103120" cy="274320"/>
+          </a:xfrm>
+          <a:prstGeom prst="rect">
+            <a:avLst/>
+          </a:prstGeom>
+          <a:noFill/>
+        </p:spPr>
+        <p:txBody>
+          <a:bodyPr wrap="square" lIns="25400" rIns="25400" anchor="ctr">
+            <a:spAutoFit/>
+          </a:bodyPr>
+          <a:lstStyle/>
+          <a:p>
+            <a:pPr algn="r">
+              <a:defRPr sz="1000" b="0">
+                <a:solidFill>
+                  <a:srgbClr val="1F2B35"/>
+                </a:solidFill>
+                <a:latin typeface="Apple SD Gothic Neo"/>
+              </a:defRPr>
+            </a:pPr>
+            <a:r>
+              <a:t>904.8</a:t>
+            </a:r>
+          </a:p>
+        </p:txBody>
+      </p:sp>
+      <p:sp>
+        <p:nvSpPr>
+          <p:cNvPr id="16" name="TextBox 15"/>
+          <p:cNvSpPr txBox="1"/>
+          <p:nvPr/>
+        </p:nvSpPr>
+        <p:spPr>
+          <a:xfrm>
+            <a:off x="6903719" y="2231136"/>
+            <a:ext cx="1645920" cy="274320"/>
+          </a:xfrm>
+          <a:prstGeom prst="rect">
+            <a:avLst/>
+          </a:prstGeom>
+          <a:noFill/>
+        </p:spPr>
+        <p:txBody>
+          <a:bodyPr wrap="square" lIns="25400" rIns="25400" anchor="ctr">
+            <a:spAutoFit/>
+          </a:bodyPr>
+          <a:lstStyle/>
+          <a:p>
+            <a:pPr algn="r">
+              <a:defRPr sz="1000" b="0">
+                <a:solidFill>
+                  <a:srgbClr val="1F2B35"/>
+                </a:solidFill>
+                <a:latin typeface="Apple SD Gothic Neo"/>
+              </a:defRPr>
+            </a:pPr>
+            <a:r>
+              <a:t>1.02%</a:t>
+            </a:r>
+          </a:p>
+        </p:txBody>
+      </p:sp>
+      <p:sp>
+        <p:nvSpPr>
+          <p:cNvPr id="17" name="TextBox 16"/>
+          <p:cNvSpPr txBox="1"/>
+          <p:nvPr/>
+        </p:nvSpPr>
+        <p:spPr>
+          <a:xfrm>
+            <a:off x="8549640" y="2231136"/>
+            <a:ext cx="2743200" cy="274320"/>
+          </a:xfrm>
+          <a:prstGeom prst="rect">
+            <a:avLst/>
+          </a:prstGeom>
+          <a:noFill/>
+        </p:spPr>
+        <p:txBody>
+          <a:bodyPr wrap="square" lIns="25400" rIns="25400" anchor="ctr">
+            <a:spAutoFit/>
+          </a:bodyPr>
+          <a:lstStyle/>
+          <a:p>
+            <a:pPr algn="r">
+              <a:defRPr sz="1000" b="0">
+                <a:solidFill>
+                  <a:srgbClr val="1F2B35"/>
+                </a:solidFill>
+                <a:latin typeface="Apple SD Gothic Neo"/>
+              </a:defRPr>
+            </a:pPr>
+            <a:r>
+              <a:t>1.011</a:t>
+            </a:r>
+          </a:p>
+        </p:txBody>
+      </p:sp>
+      <p:sp>
+        <p:nvSpPr>
+          <p:cNvPr id="18" name="TextBox 17"/>
+          <p:cNvSpPr txBox="1"/>
+          <p:nvPr/>
+        </p:nvSpPr>
+        <p:spPr>
+          <a:xfrm>
+            <a:off x="11292840" y="2231136"/>
+            <a:ext cx="2468880" cy="274320"/>
+          </a:xfrm>
+          <a:prstGeom prst="rect">
+            <a:avLst/>
+          </a:prstGeom>
+          <a:noFill/>
+        </p:spPr>
+        <p:txBody>
+          <a:bodyPr wrap="square" lIns="25400" rIns="25400" anchor="ctr">
+            <a:spAutoFit/>
+          </a:bodyPr>
+          <a:lstStyle/>
+          <a:p>
+            <a:pPr algn="r">
+              <a:defRPr sz="1000" b="0">
+                <a:solidFill>
+                  <a:srgbClr val="1F2B35"/>
+                </a:solidFill>
+                <a:latin typeface="Apple SD Gothic Neo"/>
+              </a:defRPr>
+            </a:pPr>
+            <a:r>
+              <a:t>88.51%</a:t>
+            </a:r>
+          </a:p>
+        </p:txBody>
+      </p:sp>
+      <p:sp>
+        <p:nvSpPr>
+          <p:cNvPr id="19" name="Rectangle 18"/>
+          <p:cNvSpPr/>
+          <p:nvPr/>
+        </p:nvSpPr>
+        <p:spPr>
+          <a:xfrm>
+            <a:off x="777240" y="2651760"/>
+            <a:ext cx="10789920" cy="502920"/>
+          </a:xfrm>
+          <a:prstGeom prst="rect">
             <a:avLst/>
           </a:prstGeom>
           <a:solidFill>
@@ -10873,60 +12565,240 @@
       </p:sp>
       <p:sp>
         <p:nvSpPr>
-          <p:cNvPr id="6" name="TextBox 5"/>
-          <p:cNvSpPr txBox="1"/>
-          <p:nvPr/>
-        </p:nvSpPr>
-        <p:spPr>
-          <a:xfrm>
-            <a:off x="1097280" y="1874519"/>
-            <a:ext cx="3931920" cy="320040"/>
-          </a:xfrm>
-          <a:prstGeom prst="rect">
-            <a:avLst/>
-          </a:prstGeom>
-          <a:noFill/>
-        </p:spPr>
-        <p:txBody>
-          <a:bodyPr wrap="square" lIns="25400" rIns="25400" anchor="ctr">
-            <a:spAutoFit/>
-          </a:bodyPr>
-          <a:lstStyle/>
-          <a:p>
-            <a:pPr algn="l">
-              <a:defRPr sz="1700" b="1">
-                <a:solidFill>
-                  <a:srgbClr val="0F1F30"/>
-                </a:solidFill>
-                <a:latin typeface="Apple SD Gothic Neo"/>
-              </a:defRPr>
-            </a:pPr>
-            <a:r>
-              <a:t>이번 실험에서 확인한 것</a:t>
-            </a:r>
-          </a:p>
-        </p:txBody>
-      </p:sp>
-      <p:sp>
-        <p:nvSpPr>
-          <p:cNvPr id="7" name="Rectangle 6"/>
+          <p:cNvPr id="20" name="TextBox 19"/>
+          <p:cNvSpPr txBox="1"/>
+          <p:nvPr/>
+        </p:nvSpPr>
+        <p:spPr>
+          <a:xfrm>
+            <a:off x="777240" y="2734056"/>
+            <a:ext cx="1920240" cy="274320"/>
+          </a:xfrm>
+          <a:prstGeom prst="rect">
+            <a:avLst/>
+          </a:prstGeom>
+          <a:noFill/>
+        </p:spPr>
+        <p:txBody>
+          <a:bodyPr wrap="square" lIns="25400" rIns="25400" anchor="ctr">
+            <a:spAutoFit/>
+          </a:bodyPr>
+          <a:lstStyle/>
+          <a:p>
+            <a:pPr algn="r">
+              <a:defRPr sz="1000" b="1">
+                <a:solidFill>
+                  <a:srgbClr val="1F2B35"/>
+                </a:solidFill>
+                <a:latin typeface="Apple SD Gothic Neo"/>
+              </a:defRPr>
+            </a:pPr>
+            <a:r>
+              <a:t>LSTM</a:t>
+            </a:r>
+          </a:p>
+        </p:txBody>
+      </p:sp>
+      <p:sp>
+        <p:nvSpPr>
+          <p:cNvPr id="21" name="TextBox 20"/>
+          <p:cNvSpPr txBox="1"/>
+          <p:nvPr/>
+        </p:nvSpPr>
+        <p:spPr>
+          <a:xfrm>
+            <a:off x="2697480" y="2734056"/>
+            <a:ext cx="2103120" cy="274320"/>
+          </a:xfrm>
+          <a:prstGeom prst="rect">
+            <a:avLst/>
+          </a:prstGeom>
+          <a:noFill/>
+        </p:spPr>
+        <p:txBody>
+          <a:bodyPr wrap="square" lIns="25400" rIns="25400" anchor="ctr">
+            <a:spAutoFit/>
+          </a:bodyPr>
+          <a:lstStyle/>
+          <a:p>
+            <a:pPr algn="r">
+              <a:defRPr sz="1000" b="0">
+                <a:solidFill>
+                  <a:srgbClr val="1F2B35"/>
+                </a:solidFill>
+                <a:latin typeface="Apple SD Gothic Neo"/>
+              </a:defRPr>
+            </a:pPr>
+            <a:r>
+              <a:t>1,895.5</a:t>
+            </a:r>
+          </a:p>
+        </p:txBody>
+      </p:sp>
+      <p:sp>
+        <p:nvSpPr>
+          <p:cNvPr id="22" name="TextBox 21"/>
+          <p:cNvSpPr txBox="1"/>
+          <p:nvPr/>
+        </p:nvSpPr>
+        <p:spPr>
+          <a:xfrm>
+            <a:off x="4800600" y="2734056"/>
+            <a:ext cx="2103120" cy="274320"/>
+          </a:xfrm>
+          <a:prstGeom prst="rect">
+            <a:avLst/>
+          </a:prstGeom>
+          <a:noFill/>
+        </p:spPr>
+        <p:txBody>
+          <a:bodyPr wrap="square" lIns="25400" rIns="25400" anchor="ctr">
+            <a:spAutoFit/>
+          </a:bodyPr>
+          <a:lstStyle/>
+          <a:p>
+            <a:pPr algn="r">
+              <a:defRPr sz="1000" b="0">
+                <a:solidFill>
+                  <a:srgbClr val="1F2B35"/>
+                </a:solidFill>
+                <a:latin typeface="Apple SD Gothic Neo"/>
+              </a:defRPr>
+            </a:pPr>
+            <a:r>
+              <a:t>2,481.9</a:t>
+            </a:r>
+          </a:p>
+        </p:txBody>
+      </p:sp>
+      <p:sp>
+        <p:nvSpPr>
+          <p:cNvPr id="23" name="TextBox 22"/>
+          <p:cNvSpPr txBox="1"/>
+          <p:nvPr/>
+        </p:nvSpPr>
+        <p:spPr>
+          <a:xfrm>
+            <a:off x="6903719" y="2734056"/>
+            <a:ext cx="1645920" cy="274320"/>
+          </a:xfrm>
+          <a:prstGeom prst="rect">
+            <a:avLst/>
+          </a:prstGeom>
+          <a:noFill/>
+        </p:spPr>
+        <p:txBody>
+          <a:bodyPr wrap="square" lIns="25400" rIns="25400" anchor="ctr">
+            <a:spAutoFit/>
+          </a:bodyPr>
+          <a:lstStyle/>
+          <a:p>
+            <a:pPr algn="r">
+              <a:defRPr sz="1000" b="0">
+                <a:solidFill>
+                  <a:srgbClr val="1F2B35"/>
+                </a:solidFill>
+                <a:latin typeface="Apple SD Gothic Neo"/>
+              </a:defRPr>
+            </a:pPr>
+            <a:r>
+              <a:t>3.05%</a:t>
+            </a:r>
+          </a:p>
+        </p:txBody>
+      </p:sp>
+      <p:sp>
+        <p:nvSpPr>
+          <p:cNvPr id="24" name="TextBox 23"/>
+          <p:cNvSpPr txBox="1"/>
+          <p:nvPr/>
+        </p:nvSpPr>
+        <p:spPr>
+          <a:xfrm>
+            <a:off x="8549640" y="2734056"/>
+            <a:ext cx="2743200" cy="274320"/>
+          </a:xfrm>
+          <a:prstGeom prst="rect">
+            <a:avLst/>
+          </a:prstGeom>
+          <a:noFill/>
+        </p:spPr>
+        <p:txBody>
+          <a:bodyPr wrap="square" lIns="25400" rIns="25400" anchor="ctr">
+            <a:spAutoFit/>
+          </a:bodyPr>
+          <a:lstStyle/>
+          <a:p>
+            <a:pPr algn="r">
+              <a:defRPr sz="1000" b="0">
+                <a:solidFill>
+                  <a:srgbClr val="1F2B35"/>
+                </a:solidFill>
+                <a:latin typeface="Apple SD Gothic Neo"/>
+              </a:defRPr>
+            </a:pPr>
+            <a:r>
+              <a:t>0.919</a:t>
+            </a:r>
+          </a:p>
+        </p:txBody>
+      </p:sp>
+      <p:sp>
+        <p:nvSpPr>
+          <p:cNvPr id="25" name="TextBox 24"/>
+          <p:cNvSpPr txBox="1"/>
+          <p:nvPr/>
+        </p:nvSpPr>
+        <p:spPr>
+          <a:xfrm>
+            <a:off x="11292840" y="2734056"/>
+            <a:ext cx="2468880" cy="274320"/>
+          </a:xfrm>
+          <a:prstGeom prst="rect">
+            <a:avLst/>
+          </a:prstGeom>
+          <a:noFill/>
+        </p:spPr>
+        <p:txBody>
+          <a:bodyPr wrap="square" lIns="25400" rIns="25400" anchor="ctr">
+            <a:spAutoFit/>
+          </a:bodyPr>
+          <a:lstStyle/>
+          <a:p>
+            <a:pPr algn="r">
+              <a:defRPr sz="1000" b="0">
+                <a:solidFill>
+                  <a:srgbClr val="1F2B35"/>
+                </a:solidFill>
+                <a:latin typeface="Apple SD Gothic Neo"/>
+              </a:defRPr>
+            </a:pPr>
+            <a:r>
+              <a:t>92.69%</a:t>
+            </a:r>
+          </a:p>
+        </p:txBody>
+      </p:sp>
+      <p:sp>
+        <p:nvSpPr>
+          <p:cNvPr id="26" name="Rectangle 25"/>
           <p:cNvSpPr/>
           <p:nvPr/>
         </p:nvSpPr>
         <p:spPr>
           <a:xfrm>
-            <a:off x="1097280" y="2633472"/>
-            <a:ext cx="82296" cy="82296"/>
+            <a:off x="777240" y="3154680"/>
+            <a:ext cx="10789920" cy="502920"/>
           </a:xfrm>
           <a:prstGeom prst="rect">
             <a:avLst/>
           </a:prstGeom>
           <a:solidFill>
-            <a:srgbClr val="43BECA"/>
+            <a:srgbClr val="EFF5F8"/>
           </a:solidFill>
           <a:ln>
             <a:solidFill>
-              <a:srgbClr val="43BECA"/>
+              <a:srgbClr val="EFF5F8"/>
             </a:solidFill>
           </a:ln>
         </p:spPr>
@@ -10954,14 +12826,230 @@
       </p:sp>
       <p:sp>
         <p:nvSpPr>
-          <p:cNvPr id="8" name="TextBox 7"/>
-          <p:cNvSpPr txBox="1"/>
-          <p:nvPr/>
-        </p:nvSpPr>
-        <p:spPr>
-          <a:xfrm>
-            <a:off x="1298448" y="2514600"/>
-            <a:ext cx="4142232" cy="329184"/>
+          <p:cNvPr id="27" name="TextBox 26"/>
+          <p:cNvSpPr txBox="1"/>
+          <p:nvPr/>
+        </p:nvSpPr>
+        <p:spPr>
+          <a:xfrm>
+            <a:off x="777240" y="3236976"/>
+            <a:ext cx="1920240" cy="274320"/>
+          </a:xfrm>
+          <a:prstGeom prst="rect">
+            <a:avLst/>
+          </a:prstGeom>
+          <a:noFill/>
+        </p:spPr>
+        <p:txBody>
+          <a:bodyPr wrap="square" lIns="25400" rIns="25400" anchor="ctr">
+            <a:spAutoFit/>
+          </a:bodyPr>
+          <a:lstStyle/>
+          <a:p>
+            <a:pPr algn="r">
+              <a:defRPr sz="1000" b="1">
+                <a:solidFill>
+                  <a:srgbClr val="1F2B35"/>
+                </a:solidFill>
+                <a:latin typeface="Apple SD Gothic Neo"/>
+              </a:defRPr>
+            </a:pPr>
+            <a:r>
+              <a:t>Transformer</a:t>
+            </a:r>
+          </a:p>
+        </p:txBody>
+      </p:sp>
+      <p:sp>
+        <p:nvSpPr>
+          <p:cNvPr id="28" name="TextBox 27"/>
+          <p:cNvSpPr txBox="1"/>
+          <p:nvPr/>
+        </p:nvSpPr>
+        <p:spPr>
+          <a:xfrm>
+            <a:off x="2697480" y="3236976"/>
+            <a:ext cx="2103120" cy="274320"/>
+          </a:xfrm>
+          <a:prstGeom prst="rect">
+            <a:avLst/>
+          </a:prstGeom>
+          <a:noFill/>
+        </p:spPr>
+        <p:txBody>
+          <a:bodyPr wrap="square" lIns="25400" rIns="25400" anchor="ctr">
+            <a:spAutoFit/>
+          </a:bodyPr>
+          <a:lstStyle/>
+          <a:p>
+            <a:pPr algn="r">
+              <a:defRPr sz="1000" b="0">
+                <a:solidFill>
+                  <a:srgbClr val="1F2B35"/>
+                </a:solidFill>
+                <a:latin typeface="Apple SD Gothic Neo"/>
+              </a:defRPr>
+            </a:pPr>
+            <a:r>
+              <a:t>1,883.8</a:t>
+            </a:r>
+          </a:p>
+        </p:txBody>
+      </p:sp>
+      <p:sp>
+        <p:nvSpPr>
+          <p:cNvPr id="29" name="TextBox 28"/>
+          <p:cNvSpPr txBox="1"/>
+          <p:nvPr/>
+        </p:nvSpPr>
+        <p:spPr>
+          <a:xfrm>
+            <a:off x="4800600" y="3236976"/>
+            <a:ext cx="2103120" cy="274320"/>
+          </a:xfrm>
+          <a:prstGeom prst="rect">
+            <a:avLst/>
+          </a:prstGeom>
+          <a:noFill/>
+        </p:spPr>
+        <p:txBody>
+          <a:bodyPr wrap="square" lIns="25400" rIns="25400" anchor="ctr">
+            <a:spAutoFit/>
+          </a:bodyPr>
+          <a:lstStyle/>
+          <a:p>
+            <a:pPr algn="r">
+              <a:defRPr sz="1000" b="0">
+                <a:solidFill>
+                  <a:srgbClr val="1F2B35"/>
+                </a:solidFill>
+                <a:latin typeface="Apple SD Gothic Neo"/>
+              </a:defRPr>
+            </a:pPr>
+            <a:r>
+              <a:t>2,502.1</a:t>
+            </a:r>
+          </a:p>
+        </p:txBody>
+      </p:sp>
+      <p:sp>
+        <p:nvSpPr>
+          <p:cNvPr id="30" name="TextBox 29"/>
+          <p:cNvSpPr txBox="1"/>
+          <p:nvPr/>
+        </p:nvSpPr>
+        <p:spPr>
+          <a:xfrm>
+            <a:off x="6903719" y="3236976"/>
+            <a:ext cx="1645920" cy="274320"/>
+          </a:xfrm>
+          <a:prstGeom prst="rect">
+            <a:avLst/>
+          </a:prstGeom>
+          <a:noFill/>
+        </p:spPr>
+        <p:txBody>
+          <a:bodyPr wrap="square" lIns="25400" rIns="25400" anchor="ctr">
+            <a:spAutoFit/>
+          </a:bodyPr>
+          <a:lstStyle/>
+          <a:p>
+            <a:pPr algn="r">
+              <a:defRPr sz="1000" b="0">
+                <a:solidFill>
+                  <a:srgbClr val="1F2B35"/>
+                </a:solidFill>
+                <a:latin typeface="Apple SD Gothic Neo"/>
+              </a:defRPr>
+            </a:pPr>
+            <a:r>
+              <a:t>2.96%</a:t>
+            </a:r>
+          </a:p>
+        </p:txBody>
+      </p:sp>
+      <p:sp>
+        <p:nvSpPr>
+          <p:cNvPr id="31" name="TextBox 30"/>
+          <p:cNvSpPr txBox="1"/>
+          <p:nvPr/>
+        </p:nvSpPr>
+        <p:spPr>
+          <a:xfrm>
+            <a:off x="8549640" y="3236976"/>
+            <a:ext cx="2743200" cy="274320"/>
+          </a:xfrm>
+          <a:prstGeom prst="rect">
+            <a:avLst/>
+          </a:prstGeom>
+          <a:noFill/>
+        </p:spPr>
+        <p:txBody>
+          <a:bodyPr wrap="square" lIns="25400" rIns="25400" anchor="ctr">
+            <a:spAutoFit/>
+          </a:bodyPr>
+          <a:lstStyle/>
+          <a:p>
+            <a:pPr algn="r">
+              <a:defRPr sz="1000" b="0">
+                <a:solidFill>
+                  <a:srgbClr val="1F2B35"/>
+                </a:solidFill>
+                <a:latin typeface="Apple SD Gothic Neo"/>
+              </a:defRPr>
+            </a:pPr>
+            <a:r>
+              <a:t>1.029</a:t>
+            </a:r>
+          </a:p>
+        </p:txBody>
+      </p:sp>
+      <p:sp>
+        <p:nvSpPr>
+          <p:cNvPr id="32" name="TextBox 31"/>
+          <p:cNvSpPr txBox="1"/>
+          <p:nvPr/>
+        </p:nvSpPr>
+        <p:spPr>
+          <a:xfrm>
+            <a:off x="11292840" y="3236976"/>
+            <a:ext cx="2468880" cy="274320"/>
+          </a:xfrm>
+          <a:prstGeom prst="rect">
+            <a:avLst/>
+          </a:prstGeom>
+          <a:noFill/>
+        </p:spPr>
+        <p:txBody>
+          <a:bodyPr wrap="square" lIns="25400" rIns="25400" anchor="ctr">
+            <a:spAutoFit/>
+          </a:bodyPr>
+          <a:lstStyle/>
+          <a:p>
+            <a:pPr algn="r">
+              <a:defRPr sz="1000" b="0">
+                <a:solidFill>
+                  <a:srgbClr val="1F2B35"/>
+                </a:solidFill>
+                <a:latin typeface="Apple SD Gothic Neo"/>
+              </a:defRPr>
+            </a:pPr>
+            <a:r>
+              <a:t>88.43%</a:t>
+            </a:r>
+          </a:p>
+        </p:txBody>
+      </p:sp>
+      <p:sp>
+        <p:nvSpPr>
+          <p:cNvPr id="33" name="TextBox 32"/>
+          <p:cNvSpPr txBox="1"/>
+          <p:nvPr/>
+        </p:nvSpPr>
+        <p:spPr>
+          <a:xfrm>
+            <a:off x="868680" y="4160520"/>
+            <a:ext cx="10241280" cy="457200"/>
           </a:xfrm>
           <a:prstGeom prst="rect">
             <a:avLst/>
@@ -10975,7 +13063,67 @@
           <a:lstStyle/>
           <a:p>
             <a:pPr algn="l">
-              <a:defRPr sz="1400" b="0">
+              <a:defRPr sz="1600" b="1">
+                <a:solidFill>
+                  <a:srgbClr val="0F1F30"/>
+                </a:solidFill>
+                <a:latin typeface="Apple SD Gothic Neo"/>
+              </a:defRPr>
+            </a:pPr>
+            <a:r>
+              <a:t>표준편차 비율이 0에 가깝지 않아 LSTM·Transformer의 상수 예측 붕괴는 관찰되지 않았습니다.</a:t>
+            </a:r>
+          </a:p>
+        </p:txBody>
+      </p:sp>
+      <p:pic>
+        <p:nvPicPr>
+          <p:cNvPr id="34" name="Picture 33" descr="forecast_comparison.png"/>
+          <p:cNvPicPr>
+            <a:picLocks noChangeAspect="1"/>
+          </p:cNvPicPr>
+          <p:nvPr/>
+        </p:nvPicPr>
+        <p:blipFill>
+          <a:blip r:embed="rId2"/>
+          <a:stretch>
+            <a:fillRect/>
+          </a:stretch>
+        </p:blipFill>
+        <p:spPr>
+          <a:xfrm>
+            <a:off x="868680" y="4663440"/>
+            <a:ext cx="5257800" cy="1691640"/>
+          </a:xfrm>
+          <a:prstGeom prst="rect">
+            <a:avLst/>
+          </a:prstGeom>
+        </p:spPr>
+      </p:pic>
+      <p:sp>
+        <p:nvSpPr>
+          <p:cNvPr id="35" name="TextBox 34"/>
+          <p:cNvSpPr txBox="1"/>
+          <p:nvPr/>
+        </p:nvSpPr>
+        <p:spPr>
+          <a:xfrm>
+            <a:off x="6492240" y="4983480"/>
+            <a:ext cx="4206240" cy="685800"/>
+          </a:xfrm>
+          <a:prstGeom prst="rect">
+            <a:avLst/>
+          </a:prstGeom>
+          <a:noFill/>
+        </p:spPr>
+        <p:txBody>
+          <a:bodyPr wrap="square" lIns="25400" rIns="25400" anchor="ctr">
+            <a:spAutoFit/>
+          </a:bodyPr>
+          <a:lstStyle/>
+          <a:p>
+            <a:pPr algn="l">
+              <a:defRPr sz="1600" b="1">
                 <a:solidFill>
                   <a:srgbClr val="1F2B35"/>
                 </a:solidFill>
@@ -10983,662 +13131,14 @@
               </a:defRPr>
             </a:pPr>
             <a:r>
-              <a:t>7개 지역 날씨를 전국 수요 예측에 함께 사용</a:t>
-            </a:r>
-          </a:p>
-        </p:txBody>
-      </p:sp>
-      <p:sp>
-        <p:nvSpPr>
-          <p:cNvPr id="9" name="Rectangle 8"/>
-          <p:cNvSpPr/>
-          <p:nvPr/>
-        </p:nvSpPr>
-        <p:spPr>
-          <a:xfrm>
-            <a:off x="1097280" y="3209544"/>
-            <a:ext cx="82296" cy="82296"/>
-          </a:xfrm>
-          <a:prstGeom prst="rect">
-            <a:avLst/>
-          </a:prstGeom>
-          <a:solidFill>
-            <a:srgbClr val="43BECA"/>
-          </a:solidFill>
-          <a:ln>
-            <a:solidFill>
-              <a:srgbClr val="43BECA"/>
-            </a:solidFill>
-          </a:ln>
-        </p:spPr>
-        <p:style>
-          <a:lnRef idx="1">
-            <a:schemeClr val="accent1"/>
-          </a:lnRef>
-          <a:fillRef idx="3">
-            <a:schemeClr val="accent1"/>
-          </a:fillRef>
-          <a:effectRef idx="2">
-            <a:schemeClr val="accent1"/>
-          </a:effectRef>
-          <a:fontRef idx="minor">
-            <a:schemeClr val="lt1"/>
-          </a:fontRef>
-        </p:style>
-        <p:txBody>
-          <a:bodyPr rtlCol="0" anchor="ctr"/>
-          <a:lstStyle/>
-          <a:p>
-            <a:pPr algn="ctr"/>
-          </a:p>
-        </p:txBody>
-      </p:sp>
-      <p:sp>
-        <p:nvSpPr>
-          <p:cNvPr id="10" name="TextBox 9"/>
-          <p:cNvSpPr txBox="1"/>
-          <p:nvPr/>
-        </p:nvSpPr>
-        <p:spPr>
-          <a:xfrm>
-            <a:off x="1298448" y="3090672"/>
-            <a:ext cx="4142232" cy="329184"/>
-          </a:xfrm>
-          <a:prstGeom prst="rect">
-            <a:avLst/>
-          </a:prstGeom>
-          <a:noFill/>
-        </p:spPr>
-        <p:txBody>
-          <a:bodyPr wrap="square" lIns="25400" rIns="25400" anchor="ctr">
-            <a:spAutoFit/>
-          </a:bodyPr>
-          <a:lstStyle/>
-          <a:p>
-            <a:pPr algn="l">
-              <a:defRPr sz="1400" b="0">
-                <a:solidFill>
-                  <a:srgbClr val="1F2B35"/>
-                </a:solidFill>
-                <a:latin typeface="Apple SD Gothic Neo"/>
-              </a:defRPr>
-            </a:pPr>
-            <a:r>
-              <a:t>세 모델의 시험 조건을 one-step 방식으로 통일</a:t>
-            </a:r>
-          </a:p>
-        </p:txBody>
-      </p:sp>
-      <p:sp>
-        <p:nvSpPr>
-          <p:cNvPr id="11" name="Rectangle 10"/>
-          <p:cNvSpPr/>
-          <p:nvPr/>
-        </p:nvSpPr>
-        <p:spPr>
-          <a:xfrm>
-            <a:off x="1097280" y="3785615"/>
-            <a:ext cx="82296" cy="82296"/>
-          </a:xfrm>
-          <a:prstGeom prst="rect">
-            <a:avLst/>
-          </a:prstGeom>
-          <a:solidFill>
-            <a:srgbClr val="43BECA"/>
-          </a:solidFill>
-          <a:ln>
-            <a:solidFill>
-              <a:srgbClr val="43BECA"/>
-            </a:solidFill>
-          </a:ln>
-        </p:spPr>
-        <p:style>
-          <a:lnRef idx="1">
-            <a:schemeClr val="accent1"/>
-          </a:lnRef>
-          <a:fillRef idx="3">
-            <a:schemeClr val="accent1"/>
-          </a:fillRef>
-          <a:effectRef idx="2">
-            <a:schemeClr val="accent1"/>
-          </a:effectRef>
-          <a:fontRef idx="minor">
-            <a:schemeClr val="lt1"/>
-          </a:fontRef>
-        </p:style>
-        <p:txBody>
-          <a:bodyPr rtlCol="0" anchor="ctr"/>
-          <a:lstStyle/>
-          <a:p>
-            <a:pPr algn="ctr"/>
-          </a:p>
-        </p:txBody>
-      </p:sp>
-      <p:sp>
-        <p:nvSpPr>
-          <p:cNvPr id="12" name="TextBox 11"/>
-          <p:cNvSpPr txBox="1"/>
-          <p:nvPr/>
-        </p:nvSpPr>
-        <p:spPr>
-          <a:xfrm>
-            <a:off x="1298448" y="3666744"/>
-            <a:ext cx="4142232" cy="329184"/>
-          </a:xfrm>
-          <a:prstGeom prst="rect">
-            <a:avLst/>
-          </a:prstGeom>
-          <a:noFill/>
-        </p:spPr>
-        <p:txBody>
-          <a:bodyPr wrap="square" lIns="25400" rIns="25400" anchor="ctr">
-            <a:spAutoFit/>
-          </a:bodyPr>
-          <a:lstStyle/>
-          <a:p>
-            <a:pPr algn="l">
-              <a:defRPr sz="1400" b="0">
-                <a:solidFill>
-                  <a:srgbClr val="1F2B35"/>
-                </a:solidFill>
-                <a:latin typeface="Apple SD Gothic Neo"/>
-              </a:defRPr>
-            </a:pPr>
-            <a:r>
-              <a:t>입력 스케일러는 학습 데이터에만 적합</a:t>
-            </a:r>
-          </a:p>
-        </p:txBody>
-      </p:sp>
-      <p:sp>
-        <p:nvSpPr>
-          <p:cNvPr id="13" name="Rectangle 12"/>
-          <p:cNvSpPr/>
-          <p:nvPr/>
-        </p:nvSpPr>
-        <p:spPr>
-          <a:xfrm>
-            <a:off x="1097280" y="4361688"/>
-            <a:ext cx="82296" cy="82296"/>
-          </a:xfrm>
-          <a:prstGeom prst="rect">
-            <a:avLst/>
-          </a:prstGeom>
-          <a:solidFill>
-            <a:srgbClr val="43BECA"/>
-          </a:solidFill>
-          <a:ln>
-            <a:solidFill>
-              <a:srgbClr val="43BECA"/>
-            </a:solidFill>
-          </a:ln>
-        </p:spPr>
-        <p:style>
-          <a:lnRef idx="1">
-            <a:schemeClr val="accent1"/>
-          </a:lnRef>
-          <a:fillRef idx="3">
-            <a:schemeClr val="accent1"/>
-          </a:fillRef>
-          <a:effectRef idx="2">
-            <a:schemeClr val="accent1"/>
-          </a:effectRef>
-          <a:fontRef idx="minor">
-            <a:schemeClr val="lt1"/>
-          </a:fontRef>
-        </p:style>
-        <p:txBody>
-          <a:bodyPr rtlCol="0" anchor="ctr"/>
-          <a:lstStyle/>
-          <a:p>
-            <a:pPr algn="ctr"/>
-          </a:p>
-        </p:txBody>
-      </p:sp>
-      <p:sp>
-        <p:nvSpPr>
-          <p:cNvPr id="14" name="TextBox 13"/>
-          <p:cNvSpPr txBox="1"/>
-          <p:nvPr/>
-        </p:nvSpPr>
-        <p:spPr>
-          <a:xfrm>
-            <a:off x="1298448" y="4242816"/>
-            <a:ext cx="4142232" cy="329184"/>
-          </a:xfrm>
-          <a:prstGeom prst="rect">
-            <a:avLst/>
-          </a:prstGeom>
-          <a:noFill/>
-        </p:spPr>
-        <p:txBody>
-          <a:bodyPr wrap="square" lIns="25400" rIns="25400" anchor="ctr">
-            <a:spAutoFit/>
-          </a:bodyPr>
-          <a:lstStyle/>
-          <a:p>
-            <a:pPr algn="l">
-              <a:defRPr sz="1400" b="0">
-                <a:solidFill>
-                  <a:srgbClr val="1F2B35"/>
-                </a:solidFill>
-                <a:latin typeface="Apple SD Gothic Neo"/>
-              </a:defRPr>
-            </a:pPr>
-            <a:r>
-              <a:t>LSTM·Transformer의 예측 변동성은 실제와 유사</a:t>
-            </a:r>
-          </a:p>
-        </p:txBody>
-      </p:sp>
-      <p:sp>
-        <p:nvSpPr>
-          <p:cNvPr id="15" name="Rounded Rectangle 14"/>
-          <p:cNvSpPr/>
-          <p:nvPr/>
-        </p:nvSpPr>
-        <p:spPr>
-          <a:xfrm>
-            <a:off x="6309360" y="1554480"/>
-            <a:ext cx="5074920" cy="4114800"/>
-          </a:xfrm>
-          <a:prstGeom prst="roundRect">
-            <a:avLst/>
-          </a:prstGeom>
-          <a:solidFill>
-            <a:srgbClr val="0F1F30"/>
-          </a:solidFill>
-          <a:ln>
-            <a:solidFill>
-              <a:srgbClr val="0F1F30"/>
-            </a:solidFill>
-          </a:ln>
-        </p:spPr>
-        <p:style>
-          <a:lnRef idx="1">
-            <a:schemeClr val="accent1"/>
-          </a:lnRef>
-          <a:fillRef idx="3">
-            <a:schemeClr val="accent1"/>
-          </a:fillRef>
-          <a:effectRef idx="2">
-            <a:schemeClr val="accent1"/>
-          </a:effectRef>
-          <a:fontRef idx="minor">
-            <a:schemeClr val="lt1"/>
-          </a:fontRef>
-        </p:style>
-        <p:txBody>
-          <a:bodyPr rtlCol="0" anchor="ctr"/>
-          <a:lstStyle/>
-          <a:p>
-            <a:pPr algn="ctr"/>
-          </a:p>
-        </p:txBody>
-      </p:sp>
-      <p:sp>
-        <p:nvSpPr>
-          <p:cNvPr id="16" name="TextBox 15"/>
-          <p:cNvSpPr txBox="1"/>
-          <p:nvPr/>
-        </p:nvSpPr>
-        <p:spPr>
-          <a:xfrm>
-            <a:off x="6675120" y="1874519"/>
-            <a:ext cx="4114800" cy="320040"/>
-          </a:xfrm>
-          <a:prstGeom prst="rect">
-            <a:avLst/>
-          </a:prstGeom>
-          <a:noFill/>
-        </p:spPr>
-        <p:txBody>
-          <a:bodyPr wrap="square" lIns="25400" rIns="25400" anchor="ctr">
-            <a:spAutoFit/>
-          </a:bodyPr>
-          <a:lstStyle/>
-          <a:p>
-            <a:pPr algn="l">
-              <a:defRPr sz="1700" b="1">
-                <a:solidFill>
-                  <a:srgbClr val="FFFFFF"/>
-                </a:solidFill>
-                <a:latin typeface="Apple SD Gothic Neo"/>
-              </a:defRPr>
-            </a:pPr>
-            <a:r>
-              <a:t>남은 한계와 다음 단계</a:t>
-            </a:r>
-          </a:p>
-        </p:txBody>
-      </p:sp>
-      <p:sp>
-        <p:nvSpPr>
-          <p:cNvPr id="17" name="Rectangle 16"/>
-          <p:cNvSpPr/>
-          <p:nvPr/>
-        </p:nvSpPr>
-        <p:spPr>
-          <a:xfrm>
-            <a:off x="6675120" y="2633472"/>
-            <a:ext cx="82296" cy="82296"/>
-          </a:xfrm>
-          <a:prstGeom prst="rect">
-            <a:avLst/>
-          </a:prstGeom>
-          <a:solidFill>
-            <a:srgbClr val="43BECA"/>
-          </a:solidFill>
-          <a:ln>
-            <a:solidFill>
-              <a:srgbClr val="43BECA"/>
-            </a:solidFill>
-          </a:ln>
-        </p:spPr>
-        <p:style>
-          <a:lnRef idx="1">
-            <a:schemeClr val="accent1"/>
-          </a:lnRef>
-          <a:fillRef idx="3">
-            <a:schemeClr val="accent1"/>
-          </a:fillRef>
-          <a:effectRef idx="2">
-            <a:schemeClr val="accent1"/>
-          </a:effectRef>
-          <a:fontRef idx="minor">
-            <a:schemeClr val="lt1"/>
-          </a:fontRef>
-        </p:style>
-        <p:txBody>
-          <a:bodyPr rtlCol="0" anchor="ctr"/>
-          <a:lstStyle/>
-          <a:p>
-            <a:pPr algn="ctr"/>
-          </a:p>
-        </p:txBody>
-      </p:sp>
-      <p:sp>
-        <p:nvSpPr>
-          <p:cNvPr id="18" name="TextBox 17"/>
-          <p:cNvSpPr txBox="1"/>
-          <p:nvPr/>
-        </p:nvSpPr>
-        <p:spPr>
-          <a:xfrm>
-            <a:off x="6876288" y="2514600"/>
-            <a:ext cx="3959352" cy="329184"/>
-          </a:xfrm>
-          <a:prstGeom prst="rect">
-            <a:avLst/>
-          </a:prstGeom>
-          <a:noFill/>
-        </p:spPr>
-        <p:txBody>
-          <a:bodyPr wrap="square" lIns="25400" rIns="25400" anchor="ctr">
-            <a:spAutoFit/>
-          </a:bodyPr>
-          <a:lstStyle/>
-          <a:p>
-            <a:pPr algn="l">
-              <a:defRPr sz="1400" b="0">
-                <a:solidFill>
-                  <a:srgbClr val="DCEBF1"/>
-                </a:solidFill>
-                <a:latin typeface="Apple SD Gothic Neo"/>
-              </a:defRPr>
-            </a:pPr>
-            <a:r>
-              <a:t>ARIMA의 수렴과 차수 최적화</a:t>
-            </a:r>
-          </a:p>
-        </p:txBody>
-      </p:sp>
-      <p:sp>
-        <p:nvSpPr>
-          <p:cNvPr id="19" name="Rectangle 18"/>
-          <p:cNvSpPr/>
-          <p:nvPr/>
-        </p:nvSpPr>
-        <p:spPr>
-          <a:xfrm>
-            <a:off x="6675120" y="3209544"/>
-            <a:ext cx="82296" cy="82296"/>
-          </a:xfrm>
-          <a:prstGeom prst="rect">
-            <a:avLst/>
-          </a:prstGeom>
-          <a:solidFill>
-            <a:srgbClr val="43BECA"/>
-          </a:solidFill>
-          <a:ln>
-            <a:solidFill>
-              <a:srgbClr val="43BECA"/>
-            </a:solidFill>
-          </a:ln>
-        </p:spPr>
-        <p:style>
-          <a:lnRef idx="1">
-            <a:schemeClr val="accent1"/>
-          </a:lnRef>
-          <a:fillRef idx="3">
-            <a:schemeClr val="accent1"/>
-          </a:fillRef>
-          <a:effectRef idx="2">
-            <a:schemeClr val="accent1"/>
-          </a:effectRef>
-          <a:fontRef idx="minor">
-            <a:schemeClr val="lt1"/>
-          </a:fontRef>
-        </p:style>
-        <p:txBody>
-          <a:bodyPr rtlCol="0" anchor="ctr"/>
-          <a:lstStyle/>
-          <a:p>
-            <a:pPr algn="ctr"/>
-          </a:p>
-        </p:txBody>
-      </p:sp>
-      <p:sp>
-        <p:nvSpPr>
-          <p:cNvPr id="20" name="TextBox 19"/>
-          <p:cNvSpPr txBox="1"/>
-          <p:nvPr/>
-        </p:nvSpPr>
-        <p:spPr>
-          <a:xfrm>
-            <a:off x="6876288" y="3090672"/>
-            <a:ext cx="3959352" cy="329184"/>
-          </a:xfrm>
-          <a:prstGeom prst="rect">
-            <a:avLst/>
-          </a:prstGeom>
-          <a:noFill/>
-        </p:spPr>
-        <p:txBody>
-          <a:bodyPr wrap="square" lIns="25400" rIns="25400" anchor="ctr">
-            <a:spAutoFit/>
-          </a:bodyPr>
-          <a:lstStyle/>
-          <a:p>
-            <a:pPr algn="l">
-              <a:defRPr sz="1400" b="0">
-                <a:solidFill>
-                  <a:srgbClr val="DCEBF1"/>
-                </a:solidFill>
-                <a:latin typeface="Apple SD Gothic Neo"/>
-              </a:defRPr>
-            </a:pPr>
-            <a:r>
-              <a:t>quantile loss 기반 예측구간</a:t>
-            </a:r>
-          </a:p>
-        </p:txBody>
-      </p:sp>
-      <p:sp>
-        <p:nvSpPr>
-          <p:cNvPr id="21" name="Rectangle 20"/>
-          <p:cNvSpPr/>
-          <p:nvPr/>
-        </p:nvSpPr>
-        <p:spPr>
-          <a:xfrm>
-            <a:off x="6675120" y="3785615"/>
-            <a:ext cx="82296" cy="82296"/>
-          </a:xfrm>
-          <a:prstGeom prst="rect">
-            <a:avLst/>
-          </a:prstGeom>
-          <a:solidFill>
-            <a:srgbClr val="43BECA"/>
-          </a:solidFill>
-          <a:ln>
-            <a:solidFill>
-              <a:srgbClr val="43BECA"/>
-            </a:solidFill>
-          </a:ln>
-        </p:spPr>
-        <p:style>
-          <a:lnRef idx="1">
-            <a:schemeClr val="accent1"/>
-          </a:lnRef>
-          <a:fillRef idx="3">
-            <a:schemeClr val="accent1"/>
-          </a:fillRef>
-          <a:effectRef idx="2">
-            <a:schemeClr val="accent1"/>
-          </a:effectRef>
-          <a:fontRef idx="minor">
-            <a:schemeClr val="lt1"/>
-          </a:fontRef>
-        </p:style>
-        <p:txBody>
-          <a:bodyPr rtlCol="0" anchor="ctr"/>
-          <a:lstStyle/>
-          <a:p>
-            <a:pPr algn="ctr"/>
-          </a:p>
-        </p:txBody>
-      </p:sp>
-      <p:sp>
-        <p:nvSpPr>
-          <p:cNvPr id="22" name="TextBox 21"/>
-          <p:cNvSpPr txBox="1"/>
-          <p:nvPr/>
-        </p:nvSpPr>
-        <p:spPr>
-          <a:xfrm>
-            <a:off x="6876288" y="3666744"/>
-            <a:ext cx="3959352" cy="329184"/>
-          </a:xfrm>
-          <a:prstGeom prst="rect">
-            <a:avLst/>
-          </a:prstGeom>
-          <a:noFill/>
-        </p:spPr>
-        <p:txBody>
-          <a:bodyPr wrap="square" lIns="25400" rIns="25400" anchor="ctr">
-            <a:spAutoFit/>
-          </a:bodyPr>
-          <a:lstStyle/>
-          <a:p>
-            <a:pPr algn="l">
-              <a:defRPr sz="1400" b="0">
-                <a:solidFill>
-                  <a:srgbClr val="DCEBF1"/>
-                </a:solidFill>
-                <a:latin typeface="Apple SD Gothic Neo"/>
-              </a:defRPr>
-            </a:pPr>
-            <a:r>
-              <a:t>conformal prediction으로 coverage 보정</a:t>
-            </a:r>
-          </a:p>
-        </p:txBody>
-      </p:sp>
-      <p:sp>
-        <p:nvSpPr>
-          <p:cNvPr id="23" name="Rectangle 22"/>
-          <p:cNvSpPr/>
-          <p:nvPr/>
-        </p:nvSpPr>
-        <p:spPr>
-          <a:xfrm>
-            <a:off x="6675120" y="4361688"/>
-            <a:ext cx="82296" cy="82296"/>
-          </a:xfrm>
-          <a:prstGeom prst="rect">
-            <a:avLst/>
-          </a:prstGeom>
-          <a:solidFill>
-            <a:srgbClr val="43BECA"/>
-          </a:solidFill>
-          <a:ln>
-            <a:solidFill>
-              <a:srgbClr val="43BECA"/>
-            </a:solidFill>
-          </a:ln>
-        </p:spPr>
-        <p:style>
-          <a:lnRef idx="1">
-            <a:schemeClr val="accent1"/>
-          </a:lnRef>
-          <a:fillRef idx="3">
-            <a:schemeClr val="accent1"/>
-          </a:fillRef>
-          <a:effectRef idx="2">
-            <a:schemeClr val="accent1"/>
-          </a:effectRef>
-          <a:fontRef idx="minor">
-            <a:schemeClr val="lt1"/>
-          </a:fontRef>
-        </p:style>
-        <p:txBody>
-          <a:bodyPr rtlCol="0" anchor="ctr"/>
-          <a:lstStyle/>
-          <a:p>
-            <a:pPr algn="ctr"/>
-          </a:p>
-        </p:txBody>
-      </p:sp>
-      <p:sp>
-        <p:nvSpPr>
-          <p:cNvPr id="24" name="TextBox 23"/>
-          <p:cNvSpPr txBox="1"/>
-          <p:nvPr/>
-        </p:nvSpPr>
-        <p:spPr>
-          <a:xfrm>
-            <a:off x="6876288" y="4242816"/>
-            <a:ext cx="3959352" cy="329184"/>
-          </a:xfrm>
-          <a:prstGeom prst="rect">
-            <a:avLst/>
-          </a:prstGeom>
-          <a:noFill/>
-        </p:spPr>
-        <p:txBody>
-          <a:bodyPr wrap="square" lIns="25400" rIns="25400" anchor="ctr">
-            <a:spAutoFit/>
-          </a:bodyPr>
-          <a:lstStyle/>
-          <a:p>
-            <a:pPr algn="l">
-              <a:defRPr sz="1400" b="0">
-                <a:solidFill>
-                  <a:srgbClr val="DCEBF1"/>
-                </a:solidFill>
-                <a:latin typeface="Apple SD Gothic Neo"/>
-              </a:defRPr>
-            </a:pPr>
-            <a:r>
-              <a:t>더 긴 기간과 다른 연도 데이터 검증</a:t>
-            </a:r>
-          </a:p>
-        </p:txBody>
-      </p:sp>
-      <p:sp>
-        <p:nvSpPr>
-          <p:cNvPr id="25" name="TextBox 24"/>
+              <a:t>그래프와 수치를 함께 읽어야 모델의 실제 성능을 판단할 수 있습니다.</a:t>
+            </a:r>
+          </a:p>
+        </p:txBody>
+      </p:sp>
+      <p:sp>
+        <p:nvSpPr>
+          <p:cNvPr id="36" name="TextBox 35"/>
           <p:cNvSpPr txBox="1"/>
           <p:nvPr/>
         </p:nvSpPr>
@@ -11674,7 +13174,7 @@
       </p:sp>
       <p:sp>
         <p:nvSpPr>
-          <p:cNvPr id="26" name="TextBox 25"/>
+          <p:cNvPr id="37" name="TextBox 36"/>
           <p:cNvSpPr txBox="1"/>
           <p:nvPr/>
         </p:nvSpPr>
